--- a/lecons/LSA/Meteorology/19_LSA_MET_FS02_Weather_Observation_Prediction_Modification_and_Mapping.pptx
+++ b/lecons/LSA/Meteorology/19_LSA_MET_FS02_Weather_Observation_Prediction_Modification_and_Mapping.pptx
@@ -3468,7 +3468,7 @@
           <a:p>
             <a:r>
               <a:rPr lang="en-US" dirty="0"/>
-              <a:t>Before we start the new lesson, let us correct the homework I gave you at the end of Lesson 21: Mountain Climates. The question was: Compare the climate of Buea and Douala and explain two differences. Take out your exercise books.</a:t>
+              <a:t>Before we start the new lesson, let us correct the homework I gave you at the end of Lesson 21: Mountain Climates. The question was: Name one instrument of a weather station. Take out your exercise books.</a:t>
             </a:r>
             <a:endParaRPr lang="en-US" dirty="0"/>
           </a:p>
@@ -4436,7 +4436,7 @@
           <a:p>
             <a:r>
               <a:rPr lang="en-US" dirty="0"/>
-              <a:t>Here is a good answer. Buea (about 900 m) is cooler than Douala (sea level) because temperature falls with height. Buea is also often misty and cloudy, while Douala is hotter and more humid. Compare it with your own answer and correct your work in red.</a:t>
+              <a:t>Here is a good answer. A thermometer, a rain gauge, a barometer, a wind vane, an anemometer or a hygrometer (any one). Compare it with your own answer and correct your work in red.</a:t>
             </a:r>
             <a:endParaRPr lang="en-US" dirty="0"/>
           </a:p>
@@ -16059,7 +16059,7 @@
                 <a:ea typeface="Times New Roman" pitchFamily="34" charset="-122"/>
                 <a:cs typeface="Times New Roman" pitchFamily="34" charset="-120"/>
               </a:rPr>
-              <a:t>Compare the climate of Buea and Douala and explain two differences.</a:t>
+              <a:t>Name one instrument of a weather station.</a:t>
             </a:r>
             <a:endParaRPr lang="en-US" sz="4000" dirty="0"/>
           </a:p>
@@ -19027,7 +19027,7 @@
                 <a:ea typeface="Times New Roman" pitchFamily="34" charset="-122"/>
                 <a:cs typeface="Times New Roman" pitchFamily="34" charset="-120"/>
               </a:rPr>
-              <a:t>Buea (about 900 m) is cooler than Douala (sea level) because temperature falls with height. Buea is also often misty and cloudy, while Douala is hotter and more humid.</a:t>
+              <a:t>A thermometer, a rain gauge, a barometer, a wind vane, an anemometer or a hygrometer (any one).</a:t>
             </a:r>
             <a:endParaRPr lang="en-US" sz="4000" dirty="0"/>
           </a:p>

--- a/lecons/LSA/Meteorology/19_LSA_MET_FS02_Weather_Observation_Prediction_Modification_and_Mapping.pptx
+++ b/lecons/LSA/Meteorology/19_LSA_MET_FS02_Weather_Observation_Prediction_Modification_and_Mapping.pptx
@@ -68,9 +68,12 @@
     <p:sldId id="316" r:id="rId62"/>
     <p:sldId id="317" r:id="rId63"/>
     <p:sldId id="318" r:id="rId64"/>
+    <p:sldId id="319" r:id="rId65"/>
+    <p:sldId id="320" r:id="rId66"/>
+    <p:sldId id="321" r:id="rId67"/>
   </p:sldIdLst>
   <p:notesMasterIdLst>
-    <p:notesMasterId r:id="rId65"/>
+    <p:notesMasterId r:id="rId68"/>
   </p:notesMasterIdLst>
   <p:sldSz cx="12192000" cy="6858000"/>
   <p:notesSz cx="6858000" cy="12192000"/>
@@ -3292,7 +3295,7 @@
           <a:p>
             <a:r>
               <a:rPr lang="en-US" dirty="0"/>
-              <a:t>Let us copy Weather Observation. Weather is observed with the following elements and instruments. Copy the point on Weather station on the left, then draw the diagram on the right: instruments of a weather station. Give it a title and label it clearly.</a:t>
+              <a:t>Let us copy Elements Observed at a Weather Station. The main elements of weather are observed as follows. Copy the point on Temperature on the left, then draw the diagram on the right: weather instruments. Give it a title and label it clearly.</a:t>
             </a:r>
             <a:endParaRPr lang="en-US" dirty="0"/>
           </a:p>
@@ -3380,7 +3383,7 @@
           <a:p>
             <a:r>
               <a:rPr lang="en-US" dirty="0"/>
-              <a:t>We continue with Weather Observation. On this slide we have Elements and instruments. Write each point on a new line, with the key term first, and explain it in your own words when we revise. When you finish, we go to the next slide.</a:t>
+              <a:t>Copy the point on Rainfall (precipitation) on the left, then draw the diagram on the right: a rain gauge. Give it a title and label it clearly.</a:t>
             </a:r>
             <a:endParaRPr lang="en-US" dirty="0"/>
           </a:p>
@@ -3556,7 +3559,7 @@
           <a:p>
             <a:r>
               <a:rPr lang="en-US" dirty="0"/>
-              <a:t>We continue with Weather Observation. Copy this carefully.</a:t>
+              <a:t>We continue with Elements Observed at a Weather Station. Copy the point on Cloud cover: write the key term first, then its explanation.</a:t>
             </a:r>
             <a:endParaRPr lang="en-US" dirty="0"/>
           </a:p>
@@ -3644,7 +3647,7 @@
           <a:p>
             <a:r>
               <a:rPr lang="en-US" dirty="0"/>
-              <a:t>Copy the point on Radiosonde on the left, then draw the diagram on the right: a radiosonde. Give it a title and label it clearly.</a:t>
+              <a:t>Let us copy Upper-Air and Remote Observation. The upper air and large areas are observed with the following instruments. Copy the point on Radiosonde on the left, then draw the diagram on the right: a radiosonde. Give it a title and label it clearly.</a:t>
             </a:r>
             <a:endParaRPr lang="en-US" dirty="0"/>
           </a:p>
@@ -3820,7 +3823,7 @@
           <a:p>
             <a:r>
               <a:rPr lang="en-US" dirty="0"/>
-              <a:t>We continue with Weather Observation. On this slide we have Weather satellites. Write each point on a new line, with the key term first, and explain it in your own words when we revise.</a:t>
+              <a:t>We continue with Upper-Air and Remote Observation. Copy the point on Weather satellites: write the key term first, then its explanation.</a:t>
             </a:r>
             <a:endParaRPr lang="en-US" dirty="0"/>
           </a:p>
@@ -3908,7 +3911,7 @@
           <a:p>
             <a:r>
               <a:rPr lang="en-US" dirty="0"/>
-              <a:t>Let us copy Weather Prediction. Weather is predicted as follows. Copy the point on Data collection on the left, then draw the diagram on the right: elements and instruments. Give it a title and label it clearly.</a:t>
+              <a:t>Let us copy Weather Prediction. Weather is predicted in the following steps. Copy the point on Collection of data on the left, then draw the diagram on the right: weather observations. Give it a title and label it clearly.</a:t>
             </a:r>
             <a:endParaRPr lang="en-US" dirty="0"/>
           </a:p>
@@ -3996,7 +3999,7 @@
           <a:p>
             <a:r>
               <a:rPr lang="en-US" dirty="0"/>
-              <a:t>We continue with Weather Prediction. On this slide we have Numerical models and Meteorologists. Write each point on a new line, with the key term first, and explain it in your own words when we revise.</a:t>
+              <a:t>We continue with Weather Prediction. Copy the point on Numerical models: write the key term first, then its explanation.</a:t>
             </a:r>
             <a:endParaRPr lang="en-US" dirty="0"/>
           </a:p>
@@ -4084,7 +4087,7 @@
           <a:p>
             <a:r>
               <a:rPr lang="en-US" dirty="0"/>
-              <a:t>Let us copy Weather Modification. The main techniques of weather modification are the following. Copy the point on Cloud seeding on the left, then draw the diagram on the right: weather modification. Give it a title and label it clearly.</a:t>
+              <a:t>We continue with Weather Prediction. Copy the point on Forecasts for users: write the key term first, then its explanation.</a:t>
             </a:r>
             <a:endParaRPr lang="en-US" dirty="0"/>
           </a:p>
@@ -4172,7 +4175,7 @@
           <a:p>
             <a:r>
               <a:rPr lang="en-US" dirty="0"/>
-              <a:t>We continue with Weather Modification. On this slide we have Hail suppression, Fog dispersal and Hurricane modification. Write each point on a new line, with the key term first, and explain it in your own words when we revise.</a:t>
+              <a:t>Let us copy Weather Modification. People try to modify the weather by the following techniques. Copy the point on Cloud seeding on the left, then draw the diagram on the right: weather modification. Give it a title and label it clearly.</a:t>
             </a:r>
             <a:endParaRPr lang="en-US" dirty="0"/>
           </a:p>
@@ -4260,7 +4263,7 @@
           <a:p>
             <a:r>
               <a:rPr lang="en-US" dirty="0"/>
-              <a:t>Let us copy Weather Mapping: the Synoptic Chart. A synoptic chart has the following components. Copy the point on Isobars on the left, then draw the diagram on the right: symbols of a synoptic chart. Give it a title and label it clearly.</a:t>
+              <a:t>We continue with Weather Modification. Copy the point on Hail suppression: write the key term first, then its explanation.</a:t>
             </a:r>
             <a:endParaRPr lang="en-US" dirty="0"/>
           </a:p>
@@ -4348,7 +4351,7 @@
           <a:p>
             <a:r>
               <a:rPr lang="en-US" dirty="0"/>
-              <a:t>Copy the point on Pressure systems on the left, then draw the diagram on the right: a synoptic chart. Give it a title and label it clearly.</a:t>
+              <a:t>We continue with Weather Modification. Copy the point on Fog dispersal: write the key term first, then its explanation.</a:t>
             </a:r>
             <a:endParaRPr lang="en-US" dirty="0"/>
           </a:p>
@@ -4524,7 +4527,7 @@
           <a:p>
             <a:r>
               <a:rPr lang="en-US" dirty="0"/>
-              <a:t>We continue with Weather Mapping: the Synoptic Chart. On this slide we have Fronts. Write each point on a new line, with the key term first, and explain it in your own words when we revise. When you finish, we go to the next slide.</a:t>
+              <a:t>We continue with Weather Modification. Copy the point on Hurricane modification: write the key term first, then its explanation.</a:t>
             </a:r>
             <a:endParaRPr lang="en-US" dirty="0"/>
           </a:p>
@@ -4612,7 +4615,7 @@
           <a:p>
             <a:r>
               <a:rPr lang="en-US" dirty="0"/>
-              <a:t>We continue with Weather Mapping: the Synoptic Chart. On this slide we have Uses. Write each point on a new line, with the key term first, and explain it in your own words when we revise.</a:t>
+              <a:t>Let us copy Weather Mapping: the Synoptic Chart. A synoptic chart shows the weather with the following elements. Copy the point on Isobars on the left, then draw the diagram on the right: a synoptic chart. Give it a title and label it clearly.</a:t>
             </a:r>
             <a:endParaRPr lang="en-US" dirty="0"/>
           </a:p>
@@ -4700,7 +4703,7 @@
           <a:p>
             <a:r>
               <a:rPr lang="en-US" dirty="0"/>
-              <a:t>Now let us check what you have understood. Question 1: Explain how a radiosonde works. Answer in your exercise book.</a:t>
+              <a:t>We continue with Weather Mapping: the Synoptic Chart. Copy the point on Pressure systems: write the key term first, then its explanation.</a:t>
             </a:r>
             <a:endParaRPr lang="en-US" dirty="0"/>
           </a:p>
@@ -4788,7 +4791,7 @@
           <a:p>
             <a:r>
               <a:rPr lang="en-US" dirty="0"/>
-              <a:t>The expected answer is: a balloon carries instruments into the upper air; they measure temperature, humidity and pressure and send the data by radio. If you got it right, well done.</a:t>
+              <a:t>Copy the point on Fronts on the left, then draw the diagram on the right: the symbols of fronts. Give it a title and label it clearly.</a:t>
             </a:r>
             <a:endParaRPr lang="en-US" dirty="0"/>
           </a:p>
@@ -4876,7 +4879,7 @@
           <a:p>
             <a:r>
               <a:rPr lang="en-US" dirty="0"/>
-              <a:t>Now let us check what you have understood. Question 2: What is a synoptic chart and how is it used? Answer in your exercise book.</a:t>
+              <a:t>We continue with Weather Mapping: the Synoptic Chart. Copy the point on Station models and uses: write the key term first, then its explanation.</a:t>
             </a:r>
             <a:endParaRPr lang="en-US" dirty="0"/>
           </a:p>
@@ -4964,7 +4967,7 @@
           <a:p>
             <a:r>
               <a:rPr lang="en-US" dirty="0"/>
-              <a:t>The expected answer is: a weather map summarising conditions over a large area at one time; it is used to analyse and forecast the weather. If you got it right, well done.</a:t>
+              <a:t>Now let us check what you have understood. Question 1: Explain how a radiosonde works. Answer in your exercise book.</a:t>
             </a:r>
             <a:endParaRPr lang="en-US" dirty="0"/>
           </a:p>
@@ -5052,7 +5055,7 @@
           <a:p>
             <a:r>
               <a:rPr lang="en-US" dirty="0"/>
-              <a:t>For those who need more practice, fill in the blanks in your exercise book. The answers are: number 1, gauge; number 2, isobars; number 3, seeding.</a:t>
+              <a:t>The expected answer is: a balloon carries instruments into the upper air; they measure temperature, humidity and pressure and send the data by radio. If you got it right, well done.</a:t>
             </a:r>
             <a:endParaRPr lang="en-US" dirty="0"/>
           </a:p>
@@ -5140,7 +5143,7 @@
           <a:p>
             <a:r>
               <a:rPr lang="en-US" dirty="0"/>
-              <a:t>For your homework: Name the two air masses that affect the climate of Cameroon. We shall correct it at the beginning of our next lesson.</a:t>
+              <a:t>Now let us check what you have understood. Question 2: What is a synoptic chart and how is it used? Answer in your exercise book.</a:t>
             </a:r>
             <a:endParaRPr lang="en-US" dirty="0"/>
           </a:p>
@@ -5228,7 +5231,7 @@
           <a:p>
             <a:r>
               <a:rPr lang="en-US" dirty="0"/>
-              <a:t>Our next lesson will be on Further Study 3: The Climate of Cameroon. Thank you for your attention, and see you next time.</a:t>
+              <a:t>The expected answer is: a weather map summarising conditions over a large area at one time; it is used to analyse and forecast the weather. If you got it right, well done.</a:t>
             </a:r>
             <a:endParaRPr lang="en-US" dirty="0"/>
           </a:p>
@@ -5316,7 +5319,7 @@
           <a:p>
             <a:r>
               <a:rPr lang="en-US" dirty="0"/>
-              <a:t>Let us play the bilingual game. I say a word in English, and you give me the French word. Then we do the reverse.</a:t>
+              <a:t>For those who need more practice, fill in the blanks in your exercise book. The answers are: number 1, gauge; number 2, isobars; number 3, seeding.</a:t>
             </a:r>
             <a:endParaRPr lang="en-US" dirty="0"/>
           </a:p>
@@ -5492,7 +5495,7 @@
           <a:p>
             <a:r>
               <a:rPr lang="en-US" dirty="0"/>
-              <a:t>I record this information in the official logbook of the class after the lesson.</a:t>
+              <a:t>For your homework: Name the two air masses that affect the climate of Cameroon. We shall correct it at the beginning of our next lesson.</a:t>
             </a:r>
             <a:endParaRPr lang="en-US" dirty="0"/>
           </a:p>
@@ -5580,7 +5583,7 @@
           <a:p>
             <a:r>
               <a:rPr lang="en-US" dirty="0"/>
-              <a:t>I complete the second page of the logbook: the matter taught, the evaluation, the homework and the attendance.</a:t>
+              <a:t>Our next lesson will be on Further Study 3: The Climate of Cameroon. Thank you for your attention, and see you next time.</a:t>
             </a:r>
             <a:endParaRPr lang="en-US" dirty="0"/>
           </a:p>
@@ -5668,7 +5671,7 @@
           <a:p>
             <a:r>
               <a:rPr lang="en-US" dirty="0"/>
-              <a:t>This slide is for me, the teacher: it gives the timing of the lesson and what to do if the projector is not available.</a:t>
+              <a:t>Let us play the bilingual game. I say a word in English, and you give me the French word. Then we do the reverse.</a:t>
             </a:r>
             <a:endParaRPr lang="en-US" dirty="0"/>
           </a:p>
@@ -5756,7 +5759,7 @@
           <a:p>
             <a:r>
               <a:rPr lang="en-US" dirty="0"/>
-              <a:t>These are the references and picture credits used to prepare this lesson.</a:t>
+              <a:t>I record this information in the official logbook of the class after the lesson.</a:t>
             </a:r>
             <a:endParaRPr lang="en-US" dirty="0"/>
           </a:p>
@@ -5780,6 +5783,270 @@
             <a:fld id="{F7021451-1387-4CA6-816F-3879F97B5CBC}" type="slidenum">
               <a:rPr lang="en-US"/>
               <a:t>63</a:t>
+            </a:fld>
+            <a:endParaRPr lang="en-US"/>
+          </a:p>
+        </p:txBody>
+      </p:sp>
+    </p:spTree>
+    <p:extLst>
+      <p:ext uri="{BB962C8B-B14F-4D97-AF65-F5344CB8AC3E}">
+        <p14:creationId xmlns:p14="http://schemas.microsoft.com/office/powerpoint/2010/main" val="1024086991"/>
+      </p:ext>
+    </p:extLst>
+  </p:cSld>
+  <p:clrMapOvr>
+    <a:masterClrMapping/>
+  </p:clrMapOvr>
+</p:notes>
+</file>
+
+<file path=ppt/notesSlides/notesSlide64.xml><?xml version="1.0" encoding="utf-8"?>
+<p:notes xmlns:a="http://schemas.openxmlformats.org/drawingml/2006/main" xmlns:r="http://schemas.openxmlformats.org/officeDocument/2006/relationships" xmlns:p="http://schemas.openxmlformats.org/presentationml/2006/main">
+  <p:cSld>
+    <p:spTree>
+      <p:nvGrpSpPr>
+        <p:cNvPr id="1" name=""/>
+        <p:cNvGrpSpPr/>
+        <p:nvPr/>
+      </p:nvGrpSpPr>
+      <p:grpSpPr>
+        <a:xfrm>
+          <a:off x="0" y="0"/>
+          <a:ext cx="0" cy="0"/>
+          <a:chOff x="0" y="0"/>
+          <a:chExt cx="0" cy="0"/>
+        </a:xfrm>
+      </p:grpSpPr>
+      <p:sp>
+        <p:nvSpPr>
+          <p:cNvPr id="2" name="Slide Image Placeholder 1"/>
+          <p:cNvSpPr>
+            <a:spLocks noGrp="1" noRot="1" noChangeAspect="1"/>
+          </p:cNvSpPr>
+          <p:nvPr>
+            <p:ph type="sldImg"/>
+          </p:nvPr>
+        </p:nvSpPr>
+        <p:spPr/>
+      </p:sp>
+      <p:sp>
+        <p:nvSpPr>
+          <p:cNvPr id="3" name="Notes Placeholder 2"/>
+          <p:cNvSpPr>
+            <a:spLocks noGrp="1"/>
+          </p:cNvSpPr>
+          <p:nvPr>
+            <p:ph type="body" idx="1"/>
+          </p:nvPr>
+        </p:nvSpPr>
+        <p:spPr/>
+        <p:txBody>
+          <a:bodyPr/>
+          <a:lstStyle/>
+          <a:p>
+            <a:r>
+              <a:rPr lang="en-US" dirty="0"/>
+              <a:t>I complete the second page of the logbook: the matter taught, the evaluation, the homework and the attendance.</a:t>
+            </a:r>
+            <a:endParaRPr lang="en-US" dirty="0"/>
+          </a:p>
+        </p:txBody>
+      </p:sp>
+      <p:sp>
+        <p:nvSpPr>
+          <p:cNvPr id="4" name="Slide Number Placeholder 3"/>
+          <p:cNvSpPr>
+            <a:spLocks noGrp="1"/>
+          </p:cNvSpPr>
+          <p:nvPr>
+            <p:ph type="sldNum" sz="quarter" idx="10"/>
+          </p:nvPr>
+        </p:nvSpPr>
+        <p:spPr/>
+        <p:txBody>
+          <a:bodyPr/>
+          <a:lstStyle/>
+          <a:p>
+            <a:fld id="{F7021451-1387-4CA6-816F-3879F97B5CBC}" type="slidenum">
+              <a:rPr lang="en-US"/>
+              <a:t>64</a:t>
+            </a:fld>
+            <a:endParaRPr lang="en-US"/>
+          </a:p>
+        </p:txBody>
+      </p:sp>
+    </p:spTree>
+    <p:extLst>
+      <p:ext uri="{BB962C8B-B14F-4D97-AF65-F5344CB8AC3E}">
+        <p14:creationId xmlns:p14="http://schemas.microsoft.com/office/powerpoint/2010/main" val="1024086991"/>
+      </p:ext>
+    </p:extLst>
+  </p:cSld>
+  <p:clrMapOvr>
+    <a:masterClrMapping/>
+  </p:clrMapOvr>
+</p:notes>
+</file>
+
+<file path=ppt/notesSlides/notesSlide65.xml><?xml version="1.0" encoding="utf-8"?>
+<p:notes xmlns:a="http://schemas.openxmlformats.org/drawingml/2006/main" xmlns:r="http://schemas.openxmlformats.org/officeDocument/2006/relationships" xmlns:p="http://schemas.openxmlformats.org/presentationml/2006/main">
+  <p:cSld>
+    <p:spTree>
+      <p:nvGrpSpPr>
+        <p:cNvPr id="1" name=""/>
+        <p:cNvGrpSpPr/>
+        <p:nvPr/>
+      </p:nvGrpSpPr>
+      <p:grpSpPr>
+        <a:xfrm>
+          <a:off x="0" y="0"/>
+          <a:ext cx="0" cy="0"/>
+          <a:chOff x="0" y="0"/>
+          <a:chExt cx="0" cy="0"/>
+        </a:xfrm>
+      </p:grpSpPr>
+      <p:sp>
+        <p:nvSpPr>
+          <p:cNvPr id="2" name="Slide Image Placeholder 1"/>
+          <p:cNvSpPr>
+            <a:spLocks noGrp="1" noRot="1" noChangeAspect="1"/>
+          </p:cNvSpPr>
+          <p:nvPr>
+            <p:ph type="sldImg"/>
+          </p:nvPr>
+        </p:nvSpPr>
+        <p:spPr/>
+      </p:sp>
+      <p:sp>
+        <p:nvSpPr>
+          <p:cNvPr id="3" name="Notes Placeholder 2"/>
+          <p:cNvSpPr>
+            <a:spLocks noGrp="1"/>
+          </p:cNvSpPr>
+          <p:nvPr>
+            <p:ph type="body" idx="1"/>
+          </p:nvPr>
+        </p:nvSpPr>
+        <p:spPr/>
+        <p:txBody>
+          <a:bodyPr/>
+          <a:lstStyle/>
+          <a:p>
+            <a:r>
+              <a:rPr lang="en-US" dirty="0"/>
+              <a:t>This slide is for me, the teacher: it gives the timing of the lesson and what to do if the projector is not available.</a:t>
+            </a:r>
+            <a:endParaRPr lang="en-US" dirty="0"/>
+          </a:p>
+        </p:txBody>
+      </p:sp>
+      <p:sp>
+        <p:nvSpPr>
+          <p:cNvPr id="4" name="Slide Number Placeholder 3"/>
+          <p:cNvSpPr>
+            <a:spLocks noGrp="1"/>
+          </p:cNvSpPr>
+          <p:nvPr>
+            <p:ph type="sldNum" sz="quarter" idx="10"/>
+          </p:nvPr>
+        </p:nvSpPr>
+        <p:spPr/>
+        <p:txBody>
+          <a:bodyPr/>
+          <a:lstStyle/>
+          <a:p>
+            <a:fld id="{F7021451-1387-4CA6-816F-3879F97B5CBC}" type="slidenum">
+              <a:rPr lang="en-US"/>
+              <a:t>65</a:t>
+            </a:fld>
+            <a:endParaRPr lang="en-US"/>
+          </a:p>
+        </p:txBody>
+      </p:sp>
+    </p:spTree>
+    <p:extLst>
+      <p:ext uri="{BB962C8B-B14F-4D97-AF65-F5344CB8AC3E}">
+        <p14:creationId xmlns:p14="http://schemas.microsoft.com/office/powerpoint/2010/main" val="1024086991"/>
+      </p:ext>
+    </p:extLst>
+  </p:cSld>
+  <p:clrMapOvr>
+    <a:masterClrMapping/>
+  </p:clrMapOvr>
+</p:notes>
+</file>
+
+<file path=ppt/notesSlides/notesSlide66.xml><?xml version="1.0" encoding="utf-8"?>
+<p:notes xmlns:a="http://schemas.openxmlformats.org/drawingml/2006/main" xmlns:r="http://schemas.openxmlformats.org/officeDocument/2006/relationships" xmlns:p="http://schemas.openxmlformats.org/presentationml/2006/main">
+  <p:cSld>
+    <p:spTree>
+      <p:nvGrpSpPr>
+        <p:cNvPr id="1" name=""/>
+        <p:cNvGrpSpPr/>
+        <p:nvPr/>
+      </p:nvGrpSpPr>
+      <p:grpSpPr>
+        <a:xfrm>
+          <a:off x="0" y="0"/>
+          <a:ext cx="0" cy="0"/>
+          <a:chOff x="0" y="0"/>
+          <a:chExt cx="0" cy="0"/>
+        </a:xfrm>
+      </p:grpSpPr>
+      <p:sp>
+        <p:nvSpPr>
+          <p:cNvPr id="2" name="Slide Image Placeholder 1"/>
+          <p:cNvSpPr>
+            <a:spLocks noGrp="1" noRot="1" noChangeAspect="1"/>
+          </p:cNvSpPr>
+          <p:nvPr>
+            <p:ph type="sldImg"/>
+          </p:nvPr>
+        </p:nvSpPr>
+        <p:spPr/>
+      </p:sp>
+      <p:sp>
+        <p:nvSpPr>
+          <p:cNvPr id="3" name="Notes Placeholder 2"/>
+          <p:cNvSpPr>
+            <a:spLocks noGrp="1"/>
+          </p:cNvSpPr>
+          <p:nvPr>
+            <p:ph type="body" idx="1"/>
+          </p:nvPr>
+        </p:nvSpPr>
+        <p:spPr/>
+        <p:txBody>
+          <a:bodyPr/>
+          <a:lstStyle/>
+          <a:p>
+            <a:r>
+              <a:rPr lang="en-US" dirty="0"/>
+              <a:t>These are the references and picture credits used to prepare this lesson.</a:t>
+            </a:r>
+            <a:endParaRPr lang="en-US" dirty="0"/>
+          </a:p>
+        </p:txBody>
+      </p:sp>
+      <p:sp>
+        <p:nvSpPr>
+          <p:cNvPr id="4" name="Slide Number Placeholder 3"/>
+          <p:cNvSpPr>
+            <a:spLocks noGrp="1"/>
+          </p:cNvSpPr>
+          <p:nvPr>
+            <p:ph type="sldNum" sz="quarter" idx="10"/>
+          </p:nvPr>
+        </p:nvSpPr>
+        <p:spPr/>
+        <p:txBody>
+          <a:bodyPr/>
+          <a:lstStyle/>
+          <a:p>
+            <a:fld id="{F7021451-1387-4CA6-816F-3879F97B5CBC}" type="slidenum">
+              <a:rPr lang="en-US"/>
+              <a:t>66</a:t>
             </a:fld>
             <a:endParaRPr lang="en-US"/>
           </a:p>
@@ -15368,8 +15635,49 @@
         </p:nvSpPr>
         <p:spPr>
           <a:xfrm>
-            <a:off x="365760" y="1783080"/>
-            <a:ext cx="4846320" cy="4617720"/>
+            <a:off x="365760" y="1737360"/>
+            <a:ext cx="6035040" cy="457200"/>
+          </a:xfrm>
+          <a:prstGeom prst="rect">
+            <a:avLst/>
+          </a:prstGeom>
+          <a:noFill/>
+          <a:ln/>
+        </p:spPr>
+        <p:txBody>
+          <a:bodyPr wrap="square" lIns="0" tIns="0" rIns="0" bIns="0" rtlCol="0" anchor="ctr">
+            <a:normAutofit/>
+          </a:bodyPr>
+          <a:lstStyle/>
+          <a:p>
+            <a:pPr algn="l" indent="0" marL="0">
+              <a:buNone/>
+            </a:pPr>
+            <a:r>
+              <a:rPr lang="en-US" sz="3000" b="1" dirty="0">
+                <a:solidFill>
+                  <a:srgbClr val="990011"/>
+                </a:solidFill>
+                <a:latin typeface="Times New Roman" pitchFamily="34" charset="0"/>
+                <a:ea typeface="Times New Roman" pitchFamily="34" charset="-122"/>
+                <a:cs typeface="Times New Roman" pitchFamily="34" charset="-120"/>
+              </a:rPr>
+              <a:t>A) Elements Observed at a Weather Station</a:t>
+            </a:r>
+            <a:endParaRPr lang="en-US" sz="3000" dirty="0"/>
+          </a:p>
+        </p:txBody>
+      </p:sp>
+      <p:sp>
+        <p:nvSpPr>
+          <p:cNvPr id="5" name="Text 3"/>
+          <p:cNvSpPr/>
+          <p:nvPr/>
+        </p:nvSpPr>
+        <p:spPr>
+          <a:xfrm>
+            <a:off x="365760" y="2240280"/>
+            <a:ext cx="6035040" cy="4160520"/>
           </a:xfrm>
           <a:prstGeom prst="rect">
             <a:avLst/>
@@ -15388,7 +15696,7 @@
               <a:buNone/>
             </a:pPr>
             <a:r>
-              <a:rPr lang="en-US" sz="3200" i="1" dirty="0">
+              <a:rPr lang="en-US" sz="2800" i="1" dirty="0">
                 <a:solidFill>
                   <a:srgbClr val="111111"/>
                 </a:solidFill>
@@ -15396,9 +15704,9 @@
                 <a:ea typeface="Times New Roman" pitchFamily="34" charset="-122"/>
                 <a:cs typeface="Times New Roman" pitchFamily="34" charset="-120"/>
               </a:rPr>
-              <a:t>Weather is observed with the following elements and instruments:</a:t>
-            </a:r>
-            <a:endParaRPr lang="en-US" sz="3200" dirty="0"/>
+              <a:t>The main elements of weather are observed as follows:</a:t>
+            </a:r>
+            <a:endParaRPr lang="en-US" sz="2800" dirty="0"/>
           </a:p>
           <a:p>
             <a:pPr algn="l" indent="0" marL="0">
@@ -15408,7 +15716,7 @@
               <a:buNone/>
             </a:pPr>
             <a:r>
-              <a:rPr lang="en-US" sz="3200" b="1" dirty="0">
+              <a:rPr lang="en-US" sz="2800" b="1" dirty="0">
                 <a:solidFill>
                   <a:srgbClr val="111111"/>
                 </a:solidFill>
@@ -15416,7 +15724,7 @@
                 <a:ea typeface="Times New Roman" pitchFamily="34" charset="-122"/>
                 <a:cs typeface="Times New Roman" pitchFamily="34" charset="-120"/>
               </a:rPr>
-              <a:t>Weather station: </a:t>
+              <a:t>Temperature: </a:t>
             </a:r>
             <a:pPr algn="l" indent="0" marL="0">
               <a:spcAft>
@@ -15425,7 +15733,7 @@
               <a:buNone/>
             </a:pPr>
             <a:r>
-              <a:rPr lang="en-US" sz="3200" dirty="0">
+              <a:rPr lang="en-US" sz="2800" dirty="0">
                 <a:solidFill>
                   <a:srgbClr val="111111"/>
                 </a:solidFill>
@@ -15433,15 +15741,15 @@
                 <a:ea typeface="Times New Roman" pitchFamily="34" charset="-122"/>
                 <a:cs typeface="Times New Roman" pitchFamily="34" charset="-120"/>
               </a:rPr>
-              <a:t>Thermometers are kept in a white, ventilated Stevenson screen, with a rain gauge, a wind vane and an anemometer nearby.</a:t>
-            </a:r>
-            <a:endParaRPr lang="en-US" sz="3200" dirty="0"/>
+              <a:t>Temperature is measured in °C with thermometers kept in a white, ventilated Stevenson screen, 1.25 m above the ground and out of direct sunlight. Maximum and minimum thermometers give the highest and lowest temperatures of each day.</a:t>
+            </a:r>
+            <a:endParaRPr lang="en-US" sz="2800" dirty="0"/>
           </a:p>
         </p:txBody>
       </p:sp>
       <p:pic>
         <p:nvPicPr>
-          <p:cNvPr id="5" name="Image 0" descr="/home/claude/f4/img/v2/instruments_big.png">    </p:cNvPr>
+          <p:cNvPr id="6" name="Image 0" descr="/home/claude/f4/img/v2/instruments_big.png">    </p:cNvPr>
           <p:cNvPicPr>
             <a:picLocks noChangeAspect="1"/>
           </p:cNvPicPr>
@@ -15455,8 +15763,8 @@
         </p:blipFill>
         <p:spPr>
           <a:xfrm>
-            <a:off x="5349240" y="2617506"/>
-            <a:ext cx="6659575" cy="2601397"/>
+            <a:off x="6537960" y="2849678"/>
+            <a:ext cx="5470855" cy="2137053"/>
           </a:xfrm>
           <a:prstGeom prst="rect">
             <a:avLst/>
@@ -15465,14 +15773,14 @@
       </p:pic>
       <p:sp>
         <p:nvSpPr>
-          <p:cNvPr id="6" name="Text 3"/>
+          <p:cNvPr id="7" name="Text 4"/>
           <p:cNvSpPr/>
           <p:nvPr/>
         </p:nvSpPr>
         <p:spPr>
           <a:xfrm>
-            <a:off x="5349240" y="6089904"/>
-            <a:ext cx="6659575" cy="347472"/>
+            <a:off x="6537960" y="6089904"/>
+            <a:ext cx="5470855" cy="347472"/>
           </a:xfrm>
           <a:prstGeom prst="rect">
             <a:avLst/>
@@ -15496,7 +15804,7 @@
                 <a:ea typeface="Times New Roman" pitchFamily="34" charset="-122"/>
                 <a:cs typeface="Times New Roman" pitchFamily="34" charset="-120"/>
               </a:rPr>
-              <a:t>Illustration: instruments of a weather station</a:t>
+              <a:t>Illustration: weather instruments</a:t>
             </a:r>
             <a:endParaRPr lang="en-US" sz="1600" dirty="0"/>
           </a:p>
@@ -15614,9 +15922,150 @@
           </a:p>
         </p:txBody>
       </p:sp>
+      <p:sp>
+        <p:nvSpPr>
+          <p:cNvPr id="3" name="Text 1"/>
+          <p:cNvSpPr/>
+          <p:nvPr/>
+        </p:nvSpPr>
+        <p:spPr>
+          <a:xfrm>
+            <a:off x="365760" y="1005840"/>
+            <a:ext cx="11460175" cy="731520"/>
+          </a:xfrm>
+          <a:prstGeom prst="rect">
+            <a:avLst/>
+          </a:prstGeom>
+          <a:noFill/>
+          <a:ln/>
+        </p:spPr>
+        <p:txBody>
+          <a:bodyPr wrap="square" lIns="0" tIns="0" rIns="0" bIns="0" rtlCol="0" anchor="ctr">
+            <a:normAutofit/>
+          </a:bodyPr>
+          <a:lstStyle/>
+          <a:p>
+            <a:pPr algn="ctr" indent="0" marL="0">
+              <a:buNone/>
+            </a:pPr>
+            <a:r>
+              <a:rPr lang="en-US" sz="3600" b="1" dirty="0">
+                <a:solidFill>
+                  <a:srgbClr val="990011"/>
+                </a:solidFill>
+                <a:latin typeface="Times New Roman" pitchFamily="34" charset="0"/>
+                <a:ea typeface="Times New Roman" pitchFamily="34" charset="-122"/>
+                <a:cs typeface="Times New Roman" pitchFamily="34" charset="-120"/>
+              </a:rPr>
+              <a:t>1. Weather Observation</a:t>
+            </a:r>
+            <a:endParaRPr lang="en-US" sz="3600" dirty="0"/>
+          </a:p>
+        </p:txBody>
+      </p:sp>
+      <p:sp>
+        <p:nvSpPr>
+          <p:cNvPr id="4" name="Text 2"/>
+          <p:cNvSpPr/>
+          <p:nvPr/>
+        </p:nvSpPr>
+        <p:spPr>
+          <a:xfrm>
+            <a:off x="365760" y="1737360"/>
+            <a:ext cx="6035040" cy="457200"/>
+          </a:xfrm>
+          <a:prstGeom prst="rect">
+            <a:avLst/>
+          </a:prstGeom>
+          <a:noFill/>
+          <a:ln/>
+        </p:spPr>
+        <p:txBody>
+          <a:bodyPr wrap="square" lIns="0" tIns="0" rIns="0" bIns="0" rtlCol="0" anchor="ctr">
+            <a:normAutofit/>
+          </a:bodyPr>
+          <a:lstStyle/>
+          <a:p>
+            <a:pPr algn="l" indent="0" marL="0">
+              <a:buNone/>
+            </a:pPr>
+            <a:r>
+              <a:rPr lang="en-US" sz="3000" b="1" dirty="0">
+                <a:solidFill>
+                  <a:srgbClr val="990011"/>
+                </a:solidFill>
+                <a:latin typeface="Times New Roman" pitchFamily="34" charset="0"/>
+                <a:ea typeface="Times New Roman" pitchFamily="34" charset="-122"/>
+                <a:cs typeface="Times New Roman" pitchFamily="34" charset="-120"/>
+              </a:rPr>
+              <a:t>A) Elements Observed at a Weather Station</a:t>
+            </a:r>
+            <a:endParaRPr lang="en-US" sz="3000" dirty="0"/>
+          </a:p>
+        </p:txBody>
+      </p:sp>
+      <p:sp>
+        <p:nvSpPr>
+          <p:cNvPr id="5" name="Text 3"/>
+          <p:cNvSpPr/>
+          <p:nvPr/>
+        </p:nvSpPr>
+        <p:spPr>
+          <a:xfrm>
+            <a:off x="365760" y="2240280"/>
+            <a:ext cx="6035040" cy="4160520"/>
+          </a:xfrm>
+          <a:prstGeom prst="rect">
+            <a:avLst/>
+          </a:prstGeom>
+          <a:noFill/>
+          <a:ln/>
+        </p:spPr>
+        <p:txBody>
+          <a:bodyPr wrap="square" lIns="0" tIns="0" rIns="0" bIns="0" rtlCol="0" anchor="t"/>
+          <a:lstStyle/>
+          <a:p>
+            <a:pPr algn="l" indent="0" marL="0">
+              <a:spcAft>
+                <a:spcPts val="800"/>
+              </a:spcAft>
+              <a:buNone/>
+            </a:pPr>
+            <a:r>
+              <a:rPr lang="en-US" sz="3400" b="1" dirty="0">
+                <a:solidFill>
+                  <a:srgbClr val="111111"/>
+                </a:solidFill>
+                <a:latin typeface="Times New Roman" pitchFamily="34" charset="0"/>
+                <a:ea typeface="Times New Roman" pitchFamily="34" charset="-122"/>
+                <a:cs typeface="Times New Roman" pitchFamily="34" charset="-120"/>
+              </a:rPr>
+              <a:t>Rainfall (precipitation): </a:t>
+            </a:r>
+            <a:pPr algn="l" indent="0" marL="0">
+              <a:spcAft>
+                <a:spcPts val="800"/>
+              </a:spcAft>
+              <a:buNone/>
+            </a:pPr>
+            <a:r>
+              <a:rPr lang="en-US" sz="3400" dirty="0">
+                <a:solidFill>
+                  <a:srgbClr val="111111"/>
+                </a:solidFill>
+                <a:latin typeface="Times New Roman" pitchFamily="34" charset="0"/>
+                <a:ea typeface="Times New Roman" pitchFamily="34" charset="-122"/>
+                <a:cs typeface="Times New Roman" pitchFamily="34" charset="-120"/>
+              </a:rPr>
+              <a:t>Rainfall is measured in millimetres with a rain gauge placed in an open area away from trees and buildings. The water collected is measured every morning at the same time.</a:t>
+            </a:r>
+            <a:endParaRPr lang="en-US" sz="3400" dirty="0"/>
+          </a:p>
+        </p:txBody>
+      </p:sp>
       <p:pic>
         <p:nvPicPr>
-          <p:cNvPr id="3" name="Image 0" descr="/home/claude/f4/img/minesec_sheet.png">    </p:cNvPr>
+          <p:cNvPr id="6" name="Image 0" descr="/home/claude/f4/img/v2/f4_raingauge.jpg">    </p:cNvPr>
           <p:cNvPicPr>
             <a:picLocks noChangeAspect="1"/>
           </p:cNvPicPr>
@@ -15630,8 +16079,8 @@
         </p:blipFill>
         <p:spPr>
           <a:xfrm>
-            <a:off x="0" y="658368"/>
-            <a:ext cx="3840480" cy="5833872"/>
+            <a:off x="6537960" y="2400160"/>
+            <a:ext cx="5470855" cy="3036089"/>
           </a:xfrm>
           <a:prstGeom prst="rect">
             <a:avLst/>
@@ -15640,14 +16089,14 @@
       </p:pic>
       <p:sp>
         <p:nvSpPr>
-          <p:cNvPr id="4" name="Text 1"/>
+          <p:cNvPr id="7" name="Text 4"/>
           <p:cNvSpPr/>
           <p:nvPr/>
         </p:nvSpPr>
         <p:spPr>
           <a:xfrm>
-            <a:off x="4069080" y="1005840"/>
-            <a:ext cx="7802575" cy="731520"/>
+            <a:off x="6537960" y="6089904"/>
+            <a:ext cx="5470855" cy="347472"/>
           </a:xfrm>
           <a:prstGeom prst="rect">
             <a:avLst/>
@@ -15656,173 +16105,24 @@
           <a:ln/>
         </p:spPr>
         <p:txBody>
-          <a:bodyPr wrap="square" lIns="0" tIns="0" rIns="0" bIns="0" rtlCol="0" anchor="ctr">
-            <a:normAutofit/>
-          </a:bodyPr>
+          <a:bodyPr wrap="square" lIns="0" tIns="0" rIns="0" bIns="0" rtlCol="0" anchor="ctr"/>
           <a:lstStyle/>
           <a:p>
             <a:pPr algn="ctr" indent="0" marL="0">
               <a:buNone/>
             </a:pPr>
             <a:r>
-              <a:rPr lang="en-US" sz="3600" b="1" dirty="0">
-                <a:solidFill>
-                  <a:srgbClr val="990011"/>
+              <a:rPr lang="en-US" sz="1600" i="1" dirty="0">
+                <a:solidFill>
+                  <a:srgbClr val="555555"/>
                 </a:solidFill>
                 <a:latin typeface="Times New Roman" pitchFamily="34" charset="0"/>
                 <a:ea typeface="Times New Roman" pitchFamily="34" charset="-122"/>
                 <a:cs typeface="Times New Roman" pitchFamily="34" charset="-120"/>
               </a:rPr>
-              <a:t>1. Weather Observation</a:t>
-            </a:r>
-            <a:endParaRPr lang="en-US" sz="3600" dirty="0"/>
-          </a:p>
-        </p:txBody>
-      </p:sp>
-      <p:sp>
-        <p:nvSpPr>
-          <p:cNvPr id="5" name="Text 2"/>
-          <p:cNvSpPr/>
-          <p:nvPr/>
-        </p:nvSpPr>
-        <p:spPr>
-          <a:xfrm>
-            <a:off x="4069080" y="1783080"/>
-            <a:ext cx="7802575" cy="4663440"/>
-          </a:xfrm>
-          <a:prstGeom prst="rect">
-            <a:avLst/>
-          </a:prstGeom>
-          <a:noFill/>
-          <a:ln/>
-        </p:spPr>
-        <p:txBody>
-          <a:bodyPr wrap="square" lIns="0" tIns="0" rIns="0" bIns="0" rtlCol="0" anchor="t"/>
-          <a:lstStyle/>
-          <a:p>
-            <a:pPr algn="l" indent="0" marL="0">
-              <a:spcAft>
-                <a:spcPts val="800"/>
-              </a:spcAft>
-              <a:buNone/>
-            </a:pPr>
-            <a:r>
-              <a:rPr lang="en-US" sz="4000" b="1" dirty="0">
-                <a:solidFill>
-                  <a:srgbClr val="111111"/>
-                </a:solidFill>
-                <a:latin typeface="Times New Roman" pitchFamily="34" charset="0"/>
-                <a:ea typeface="Times New Roman" pitchFamily="34" charset="-122"/>
-                <a:cs typeface="Times New Roman" pitchFamily="34" charset="-120"/>
-              </a:rPr>
-              <a:t>Elements and instruments:</a:t>
-            </a:r>
-            <a:endParaRPr lang="en-US" sz="4000" dirty="0"/>
-          </a:p>
-          <a:p>
-            <a:pPr algn="l" marL="342900" indent="-342900">
-              <a:spcAft>
-                <a:spcPts val="800"/>
-              </a:spcAft>
-              <a:buSzPct val="100000"/>
-              <a:buChar char="•"/>
-            </a:pPr>
-            <a:r>
-              <a:rPr lang="en-US" sz="4000" dirty="0">
-                <a:solidFill>
-                  <a:srgbClr val="111111"/>
-                </a:solidFill>
-                <a:latin typeface="Times New Roman" pitchFamily="34" charset="0"/>
-                <a:ea typeface="Times New Roman" pitchFamily="34" charset="-122"/>
-                <a:cs typeface="Times New Roman" pitchFamily="34" charset="-120"/>
-              </a:rPr>
-              <a:t>Temperature: thermometers (°C).</a:t>
-            </a:r>
-            <a:endParaRPr lang="en-US" sz="4000" dirty="0"/>
-          </a:p>
-          <a:p>
-            <a:pPr algn="l" marL="342900" indent="-342900">
-              <a:spcAft>
-                <a:spcPts val="800"/>
-              </a:spcAft>
-              <a:buSzPct val="100000"/>
-              <a:buChar char="•"/>
-            </a:pPr>
-            <a:r>
-              <a:rPr lang="en-US" sz="4000" dirty="0">
-                <a:solidFill>
-                  <a:srgbClr val="111111"/>
-                </a:solidFill>
-                <a:latin typeface="Times New Roman" pitchFamily="34" charset="0"/>
-                <a:ea typeface="Times New Roman" pitchFamily="34" charset="-122"/>
-                <a:cs typeface="Times New Roman" pitchFamily="34" charset="-120"/>
-              </a:rPr>
-              <a:t>Rainfall: rain gauge (mm).</a:t>
-            </a:r>
-            <a:endParaRPr lang="en-US" sz="4000" dirty="0"/>
-          </a:p>
-          <a:p>
-            <a:pPr algn="l" marL="342900" indent="-342900">
-              <a:spcAft>
-                <a:spcPts val="800"/>
-              </a:spcAft>
-              <a:buSzPct val="100000"/>
-              <a:buChar char="•"/>
-            </a:pPr>
-            <a:r>
-              <a:rPr lang="en-US" sz="4000" dirty="0">
-                <a:solidFill>
-                  <a:srgbClr val="111111"/>
-                </a:solidFill>
-                <a:latin typeface="Times New Roman" pitchFamily="34" charset="0"/>
-                <a:ea typeface="Times New Roman" pitchFamily="34" charset="-122"/>
-                <a:cs typeface="Times New Roman" pitchFamily="34" charset="-120"/>
-              </a:rPr>
-              <a:t>Pressure: barometer (hPa).</a:t>
-            </a:r>
-            <a:endParaRPr lang="en-US" sz="4000" dirty="0"/>
-          </a:p>
-          <a:p>
-            <a:pPr algn="l" marL="342900" indent="-342900">
-              <a:spcAft>
-                <a:spcPts val="800"/>
-              </a:spcAft>
-              <a:buSzPct val="100000"/>
-              <a:buChar char="•"/>
-            </a:pPr>
-            <a:r>
-              <a:rPr lang="en-US" sz="4000" dirty="0">
-                <a:solidFill>
-                  <a:srgbClr val="111111"/>
-                </a:solidFill>
-                <a:latin typeface="Times New Roman" pitchFamily="34" charset="0"/>
-                <a:ea typeface="Times New Roman" pitchFamily="34" charset="-122"/>
-                <a:cs typeface="Times New Roman" pitchFamily="34" charset="-120"/>
-              </a:rPr>
-              <a:t>Wind: wind vane and anemometer.</a:t>
-            </a:r>
-            <a:endParaRPr lang="en-US" sz="4000" dirty="0"/>
-          </a:p>
-          <a:p>
-            <a:pPr algn="l" marL="342900" indent="-342900">
-              <a:spcAft>
-                <a:spcPts val="800"/>
-              </a:spcAft>
-              <a:buSzPct val="100000"/>
-              <a:buChar char="•"/>
-            </a:pPr>
-            <a:r>
-              <a:rPr lang="en-US" sz="4000" dirty="0">
-                <a:solidFill>
-                  <a:srgbClr val="111111"/>
-                </a:solidFill>
-                <a:latin typeface="Times New Roman" pitchFamily="34" charset="0"/>
-                <a:ea typeface="Times New Roman" pitchFamily="34" charset="-122"/>
-                <a:cs typeface="Times New Roman" pitchFamily="34" charset="-120"/>
-              </a:rPr>
-              <a:t>Humidity: hygrometer (%).</a:t>
-            </a:r>
-            <a:endParaRPr lang="en-US" sz="4000" dirty="0"/>
+              <a:t>Illustration: a rain gauge</a:t>
+            </a:r>
+            <a:endParaRPr lang="en-US" sz="1600" dirty="0"/>
           </a:p>
         </p:txBody>
       </p:sp>
@@ -16194,7 +16494,7 @@
         <p:spPr>
           <a:xfrm>
             <a:off x="0" y="658368"/>
-            <a:ext cx="5120640" cy="5833872"/>
+            <a:ext cx="3840480" cy="5833872"/>
           </a:xfrm>
           <a:prstGeom prst="rect">
             <a:avLst/>
@@ -16209,8 +16509,8 @@
         </p:nvSpPr>
         <p:spPr>
           <a:xfrm>
-            <a:off x="5349240" y="1005840"/>
-            <a:ext cx="6522415" cy="731520"/>
+            <a:off x="4069080" y="1005840"/>
+            <a:ext cx="7802575" cy="731520"/>
           </a:xfrm>
           <a:prstGeom prst="rect">
             <a:avLst/>
@@ -16236,7 +16536,7 @@
                 <a:ea typeface="Times New Roman" pitchFamily="34" charset="-122"/>
                 <a:cs typeface="Times New Roman" pitchFamily="34" charset="-120"/>
               </a:rPr>
-              <a:t>1. Weather Observation (continued)</a:t>
+              <a:t>1. Weather Observation</a:t>
             </a:r>
             <a:endParaRPr lang="en-US" sz="3600" dirty="0"/>
           </a:p>
@@ -16250,8 +16550,8 @@
         </p:nvSpPr>
         <p:spPr>
           <a:xfrm>
-            <a:off x="5349240" y="1783080"/>
-            <a:ext cx="6522415" cy="4663440"/>
+            <a:off x="4069080" y="1737360"/>
+            <a:ext cx="7802575" cy="457200"/>
           </a:xfrm>
           <a:prstGeom prst="rect">
             <a:avLst/>
@@ -16260,18 +16560,56 @@
           <a:ln/>
         </p:spPr>
         <p:txBody>
+          <a:bodyPr wrap="square" lIns="0" tIns="0" rIns="0" bIns="0" rtlCol="0" anchor="ctr"/>
+          <a:lstStyle/>
+          <a:p>
+            <a:pPr algn="l" indent="0" marL="0">
+              <a:buNone/>
+            </a:pPr>
+            <a:r>
+              <a:rPr lang="en-US" sz="2900" b="1" dirty="0">
+                <a:solidFill>
+                  <a:srgbClr val="990011"/>
+                </a:solidFill>
+                <a:latin typeface="Times New Roman" pitchFamily="34" charset="0"/>
+                <a:ea typeface="Times New Roman" pitchFamily="34" charset="-122"/>
+                <a:cs typeface="Times New Roman" pitchFamily="34" charset="-120"/>
+              </a:rPr>
+              <a:t>A) Elements Observed at a Weather Station</a:t>
+            </a:r>
+            <a:endParaRPr lang="en-US" sz="2900" dirty="0"/>
+          </a:p>
+        </p:txBody>
+      </p:sp>
+      <p:sp>
+        <p:nvSpPr>
+          <p:cNvPr id="6" name="Text 3"/>
+          <p:cNvSpPr/>
+          <p:nvPr/>
+        </p:nvSpPr>
+        <p:spPr>
+          <a:xfrm>
+            <a:off x="4069080" y="2240280"/>
+            <a:ext cx="7802575" cy="4206240"/>
+          </a:xfrm>
+          <a:prstGeom prst="rect">
+            <a:avLst/>
+          </a:prstGeom>
+          <a:noFill/>
+          <a:ln/>
+        </p:spPr>
+        <p:txBody>
           <a:bodyPr wrap="square" lIns="0" tIns="0" rIns="0" bIns="0" rtlCol="0" anchor="t"/>
           <a:lstStyle/>
           <a:p>
-            <a:pPr algn="l" marL="342900" indent="-342900">
+            <a:pPr algn="l" indent="0" marL="0">
               <a:spcAft>
                 <a:spcPts val="800"/>
               </a:spcAft>
-              <a:buSzPct val="100000"/>
-              <a:buChar char="•"/>
-            </a:pPr>
-            <a:r>
-              <a:rPr lang="en-US" sz="4000" dirty="0">
+              <a:buNone/>
+            </a:pPr>
+            <a:r>
+              <a:rPr lang="en-US" sz="4000" b="1" dirty="0">
                 <a:solidFill>
                   <a:srgbClr val="111111"/>
                 </a:solidFill>
@@ -16279,7 +16617,24 @@
                 <a:ea typeface="Times New Roman" pitchFamily="34" charset="-122"/>
                 <a:cs typeface="Times New Roman" pitchFamily="34" charset="-120"/>
               </a:rPr>
-              <a:t>Cloud cover: estimated in eighths (oktas).</a:t>
+              <a:t>Cloud cover: </a:t>
+            </a:r>
+            <a:pPr algn="l" indent="0" marL="0">
+              <a:spcAft>
+                <a:spcPts val="800"/>
+              </a:spcAft>
+              <a:buNone/>
+            </a:pPr>
+            <a:r>
+              <a:rPr lang="en-US" sz="4000" dirty="0">
+                <a:solidFill>
+                  <a:srgbClr val="111111"/>
+                </a:solidFill>
+                <a:latin typeface="Times New Roman" pitchFamily="34" charset="0"/>
+                <a:ea typeface="Times New Roman" pitchFamily="34" charset="-122"/>
+                <a:cs typeface="Times New Roman" pitchFamily="34" charset="-120"/>
+              </a:rPr>
+              <a:t>Cloud cover is estimated by looking at the sky and dividing it into eighths, called oktas. A sky with no clouds is 0 okta and a completely covered sky is 8 oktas.</a:t>
             </a:r>
             <a:endParaRPr lang="en-US" sz="4000" dirty="0"/>
           </a:p>
@@ -16446,8 +16801,49 @@
         </p:nvSpPr>
         <p:spPr>
           <a:xfrm>
-            <a:off x="365760" y="1783080"/>
-            <a:ext cx="4846320" cy="4617720"/>
+            <a:off x="365760" y="1737360"/>
+            <a:ext cx="6035040" cy="457200"/>
+          </a:xfrm>
+          <a:prstGeom prst="rect">
+            <a:avLst/>
+          </a:prstGeom>
+          <a:noFill/>
+          <a:ln/>
+        </p:spPr>
+        <p:txBody>
+          <a:bodyPr wrap="square" lIns="0" tIns="0" rIns="0" bIns="0" rtlCol="0" anchor="ctr">
+            <a:normAutofit/>
+          </a:bodyPr>
+          <a:lstStyle/>
+          <a:p>
+            <a:pPr algn="l" indent="0" marL="0">
+              <a:buNone/>
+            </a:pPr>
+            <a:r>
+              <a:rPr lang="en-US" sz="3000" b="1" dirty="0">
+                <a:solidFill>
+                  <a:srgbClr val="990011"/>
+                </a:solidFill>
+                <a:latin typeface="Times New Roman" pitchFamily="34" charset="0"/>
+                <a:ea typeface="Times New Roman" pitchFamily="34" charset="-122"/>
+                <a:cs typeface="Times New Roman" pitchFamily="34" charset="-120"/>
+              </a:rPr>
+              <a:t>B) Upper-Air and Remote Observation</a:t>
+            </a:r>
+            <a:endParaRPr lang="en-US" sz="3000" dirty="0"/>
+          </a:p>
+        </p:txBody>
+      </p:sp>
+      <p:sp>
+        <p:nvSpPr>
+          <p:cNvPr id="5" name="Text 3"/>
+          <p:cNvSpPr/>
+          <p:nvPr/>
+        </p:nvSpPr>
+        <p:spPr>
+          <a:xfrm>
+            <a:off x="365760" y="2240280"/>
+            <a:ext cx="6035040" cy="4160520"/>
           </a:xfrm>
           <a:prstGeom prst="rect">
             <a:avLst/>
@@ -16466,7 +16862,7 @@
               <a:buNone/>
             </a:pPr>
             <a:r>
-              <a:rPr lang="en-US" sz="3600" b="1" dirty="0">
+              <a:rPr lang="en-US" sz="2600" i="1" dirty="0">
                 <a:solidFill>
                   <a:srgbClr val="111111"/>
                 </a:solidFill>
@@ -16474,8 +16870,11 @@
                 <a:ea typeface="Times New Roman" pitchFamily="34" charset="-122"/>
                 <a:cs typeface="Times New Roman" pitchFamily="34" charset="-120"/>
               </a:rPr>
-              <a:t>Radiosonde: </a:t>
-            </a:r>
+              <a:t>The upper air and large areas are observed with the following instruments:</a:t>
+            </a:r>
+            <a:endParaRPr lang="en-US" sz="2600" dirty="0"/>
+          </a:p>
+          <a:p>
             <a:pPr algn="l" indent="0" marL="0">
               <a:spcAft>
                 <a:spcPts val="800"/>
@@ -16483,7 +16882,7 @@
               <a:buNone/>
             </a:pPr>
             <a:r>
-              <a:rPr lang="en-US" sz="3600" dirty="0">
+              <a:rPr lang="en-US" sz="2600" b="1" dirty="0">
                 <a:solidFill>
                   <a:srgbClr val="111111"/>
                 </a:solidFill>
@@ -16491,15 +16890,32 @@
                 <a:ea typeface="Times New Roman" pitchFamily="34" charset="-122"/>
                 <a:cs typeface="Times New Roman" pitchFamily="34" charset="-120"/>
               </a:rPr>
-              <a:t>A balloon carries instruments that send temperature, humidity and pressure data from the upper air by radio.</a:t>
-            </a:r>
-            <a:endParaRPr lang="en-US" sz="3600" dirty="0"/>
+              <a:t>Radiosonde: </a:t>
+            </a:r>
+            <a:pPr algn="l" indent="0" marL="0">
+              <a:spcAft>
+                <a:spcPts val="800"/>
+              </a:spcAft>
+              <a:buNone/>
+            </a:pPr>
+            <a:r>
+              <a:rPr lang="en-US" sz="2600" dirty="0">
+                <a:solidFill>
+                  <a:srgbClr val="111111"/>
+                </a:solidFill>
+                <a:latin typeface="Times New Roman" pitchFamily="34" charset="0"/>
+                <a:ea typeface="Times New Roman" pitchFamily="34" charset="-122"/>
+                <a:cs typeface="Times New Roman" pitchFamily="34" charset="-120"/>
+              </a:rPr>
+              <a:t>A radiosonde is a small box of instruments carried up to about 30 km by a balloon filled with hydrogen or helium. It sends the temperature, humidity and pressure of the upper air by radio, and tracking it gives the wind.</a:t>
+            </a:r>
+            <a:endParaRPr lang="en-US" sz="2600" dirty="0"/>
           </a:p>
         </p:txBody>
       </p:sp>
       <p:pic>
         <p:nvPicPr>
-          <p:cNvPr id="5" name="Image 0" descr="/home/claude/f4/img/v2/lsa_radiosonde.jpg">    </p:cNvPr>
+          <p:cNvPr id="6" name="Image 0" descr="/home/claude/f4/img/v2/lsa_radiosonde.jpg">    </p:cNvPr>
           <p:cNvPicPr>
             <a:picLocks noChangeAspect="1"/>
           </p:cNvPicPr>
@@ -16513,8 +16929,8 @@
         </p:blipFill>
         <p:spPr>
           <a:xfrm>
-            <a:off x="5349240" y="2071212"/>
-            <a:ext cx="6659575" cy="3693983"/>
+            <a:off x="6537960" y="2400897"/>
+            <a:ext cx="5470855" cy="3034615"/>
           </a:xfrm>
           <a:prstGeom prst="rect">
             <a:avLst/>
@@ -16523,14 +16939,14 @@
       </p:pic>
       <p:sp>
         <p:nvSpPr>
-          <p:cNvPr id="6" name="Text 3"/>
+          <p:cNvPr id="7" name="Text 4"/>
           <p:cNvSpPr/>
           <p:nvPr/>
         </p:nvSpPr>
         <p:spPr>
           <a:xfrm>
-            <a:off x="5349240" y="6089904"/>
-            <a:ext cx="6659575" cy="347472"/>
+            <a:off x="6537960" y="6089904"/>
+            <a:ext cx="5470855" cy="347472"/>
           </a:xfrm>
           <a:prstGeom prst="rect">
             <a:avLst/>
@@ -16721,8 +17137,49 @@
         </p:nvSpPr>
         <p:spPr>
           <a:xfrm>
-            <a:off x="365760" y="1783080"/>
-            <a:ext cx="4846320" cy="4617720"/>
+            <a:off x="365760" y="1737360"/>
+            <a:ext cx="6035040" cy="457200"/>
+          </a:xfrm>
+          <a:prstGeom prst="rect">
+            <a:avLst/>
+          </a:prstGeom>
+          <a:noFill/>
+          <a:ln/>
+        </p:spPr>
+        <p:txBody>
+          <a:bodyPr wrap="square" lIns="0" tIns="0" rIns="0" bIns="0" rtlCol="0" anchor="ctr">
+            <a:normAutofit/>
+          </a:bodyPr>
+          <a:lstStyle/>
+          <a:p>
+            <a:pPr algn="l" indent="0" marL="0">
+              <a:buNone/>
+            </a:pPr>
+            <a:r>
+              <a:rPr lang="en-US" sz="3000" b="1" dirty="0">
+                <a:solidFill>
+                  <a:srgbClr val="990011"/>
+                </a:solidFill>
+                <a:latin typeface="Times New Roman" pitchFamily="34" charset="0"/>
+                <a:ea typeface="Times New Roman" pitchFamily="34" charset="-122"/>
+                <a:cs typeface="Times New Roman" pitchFamily="34" charset="-120"/>
+              </a:rPr>
+              <a:t>B) Upper-Air and Remote Observation</a:t>
+            </a:r>
+            <a:endParaRPr lang="en-US" sz="3000" dirty="0"/>
+          </a:p>
+        </p:txBody>
+      </p:sp>
+      <p:sp>
+        <p:nvSpPr>
+          <p:cNvPr id="5" name="Text 3"/>
+          <p:cNvSpPr/>
+          <p:nvPr/>
+        </p:nvSpPr>
+        <p:spPr>
+          <a:xfrm>
+            <a:off x="365760" y="2240280"/>
+            <a:ext cx="6035040" cy="4160520"/>
           </a:xfrm>
           <a:prstGeom prst="rect">
             <a:avLst/>
@@ -16741,7 +17198,7 @@
               <a:buNone/>
             </a:pPr>
             <a:r>
-              <a:rPr lang="en-US" sz="3600" b="1" dirty="0">
+              <a:rPr lang="en-US" sz="3400" b="1" dirty="0">
                 <a:solidFill>
                   <a:srgbClr val="111111"/>
                 </a:solidFill>
@@ -16758,7 +17215,7 @@
               <a:buNone/>
             </a:pPr>
             <a:r>
-              <a:rPr lang="en-US" sz="3600" dirty="0">
+              <a:rPr lang="en-US" sz="3400" dirty="0">
                 <a:solidFill>
                   <a:srgbClr val="111111"/>
                 </a:solidFill>
@@ -16766,15 +17223,15 @@
                 <a:ea typeface="Times New Roman" pitchFamily="34" charset="-122"/>
                 <a:cs typeface="Times New Roman" pitchFamily="34" charset="-120"/>
               </a:rPr>
-              <a:t>It detects the intensity and movement of rain, winds and storms.</a:t>
-            </a:r>
-            <a:endParaRPr lang="en-US" sz="3600" dirty="0"/>
+              <a:t>A Doppler radar sends out radio waves that are reflected by raindrops and hailstones. It shows where it is raining, how heavily, and in which direction and how fast the storm is moving.</a:t>
+            </a:r>
+            <a:endParaRPr lang="en-US" sz="3400" dirty="0"/>
           </a:p>
         </p:txBody>
       </p:sp>
       <p:pic>
         <p:nvPicPr>
-          <p:cNvPr id="5" name="Image 0" descr="/home/claude/f4/img/v2/lsa_radar.jpg">    </p:cNvPr>
+          <p:cNvPr id="6" name="Image 0" descr="/home/claude/f4/img/v2/lsa_radar.jpg">    </p:cNvPr>
           <p:cNvPicPr>
             <a:picLocks noChangeAspect="1"/>
           </p:cNvPicPr>
@@ -16788,8 +17245,8 @@
         </p:blipFill>
         <p:spPr>
           <a:xfrm>
-            <a:off x="5349240" y="2071212"/>
-            <a:ext cx="6659575" cy="3693983"/>
+            <a:off x="6537960" y="2400897"/>
+            <a:ext cx="5470855" cy="3034615"/>
           </a:xfrm>
           <a:prstGeom prst="rect">
             <a:avLst/>
@@ -16798,14 +17255,14 @@
       </p:pic>
       <p:sp>
         <p:nvSpPr>
-          <p:cNvPr id="6" name="Text 3"/>
+          <p:cNvPr id="7" name="Text 4"/>
           <p:cNvSpPr/>
           <p:nvPr/>
         </p:nvSpPr>
         <p:spPr>
           <a:xfrm>
-            <a:off x="5349240" y="6089904"/>
-            <a:ext cx="6659575" cy="347472"/>
+            <a:off x="6537960" y="6089904"/>
+            <a:ext cx="5470855" cy="347472"/>
           </a:xfrm>
           <a:prstGeom prst="rect">
             <a:avLst/>
@@ -16964,7 +17421,7 @@
         <p:spPr>
           <a:xfrm>
             <a:off x="0" y="658368"/>
-            <a:ext cx="5120640" cy="5833872"/>
+            <a:ext cx="2468880" cy="5833872"/>
           </a:xfrm>
           <a:prstGeom prst="rect">
             <a:avLst/>
@@ -16979,8 +17436,8 @@
         </p:nvSpPr>
         <p:spPr>
           <a:xfrm>
-            <a:off x="5349240" y="1005840"/>
-            <a:ext cx="6522415" cy="731520"/>
+            <a:off x="2697480" y="1005840"/>
+            <a:ext cx="9174175" cy="731520"/>
           </a:xfrm>
           <a:prstGeom prst="rect">
             <a:avLst/>
@@ -17020,8 +17477,47 @@
         </p:nvSpPr>
         <p:spPr>
           <a:xfrm>
-            <a:off x="5349240" y="1783080"/>
-            <a:ext cx="6522415" cy="4663440"/>
+            <a:off x="2697480" y="1737360"/>
+            <a:ext cx="9174175" cy="457200"/>
+          </a:xfrm>
+          <a:prstGeom prst="rect">
+            <a:avLst/>
+          </a:prstGeom>
+          <a:noFill/>
+          <a:ln/>
+        </p:spPr>
+        <p:txBody>
+          <a:bodyPr wrap="square" lIns="0" tIns="0" rIns="0" bIns="0" rtlCol="0" anchor="ctr"/>
+          <a:lstStyle/>
+          <a:p>
+            <a:pPr algn="l" indent="0" marL="0">
+              <a:buNone/>
+            </a:pPr>
+            <a:r>
+              <a:rPr lang="en-US" sz="3200" b="1" dirty="0">
+                <a:solidFill>
+                  <a:srgbClr val="990011"/>
+                </a:solidFill>
+                <a:latin typeface="Times New Roman" pitchFamily="34" charset="0"/>
+                <a:ea typeface="Times New Roman" pitchFamily="34" charset="-122"/>
+                <a:cs typeface="Times New Roman" pitchFamily="34" charset="-120"/>
+              </a:rPr>
+              <a:t>B) Upper-Air and Remote Observation</a:t>
+            </a:r>
+            <a:endParaRPr lang="en-US" sz="3200" dirty="0"/>
+          </a:p>
+        </p:txBody>
+      </p:sp>
+      <p:sp>
+        <p:nvSpPr>
+          <p:cNvPr id="6" name="Text 3"/>
+          <p:cNvSpPr/>
+          <p:nvPr/>
+        </p:nvSpPr>
+        <p:spPr>
+          <a:xfrm>
+            <a:off x="2697480" y="2240280"/>
+            <a:ext cx="9174175" cy="4206240"/>
           </a:xfrm>
           <a:prstGeom prst="rect">
             <a:avLst/>
@@ -17040,7 +17536,7 @@
               <a:buNone/>
             </a:pPr>
             <a:r>
-              <a:rPr lang="en-US" sz="4000" b="1" dirty="0">
+              <a:rPr lang="en-US" sz="3800" b="1" dirty="0">
                 <a:solidFill>
                   <a:srgbClr val="111111"/>
                 </a:solidFill>
@@ -17057,7 +17553,7 @@
               <a:buNone/>
             </a:pPr>
             <a:r>
-              <a:rPr lang="en-US" sz="4000" dirty="0">
+              <a:rPr lang="en-US" sz="3800" dirty="0">
                 <a:solidFill>
                   <a:srgbClr val="111111"/>
                 </a:solidFill>
@@ -17065,9 +17561,9 @@
                 <a:ea typeface="Times New Roman" pitchFamily="34" charset="-122"/>
                 <a:cs typeface="Times New Roman" pitchFamily="34" charset="-120"/>
               </a:rPr>
-              <a:t>Geostationary satellites watch the same area, and polar-orbiting satellites pass over the whole Earth.</a:t>
-            </a:r>
-            <a:endParaRPr lang="en-US" sz="4000" dirty="0"/>
+              <a:t>Geostationary satellites, such as Meteosat over Africa, stay above the same place and send images every 15 minutes. Polar-orbiting satellites pass over the whole Earth and measure temperature and moisture at different heights.</a:t>
+            </a:r>
+            <a:endParaRPr lang="en-US" sz="3800" dirty="0"/>
           </a:p>
         </p:txBody>
       </p:sp>
@@ -17233,7 +17729,7 @@
         <p:spPr>
           <a:xfrm>
             <a:off x="365760" y="1783080"/>
-            <a:ext cx="4846320" cy="4617720"/>
+            <a:ext cx="6035040" cy="4617720"/>
           </a:xfrm>
           <a:prstGeom prst="rect">
             <a:avLst/>
@@ -17252,7 +17748,7 @@
               <a:buNone/>
             </a:pPr>
             <a:r>
-              <a:rPr lang="en-US" sz="3600" i="1" dirty="0">
+              <a:rPr lang="en-US" sz="2800" i="1" dirty="0">
                 <a:solidFill>
                   <a:srgbClr val="111111"/>
                 </a:solidFill>
@@ -17260,9 +17756,9 @@
                 <a:ea typeface="Times New Roman" pitchFamily="34" charset="-122"/>
                 <a:cs typeface="Times New Roman" pitchFamily="34" charset="-120"/>
               </a:rPr>
-              <a:t>Weather is predicted as follows:</a:t>
-            </a:r>
-            <a:endParaRPr lang="en-US" sz="3600" dirty="0"/>
+              <a:t>Weather is predicted in the following steps:</a:t>
+            </a:r>
+            <a:endParaRPr lang="en-US" sz="2800" dirty="0"/>
           </a:p>
           <a:p>
             <a:pPr algn="l" indent="0" marL="0">
@@ -17272,7 +17768,7 @@
               <a:buNone/>
             </a:pPr>
             <a:r>
-              <a:rPr lang="en-US" sz="3600" b="1" dirty="0">
+              <a:rPr lang="en-US" sz="2800" b="1" dirty="0">
                 <a:solidFill>
                   <a:srgbClr val="111111"/>
                 </a:solidFill>
@@ -17280,7 +17776,7 @@
                 <a:ea typeface="Times New Roman" pitchFamily="34" charset="-122"/>
                 <a:cs typeface="Times New Roman" pitchFamily="34" charset="-120"/>
               </a:rPr>
-              <a:t>Data collection: </a:t>
+              <a:t>Collection of data: </a:t>
             </a:r>
             <a:pPr algn="l" indent="0" marL="0">
               <a:spcAft>
@@ -17289,7 +17785,7 @@
               <a:buNone/>
             </a:pPr>
             <a:r>
-              <a:rPr lang="en-US" sz="3600" dirty="0">
+              <a:rPr lang="en-US" sz="2800" dirty="0">
                 <a:solidFill>
                   <a:srgbClr val="111111"/>
                 </a:solidFill>
@@ -17297,9 +17793,9 @@
                 <a:ea typeface="Times New Roman" pitchFamily="34" charset="-122"/>
                 <a:cs typeface="Times New Roman" pitchFamily="34" charset="-120"/>
               </a:rPr>
-              <a:t>Thousands of stations, balloons, radars and satellites send observations to weather centres.</a:t>
-            </a:r>
-            <a:endParaRPr lang="en-US" sz="3600" dirty="0"/>
+              <a:t>Thousands of stations, ships, balloons, radars and satellites send their observations to world weather centres several times a day. The data are exchanged between countries through the World Meteorological Organization.</a:t>
+            </a:r>
+            <a:endParaRPr lang="en-US" sz="2800" dirty="0"/>
           </a:p>
         </p:txBody>
       </p:sp>
@@ -17319,8 +17815,8 @@
         </p:blipFill>
         <p:spPr>
           <a:xfrm>
-            <a:off x="5349240" y="2617506"/>
-            <a:ext cx="6659575" cy="2601397"/>
+            <a:off x="6537960" y="2849678"/>
+            <a:ext cx="5470855" cy="2137053"/>
           </a:xfrm>
           <a:prstGeom prst="rect">
             <a:avLst/>
@@ -17335,8 +17831,8 @@
         </p:nvSpPr>
         <p:spPr>
           <a:xfrm>
-            <a:off x="5349240" y="6089904"/>
-            <a:ext cx="6659575" cy="347472"/>
+            <a:off x="6537960" y="6089904"/>
+            <a:ext cx="5470855" cy="347472"/>
           </a:xfrm>
           <a:prstGeom prst="rect">
             <a:avLst/>
@@ -17360,7 +17856,7 @@
                 <a:ea typeface="Times New Roman" pitchFamily="34" charset="-122"/>
                 <a:cs typeface="Times New Roman" pitchFamily="34" charset="-120"/>
               </a:rPr>
-              <a:t>Illustration: elements and instruments</a:t>
+              <a:t>Illustration: weather observations</a:t>
             </a:r>
             <a:endParaRPr lang="en-US" sz="1600" dirty="0"/>
           </a:p>
@@ -17495,7 +17991,7 @@
         <p:spPr>
           <a:xfrm>
             <a:off x="0" y="658368"/>
-            <a:ext cx="2468880" cy="5833872"/>
+            <a:ext cx="5120640" cy="5833872"/>
           </a:xfrm>
           <a:prstGeom prst="rect">
             <a:avLst/>
@@ -17510,8 +18006,8 @@
         </p:nvSpPr>
         <p:spPr>
           <a:xfrm>
-            <a:off x="2697480" y="1005840"/>
-            <a:ext cx="9174175" cy="731520"/>
+            <a:off x="5349240" y="1005840"/>
+            <a:ext cx="6522415" cy="731520"/>
           </a:xfrm>
           <a:prstGeom prst="rect">
             <a:avLst/>
@@ -17551,8 +18047,8 @@
         </p:nvSpPr>
         <p:spPr>
           <a:xfrm>
-            <a:off x="2697480" y="1783080"/>
-            <a:ext cx="9174175" cy="4663440"/>
+            <a:off x="5349240" y="1783080"/>
+            <a:ext cx="6522415" cy="4663440"/>
           </a:xfrm>
           <a:prstGeom prst="rect">
             <a:avLst/>
@@ -17596,44 +18092,7 @@
                 <a:ea typeface="Times New Roman" pitchFamily="34" charset="-122"/>
                 <a:cs typeface="Times New Roman" pitchFamily="34" charset="-120"/>
               </a:rPr>
-              <a:t>Computers solve equations of the atmosphere to forecast the weather days ahead.</a:t>
-            </a:r>
-            <a:endParaRPr lang="en-US" sz="4000" dirty="0"/>
-          </a:p>
-          <a:p>
-            <a:pPr algn="l" indent="0" marL="0">
-              <a:spcAft>
-                <a:spcPts val="800"/>
-              </a:spcAft>
-              <a:buNone/>
-            </a:pPr>
-            <a:r>
-              <a:rPr lang="en-US" sz="4000" b="1" dirty="0">
-                <a:solidFill>
-                  <a:srgbClr val="111111"/>
-                </a:solidFill>
-                <a:latin typeface="Times New Roman" pitchFamily="34" charset="0"/>
-                <a:ea typeface="Times New Roman" pitchFamily="34" charset="-122"/>
-                <a:cs typeface="Times New Roman" pitchFamily="34" charset="-120"/>
-              </a:rPr>
-              <a:t>Meteorologists: </a:t>
-            </a:r>
-            <a:pPr algn="l" indent="0" marL="0">
-              <a:spcAft>
-                <a:spcPts val="800"/>
-              </a:spcAft>
-              <a:buNone/>
-            </a:pPr>
-            <a:r>
-              <a:rPr lang="en-US" sz="4000" dirty="0">
-                <a:solidFill>
-                  <a:srgbClr val="111111"/>
-                </a:solidFill>
-                <a:latin typeface="Times New Roman" pitchFamily="34" charset="0"/>
-                <a:ea typeface="Times New Roman" pitchFamily="34" charset="-122"/>
-                <a:cs typeface="Times New Roman" pitchFamily="34" charset="-120"/>
-              </a:rPr>
-              <a:t>They interpret the models and inform the public, farmers, pilots and fishermen, as the National Meteorological Service of Cameroon does.</a:t>
+              <a:t>Powerful computers solve the equations of the atmosphere to calculate the future weather. Forecasts are fairly reliable for about five to seven days.</a:t>
             </a:r>
             <a:endParaRPr lang="en-US" sz="4000" dirty="0"/>
           </a:p>
@@ -17751,129 +18210,9 @@
           </a:p>
         </p:txBody>
       </p:sp>
-      <p:sp>
-        <p:nvSpPr>
-          <p:cNvPr id="3" name="Text 1"/>
-          <p:cNvSpPr/>
-          <p:nvPr/>
-        </p:nvSpPr>
-        <p:spPr>
-          <a:xfrm>
-            <a:off x="365760" y="1005840"/>
-            <a:ext cx="11460175" cy="731520"/>
-          </a:xfrm>
-          <a:prstGeom prst="rect">
-            <a:avLst/>
-          </a:prstGeom>
-          <a:noFill/>
-          <a:ln/>
-        </p:spPr>
-        <p:txBody>
-          <a:bodyPr wrap="square" lIns="0" tIns="0" rIns="0" bIns="0" rtlCol="0" anchor="ctr">
-            <a:normAutofit/>
-          </a:bodyPr>
-          <a:lstStyle/>
-          <a:p>
-            <a:pPr algn="ctr" indent="0" marL="0">
-              <a:buNone/>
-            </a:pPr>
-            <a:r>
-              <a:rPr lang="en-US" sz="3600" b="1" dirty="0">
-                <a:solidFill>
-                  <a:srgbClr val="990011"/>
-                </a:solidFill>
-                <a:latin typeface="Times New Roman" pitchFamily="34" charset="0"/>
-                <a:ea typeface="Times New Roman" pitchFamily="34" charset="-122"/>
-                <a:cs typeface="Times New Roman" pitchFamily="34" charset="-120"/>
-              </a:rPr>
-              <a:t>3. Weather Modification</a:t>
-            </a:r>
-            <a:endParaRPr lang="en-US" sz="3600" dirty="0"/>
-          </a:p>
-        </p:txBody>
-      </p:sp>
-      <p:sp>
-        <p:nvSpPr>
-          <p:cNvPr id="4" name="Text 2"/>
-          <p:cNvSpPr/>
-          <p:nvPr/>
-        </p:nvSpPr>
-        <p:spPr>
-          <a:xfrm>
-            <a:off x="365760" y="1783080"/>
-            <a:ext cx="4846320" cy="4617720"/>
-          </a:xfrm>
-          <a:prstGeom prst="rect">
-            <a:avLst/>
-          </a:prstGeom>
-          <a:noFill/>
-          <a:ln/>
-        </p:spPr>
-        <p:txBody>
-          <a:bodyPr wrap="square" lIns="0" tIns="0" rIns="0" bIns="0" rtlCol="0" anchor="t"/>
-          <a:lstStyle/>
-          <a:p>
-            <a:pPr algn="l" indent="0" marL="0">
-              <a:spcAft>
-                <a:spcPts val="800"/>
-              </a:spcAft>
-              <a:buNone/>
-            </a:pPr>
-            <a:r>
-              <a:rPr lang="en-US" sz="3600" i="1" dirty="0">
-                <a:solidFill>
-                  <a:srgbClr val="111111"/>
-                </a:solidFill>
-                <a:latin typeface="Times New Roman" pitchFamily="34" charset="0"/>
-                <a:ea typeface="Times New Roman" pitchFamily="34" charset="-122"/>
-                <a:cs typeface="Times New Roman" pitchFamily="34" charset="-120"/>
-              </a:rPr>
-              <a:t>The main techniques of weather modification are the following:</a:t>
-            </a:r>
-            <a:endParaRPr lang="en-US" sz="3600" dirty="0"/>
-          </a:p>
-          <a:p>
-            <a:pPr algn="l" indent="0" marL="0">
-              <a:spcAft>
-                <a:spcPts val="800"/>
-              </a:spcAft>
-              <a:buNone/>
-            </a:pPr>
-            <a:r>
-              <a:rPr lang="en-US" sz="3600" b="1" dirty="0">
-                <a:solidFill>
-                  <a:srgbClr val="111111"/>
-                </a:solidFill>
-                <a:latin typeface="Times New Roman" pitchFamily="34" charset="0"/>
-                <a:ea typeface="Times New Roman" pitchFamily="34" charset="-122"/>
-                <a:cs typeface="Times New Roman" pitchFamily="34" charset="-120"/>
-              </a:rPr>
-              <a:t>Cloud seeding: </a:t>
-            </a:r>
-            <a:pPr algn="l" indent="0" marL="0">
-              <a:spcAft>
-                <a:spcPts val="800"/>
-              </a:spcAft>
-              <a:buNone/>
-            </a:pPr>
-            <a:r>
-              <a:rPr lang="en-US" sz="3600" dirty="0">
-                <a:solidFill>
-                  <a:srgbClr val="111111"/>
-                </a:solidFill>
-                <a:latin typeface="Times New Roman" pitchFamily="34" charset="0"/>
-                <a:ea typeface="Times New Roman" pitchFamily="34" charset="-122"/>
-                <a:cs typeface="Times New Roman" pitchFamily="34" charset="-120"/>
-              </a:rPr>
-              <a:t>Silver iodide or dry ice is added to clouds to increase rain in dry areas.</a:t>
-            </a:r>
-            <a:endParaRPr lang="en-US" sz="3600" dirty="0"/>
-          </a:p>
-        </p:txBody>
-      </p:sp>
       <p:pic>
         <p:nvPicPr>
-          <p:cNvPr id="5" name="Image 0" descr="/home/claude/f4/img/v2/met2_modif.png">    </p:cNvPr>
+          <p:cNvPr id="3" name="Image 0" descr="/home/claude/f4/img/minesec_sheet.png">    </p:cNvPr>
           <p:cNvPicPr>
             <a:picLocks noChangeAspect="1"/>
           </p:cNvPicPr>
@@ -17887,8 +18226,8 @@
         </p:blipFill>
         <p:spPr>
           <a:xfrm>
-            <a:off x="5349240" y="2617506"/>
-            <a:ext cx="6659575" cy="2601397"/>
+            <a:off x="0" y="658368"/>
+            <a:ext cx="2468880" cy="5833872"/>
           </a:xfrm>
           <a:prstGeom prst="rect">
             <a:avLst/>
@@ -17897,14 +18236,14 @@
       </p:pic>
       <p:sp>
         <p:nvSpPr>
-          <p:cNvPr id="6" name="Text 3"/>
+          <p:cNvPr id="4" name="Text 1"/>
           <p:cNvSpPr/>
           <p:nvPr/>
         </p:nvSpPr>
         <p:spPr>
           <a:xfrm>
-            <a:off x="5349240" y="6089904"/>
-            <a:ext cx="6659575" cy="347472"/>
+            <a:off x="2697480" y="1005840"/>
+            <a:ext cx="9174175" cy="731520"/>
           </a:xfrm>
           <a:prstGeom prst="rect">
             <a:avLst/>
@@ -17913,24 +18252,85 @@
           <a:ln/>
         </p:spPr>
         <p:txBody>
-          <a:bodyPr wrap="square" lIns="0" tIns="0" rIns="0" bIns="0" rtlCol="0" anchor="ctr"/>
+          <a:bodyPr wrap="square" lIns="0" tIns="0" rIns="0" bIns="0" rtlCol="0" anchor="ctr">
+            <a:normAutofit/>
+          </a:bodyPr>
           <a:lstStyle/>
           <a:p>
             <a:pPr algn="ctr" indent="0" marL="0">
               <a:buNone/>
             </a:pPr>
             <a:r>
-              <a:rPr lang="en-US" sz="1600" i="1" dirty="0">
-                <a:solidFill>
-                  <a:srgbClr val="555555"/>
+              <a:rPr lang="en-US" sz="3600" b="1" dirty="0">
+                <a:solidFill>
+                  <a:srgbClr val="990011"/>
                 </a:solidFill>
                 <a:latin typeface="Times New Roman" pitchFamily="34" charset="0"/>
                 <a:ea typeface="Times New Roman" pitchFamily="34" charset="-122"/>
                 <a:cs typeface="Times New Roman" pitchFamily="34" charset="-120"/>
               </a:rPr>
-              <a:t>Illustration: weather modification</a:t>
-            </a:r>
-            <a:endParaRPr lang="en-US" sz="1600" dirty="0"/>
+              <a:t>2. Weather Prediction</a:t>
+            </a:r>
+            <a:endParaRPr lang="en-US" sz="3600" dirty="0"/>
+          </a:p>
+        </p:txBody>
+      </p:sp>
+      <p:sp>
+        <p:nvSpPr>
+          <p:cNvPr id="5" name="Text 2"/>
+          <p:cNvSpPr/>
+          <p:nvPr/>
+        </p:nvSpPr>
+        <p:spPr>
+          <a:xfrm>
+            <a:off x="2697480" y="1783080"/>
+            <a:ext cx="9174175" cy="4663440"/>
+          </a:xfrm>
+          <a:prstGeom prst="rect">
+            <a:avLst/>
+          </a:prstGeom>
+          <a:noFill/>
+          <a:ln/>
+        </p:spPr>
+        <p:txBody>
+          <a:bodyPr wrap="square" lIns="0" tIns="0" rIns="0" bIns="0" rtlCol="0" anchor="t"/>
+          <a:lstStyle/>
+          <a:p>
+            <a:pPr algn="l" indent="0" marL="0">
+              <a:spcAft>
+                <a:spcPts val="800"/>
+              </a:spcAft>
+              <a:buNone/>
+            </a:pPr>
+            <a:r>
+              <a:rPr lang="en-US" sz="4000" b="1" dirty="0">
+                <a:solidFill>
+                  <a:srgbClr val="111111"/>
+                </a:solidFill>
+                <a:latin typeface="Times New Roman" pitchFamily="34" charset="0"/>
+                <a:ea typeface="Times New Roman" pitchFamily="34" charset="-122"/>
+                <a:cs typeface="Times New Roman" pitchFamily="34" charset="-120"/>
+              </a:rPr>
+              <a:t>Forecasts for users: </a:t>
+            </a:r>
+            <a:pPr algn="l" indent="0" marL="0">
+              <a:spcAft>
+                <a:spcPts val="800"/>
+              </a:spcAft>
+              <a:buNone/>
+            </a:pPr>
+            <a:r>
+              <a:rPr lang="en-US" sz="4000" dirty="0">
+                <a:solidFill>
+                  <a:srgbClr val="111111"/>
+                </a:solidFill>
+                <a:latin typeface="Times New Roman" pitchFamily="34" charset="0"/>
+                <a:ea typeface="Times New Roman" pitchFamily="34" charset="-122"/>
+                <a:cs typeface="Times New Roman" pitchFamily="34" charset="-120"/>
+              </a:rPr>
+              <a:t>Meteorologists interpret the models and inform the public, farmers, pilots and fishermen. In Cameroon, this is done by the National Meteorological Service, whose forecasts help farmers to plan sowing.</a:t>
+            </a:r>
+            <a:endParaRPr lang="en-US" sz="4000" dirty="0"/>
           </a:p>
         </p:txBody>
       </p:sp>
@@ -18046,9 +18446,129 @@
           </a:p>
         </p:txBody>
       </p:sp>
+      <p:sp>
+        <p:nvSpPr>
+          <p:cNvPr id="3" name="Text 1"/>
+          <p:cNvSpPr/>
+          <p:nvPr/>
+        </p:nvSpPr>
+        <p:spPr>
+          <a:xfrm>
+            <a:off x="365760" y="1005840"/>
+            <a:ext cx="11460175" cy="731520"/>
+          </a:xfrm>
+          <a:prstGeom prst="rect">
+            <a:avLst/>
+          </a:prstGeom>
+          <a:noFill/>
+          <a:ln/>
+        </p:spPr>
+        <p:txBody>
+          <a:bodyPr wrap="square" lIns="0" tIns="0" rIns="0" bIns="0" rtlCol="0" anchor="ctr">
+            <a:normAutofit/>
+          </a:bodyPr>
+          <a:lstStyle/>
+          <a:p>
+            <a:pPr algn="ctr" indent="0" marL="0">
+              <a:buNone/>
+            </a:pPr>
+            <a:r>
+              <a:rPr lang="en-US" sz="3600" b="1" dirty="0">
+                <a:solidFill>
+                  <a:srgbClr val="990011"/>
+                </a:solidFill>
+                <a:latin typeface="Times New Roman" pitchFamily="34" charset="0"/>
+                <a:ea typeface="Times New Roman" pitchFamily="34" charset="-122"/>
+                <a:cs typeface="Times New Roman" pitchFamily="34" charset="-120"/>
+              </a:rPr>
+              <a:t>3. Weather Modification</a:t>
+            </a:r>
+            <a:endParaRPr lang="en-US" sz="3600" dirty="0"/>
+          </a:p>
+        </p:txBody>
+      </p:sp>
+      <p:sp>
+        <p:nvSpPr>
+          <p:cNvPr id="4" name="Text 2"/>
+          <p:cNvSpPr/>
+          <p:nvPr/>
+        </p:nvSpPr>
+        <p:spPr>
+          <a:xfrm>
+            <a:off x="365760" y="1783080"/>
+            <a:ext cx="6035040" cy="4617720"/>
+          </a:xfrm>
+          <a:prstGeom prst="rect">
+            <a:avLst/>
+          </a:prstGeom>
+          <a:noFill/>
+          <a:ln/>
+        </p:spPr>
+        <p:txBody>
+          <a:bodyPr wrap="square" lIns="0" tIns="0" rIns="0" bIns="0" rtlCol="0" anchor="t"/>
+          <a:lstStyle/>
+          <a:p>
+            <a:pPr algn="l" indent="0" marL="0">
+              <a:spcAft>
+                <a:spcPts val="800"/>
+              </a:spcAft>
+              <a:buNone/>
+            </a:pPr>
+            <a:r>
+              <a:rPr lang="en-US" sz="2800" i="1" dirty="0">
+                <a:solidFill>
+                  <a:srgbClr val="111111"/>
+                </a:solidFill>
+                <a:latin typeface="Times New Roman" pitchFamily="34" charset="0"/>
+                <a:ea typeface="Times New Roman" pitchFamily="34" charset="-122"/>
+                <a:cs typeface="Times New Roman" pitchFamily="34" charset="-120"/>
+              </a:rPr>
+              <a:t>People try to modify the weather by the following techniques:</a:t>
+            </a:r>
+            <a:endParaRPr lang="en-US" sz="2800" dirty="0"/>
+          </a:p>
+          <a:p>
+            <a:pPr algn="l" indent="0" marL="0">
+              <a:spcAft>
+                <a:spcPts val="800"/>
+              </a:spcAft>
+              <a:buNone/>
+            </a:pPr>
+            <a:r>
+              <a:rPr lang="en-US" sz="2800" b="1" dirty="0">
+                <a:solidFill>
+                  <a:srgbClr val="111111"/>
+                </a:solidFill>
+                <a:latin typeface="Times New Roman" pitchFamily="34" charset="0"/>
+                <a:ea typeface="Times New Roman" pitchFamily="34" charset="-122"/>
+                <a:cs typeface="Times New Roman" pitchFamily="34" charset="-120"/>
+              </a:rPr>
+              <a:t>Cloud seeding: </a:t>
+            </a:r>
+            <a:pPr algn="l" indent="0" marL="0">
+              <a:spcAft>
+                <a:spcPts val="800"/>
+              </a:spcAft>
+              <a:buNone/>
+            </a:pPr>
+            <a:r>
+              <a:rPr lang="en-US" sz="2800" dirty="0">
+                <a:solidFill>
+                  <a:srgbClr val="111111"/>
+                </a:solidFill>
+                <a:latin typeface="Times New Roman" pitchFamily="34" charset="0"/>
+                <a:ea typeface="Times New Roman" pitchFamily="34" charset="-122"/>
+                <a:cs typeface="Times New Roman" pitchFamily="34" charset="-120"/>
+              </a:rPr>
+              <a:t>Aircraft or rockets spread silver iodide or dry ice into clouds, which act as nuclei on which ice crystals and drops grow. This can increase rain or snow by about 10 %, and it is used in dry countries such as the United Arab Emirates.</a:t>
+            </a:r>
+            <a:endParaRPr lang="en-US" sz="2800" dirty="0"/>
+          </a:p>
+        </p:txBody>
+      </p:sp>
       <p:pic>
         <p:nvPicPr>
-          <p:cNvPr id="3" name="Image 0" descr="/home/claude/f4/img/minesec_sheet.png">    </p:cNvPr>
+          <p:cNvPr id="5" name="Image 0" descr="/home/claude/f4/img/v2/met2_modif.png">    </p:cNvPr>
           <p:cNvPicPr>
             <a:picLocks noChangeAspect="1"/>
           </p:cNvPicPr>
@@ -18062,8 +18582,8 @@
         </p:blipFill>
         <p:spPr>
           <a:xfrm>
-            <a:off x="0" y="658368"/>
-            <a:ext cx="3840480" cy="5833872"/>
+            <a:off x="6537960" y="2849678"/>
+            <a:ext cx="5470855" cy="2137053"/>
           </a:xfrm>
           <a:prstGeom prst="rect">
             <a:avLst/>
@@ -18072,14 +18592,14 @@
       </p:pic>
       <p:sp>
         <p:nvSpPr>
-          <p:cNvPr id="4" name="Text 1"/>
+          <p:cNvPr id="6" name="Text 3"/>
           <p:cNvSpPr/>
           <p:nvPr/>
         </p:nvSpPr>
         <p:spPr>
           <a:xfrm>
-            <a:off x="4069080" y="1005840"/>
-            <a:ext cx="7802575" cy="731520"/>
+            <a:off x="6537960" y="6089904"/>
+            <a:ext cx="5470855" cy="347472"/>
           </a:xfrm>
           <a:prstGeom prst="rect">
             <a:avLst/>
@@ -18088,159 +18608,24 @@
           <a:ln/>
         </p:spPr>
         <p:txBody>
-          <a:bodyPr wrap="square" lIns="0" tIns="0" rIns="0" bIns="0" rtlCol="0" anchor="ctr">
-            <a:normAutofit/>
-          </a:bodyPr>
+          <a:bodyPr wrap="square" lIns="0" tIns="0" rIns="0" bIns="0" rtlCol="0" anchor="ctr"/>
           <a:lstStyle/>
           <a:p>
             <a:pPr algn="ctr" indent="0" marL="0">
               <a:buNone/>
             </a:pPr>
             <a:r>
-              <a:rPr lang="en-US" sz="3600" b="1" dirty="0">
-                <a:solidFill>
-                  <a:srgbClr val="990011"/>
+              <a:rPr lang="en-US" sz="1600" i="1" dirty="0">
+                <a:solidFill>
+                  <a:srgbClr val="555555"/>
                 </a:solidFill>
                 <a:latin typeface="Times New Roman" pitchFamily="34" charset="0"/>
                 <a:ea typeface="Times New Roman" pitchFamily="34" charset="-122"/>
                 <a:cs typeface="Times New Roman" pitchFamily="34" charset="-120"/>
               </a:rPr>
-              <a:t>3. Weather Modification</a:t>
-            </a:r>
-            <a:endParaRPr lang="en-US" sz="3600" dirty="0"/>
-          </a:p>
-        </p:txBody>
-      </p:sp>
-      <p:sp>
-        <p:nvSpPr>
-          <p:cNvPr id="5" name="Text 2"/>
-          <p:cNvSpPr/>
-          <p:nvPr/>
-        </p:nvSpPr>
-        <p:spPr>
-          <a:xfrm>
-            <a:off x="4069080" y="1783080"/>
-            <a:ext cx="7802575" cy="4663440"/>
-          </a:xfrm>
-          <a:prstGeom prst="rect">
-            <a:avLst/>
-          </a:prstGeom>
-          <a:noFill/>
-          <a:ln/>
-        </p:spPr>
-        <p:txBody>
-          <a:bodyPr wrap="square" lIns="0" tIns="0" rIns="0" bIns="0" rtlCol="0" anchor="t"/>
-          <a:lstStyle/>
-          <a:p>
-            <a:pPr algn="l" indent="0" marL="0">
-              <a:spcAft>
-                <a:spcPts val="800"/>
-              </a:spcAft>
-              <a:buNone/>
-            </a:pPr>
-            <a:r>
-              <a:rPr lang="en-US" sz="4000" b="1" dirty="0">
-                <a:solidFill>
-                  <a:srgbClr val="111111"/>
-                </a:solidFill>
-                <a:latin typeface="Times New Roman" pitchFamily="34" charset="0"/>
-                <a:ea typeface="Times New Roman" pitchFamily="34" charset="-122"/>
-                <a:cs typeface="Times New Roman" pitchFamily="34" charset="-120"/>
-              </a:rPr>
-              <a:t>Hail suppression: </a:t>
-            </a:r>
-            <a:pPr algn="l" indent="0" marL="0">
-              <a:spcAft>
-                <a:spcPts val="800"/>
-              </a:spcAft>
-              <a:buNone/>
-            </a:pPr>
-            <a:r>
-              <a:rPr lang="en-US" sz="4000" dirty="0">
-                <a:solidFill>
-                  <a:srgbClr val="111111"/>
-                </a:solidFill>
-                <a:latin typeface="Times New Roman" pitchFamily="34" charset="0"/>
-                <a:ea typeface="Times New Roman" pitchFamily="34" charset="-122"/>
-                <a:cs typeface="Times New Roman" pitchFamily="34" charset="-120"/>
-              </a:rPr>
-              <a:t>Seeding keeps hailstones small to protect crops.</a:t>
-            </a:r>
-            <a:endParaRPr lang="en-US" sz="4000" dirty="0"/>
-          </a:p>
-          <a:p>
-            <a:pPr algn="l" indent="0" marL="0">
-              <a:spcAft>
-                <a:spcPts val="800"/>
-              </a:spcAft>
-              <a:buNone/>
-            </a:pPr>
-            <a:r>
-              <a:rPr lang="en-US" sz="4000" b="1" dirty="0">
-                <a:solidFill>
-                  <a:srgbClr val="111111"/>
-                </a:solidFill>
-                <a:latin typeface="Times New Roman" pitchFamily="34" charset="0"/>
-                <a:ea typeface="Times New Roman" pitchFamily="34" charset="-122"/>
-                <a:cs typeface="Times New Roman" pitchFamily="34" charset="-120"/>
-              </a:rPr>
-              <a:t>Fog dispersal: </a:t>
-            </a:r>
-            <a:pPr algn="l" indent="0" marL="0">
-              <a:spcAft>
-                <a:spcPts val="800"/>
-              </a:spcAft>
-              <a:buNone/>
-            </a:pPr>
-            <a:r>
-              <a:rPr lang="en-US" sz="4000" dirty="0">
-                <a:solidFill>
-                  <a:srgbClr val="111111"/>
-                </a:solidFill>
-                <a:latin typeface="Times New Roman" pitchFamily="34" charset="0"/>
-                <a:ea typeface="Times New Roman" pitchFamily="34" charset="-122"/>
-                <a:cs typeface="Times New Roman" pitchFamily="34" charset="-120"/>
-              </a:rPr>
-              <a:t>Heating or dry ice clears fog at airports.</a:t>
-            </a:r>
-            <a:endParaRPr lang="en-US" sz="4000" dirty="0"/>
-          </a:p>
-          <a:p>
-            <a:pPr algn="l" indent="0" marL="0">
-              <a:spcAft>
-                <a:spcPts val="800"/>
-              </a:spcAft>
-              <a:buNone/>
-            </a:pPr>
-            <a:r>
-              <a:rPr lang="en-US" sz="4000" b="1" dirty="0">
-                <a:solidFill>
-                  <a:srgbClr val="111111"/>
-                </a:solidFill>
-                <a:latin typeface="Times New Roman" pitchFamily="34" charset="0"/>
-                <a:ea typeface="Times New Roman" pitchFamily="34" charset="-122"/>
-                <a:cs typeface="Times New Roman" pitchFamily="34" charset="-120"/>
-              </a:rPr>
-              <a:t>Hurricane modification: </a:t>
-            </a:r>
-            <a:pPr algn="l" indent="0" marL="0">
-              <a:spcAft>
-                <a:spcPts val="800"/>
-              </a:spcAft>
-              <a:buNone/>
-            </a:pPr>
-            <a:r>
-              <a:rPr lang="en-US" sz="4000" dirty="0">
-                <a:solidFill>
-                  <a:srgbClr val="111111"/>
-                </a:solidFill>
-                <a:latin typeface="Times New Roman" pitchFamily="34" charset="0"/>
-                <a:ea typeface="Times New Roman" pitchFamily="34" charset="-122"/>
-                <a:cs typeface="Times New Roman" pitchFamily="34" charset="-120"/>
-              </a:rPr>
-              <a:t>It remains experimental because of the risks.</a:t>
-            </a:r>
-            <a:endParaRPr lang="en-US" sz="4000" dirty="0"/>
+              <a:t>Illustration: weather modification</a:t>
+            </a:r>
+            <a:endParaRPr lang="en-US" sz="1600" dirty="0"/>
           </a:p>
         </p:txBody>
       </p:sp>
@@ -18356,129 +18741,9 @@
           </a:p>
         </p:txBody>
       </p:sp>
-      <p:sp>
-        <p:nvSpPr>
-          <p:cNvPr id="3" name="Text 1"/>
-          <p:cNvSpPr/>
-          <p:nvPr/>
-        </p:nvSpPr>
-        <p:spPr>
-          <a:xfrm>
-            <a:off x="365760" y="1005840"/>
-            <a:ext cx="11460175" cy="731520"/>
-          </a:xfrm>
-          <a:prstGeom prst="rect">
-            <a:avLst/>
-          </a:prstGeom>
-          <a:noFill/>
-          <a:ln/>
-        </p:spPr>
-        <p:txBody>
-          <a:bodyPr wrap="square" lIns="0" tIns="0" rIns="0" bIns="0" rtlCol="0" anchor="ctr">
-            <a:normAutofit/>
-          </a:bodyPr>
-          <a:lstStyle/>
-          <a:p>
-            <a:pPr algn="ctr" indent="0" marL="0">
-              <a:buNone/>
-            </a:pPr>
-            <a:r>
-              <a:rPr lang="en-US" sz="3600" b="1" dirty="0">
-                <a:solidFill>
-                  <a:srgbClr val="990011"/>
-                </a:solidFill>
-                <a:latin typeface="Times New Roman" pitchFamily="34" charset="0"/>
-                <a:ea typeface="Times New Roman" pitchFamily="34" charset="-122"/>
-                <a:cs typeface="Times New Roman" pitchFamily="34" charset="-120"/>
-              </a:rPr>
-              <a:t>4. Weather Mapping: the Synoptic Chart</a:t>
-            </a:r>
-            <a:endParaRPr lang="en-US" sz="3600" dirty="0"/>
-          </a:p>
-        </p:txBody>
-      </p:sp>
-      <p:sp>
-        <p:nvSpPr>
-          <p:cNvPr id="4" name="Text 2"/>
-          <p:cNvSpPr/>
-          <p:nvPr/>
-        </p:nvSpPr>
-        <p:spPr>
-          <a:xfrm>
-            <a:off x="365760" y="1783080"/>
-            <a:ext cx="4846320" cy="4617720"/>
-          </a:xfrm>
-          <a:prstGeom prst="rect">
-            <a:avLst/>
-          </a:prstGeom>
-          <a:noFill/>
-          <a:ln/>
-        </p:spPr>
-        <p:txBody>
-          <a:bodyPr wrap="square" lIns="0" tIns="0" rIns="0" bIns="0" rtlCol="0" anchor="t"/>
-          <a:lstStyle/>
-          <a:p>
-            <a:pPr algn="l" indent="0" marL="0">
-              <a:spcAft>
-                <a:spcPts val="800"/>
-              </a:spcAft>
-              <a:buNone/>
-            </a:pPr>
-            <a:r>
-              <a:rPr lang="en-US" sz="3600" i="1" dirty="0">
-                <a:solidFill>
-                  <a:srgbClr val="111111"/>
-                </a:solidFill>
-                <a:latin typeface="Times New Roman" pitchFamily="34" charset="0"/>
-                <a:ea typeface="Times New Roman" pitchFamily="34" charset="-122"/>
-                <a:cs typeface="Times New Roman" pitchFamily="34" charset="-120"/>
-              </a:rPr>
-              <a:t>A synoptic chart has the following components:</a:t>
-            </a:r>
-            <a:endParaRPr lang="en-US" sz="3600" dirty="0"/>
-          </a:p>
-          <a:p>
-            <a:pPr algn="l" indent="0" marL="0">
-              <a:spcAft>
-                <a:spcPts val="800"/>
-              </a:spcAft>
-              <a:buNone/>
-            </a:pPr>
-            <a:r>
-              <a:rPr lang="en-US" sz="3600" b="1" dirty="0">
-                <a:solidFill>
-                  <a:srgbClr val="111111"/>
-                </a:solidFill>
-                <a:latin typeface="Times New Roman" pitchFamily="34" charset="0"/>
-                <a:ea typeface="Times New Roman" pitchFamily="34" charset="-122"/>
-                <a:cs typeface="Times New Roman" pitchFamily="34" charset="-120"/>
-              </a:rPr>
-              <a:t>Isobars: </a:t>
-            </a:r>
-            <a:pPr algn="l" indent="0" marL="0">
-              <a:spcAft>
-                <a:spcPts val="800"/>
-              </a:spcAft>
-              <a:buNone/>
-            </a:pPr>
-            <a:r>
-              <a:rPr lang="en-US" sz="3600" dirty="0">
-                <a:solidFill>
-                  <a:srgbClr val="111111"/>
-                </a:solidFill>
-                <a:latin typeface="Times New Roman" pitchFamily="34" charset="0"/>
-                <a:ea typeface="Times New Roman" pitchFamily="34" charset="-122"/>
-                <a:cs typeface="Times New Roman" pitchFamily="34" charset="-120"/>
-              </a:rPr>
-              <a:t>Lines of equal pressure; close isobars mean strong winds, widely spaced isobars mean calm weather.</a:t>
-            </a:r>
-            <a:endParaRPr lang="en-US" sz="3600" dirty="0"/>
-          </a:p>
-        </p:txBody>
-      </p:sp>
       <p:pic>
         <p:nvPicPr>
-          <p:cNvPr id="5" name="Image 0" descr="/home/claude/f4/img/v2/met2_fronts.png">    </p:cNvPr>
+          <p:cNvPr id="3" name="Image 0" descr="/home/claude/f4/img/minesec_sheet.png">    </p:cNvPr>
           <p:cNvPicPr>
             <a:picLocks noChangeAspect="1"/>
           </p:cNvPicPr>
@@ -18492,8 +18757,8 @@
         </p:blipFill>
         <p:spPr>
           <a:xfrm>
-            <a:off x="5349240" y="2617506"/>
-            <a:ext cx="6659575" cy="2601397"/>
+            <a:off x="0" y="658368"/>
+            <a:ext cx="3840480" cy="5833872"/>
           </a:xfrm>
           <a:prstGeom prst="rect">
             <a:avLst/>
@@ -18502,14 +18767,14 @@
       </p:pic>
       <p:sp>
         <p:nvSpPr>
-          <p:cNvPr id="6" name="Text 3"/>
+          <p:cNvPr id="4" name="Text 1"/>
           <p:cNvSpPr/>
           <p:nvPr/>
         </p:nvSpPr>
         <p:spPr>
           <a:xfrm>
-            <a:off x="5349240" y="6089904"/>
-            <a:ext cx="6659575" cy="347472"/>
+            <a:off x="4069080" y="1005840"/>
+            <a:ext cx="7802575" cy="731520"/>
           </a:xfrm>
           <a:prstGeom prst="rect">
             <a:avLst/>
@@ -18518,24 +18783,85 @@
           <a:ln/>
         </p:spPr>
         <p:txBody>
-          <a:bodyPr wrap="square" lIns="0" tIns="0" rIns="0" bIns="0" rtlCol="0" anchor="ctr"/>
+          <a:bodyPr wrap="square" lIns="0" tIns="0" rIns="0" bIns="0" rtlCol="0" anchor="ctr">
+            <a:normAutofit/>
+          </a:bodyPr>
           <a:lstStyle/>
           <a:p>
             <a:pPr algn="ctr" indent="0" marL="0">
               <a:buNone/>
             </a:pPr>
             <a:r>
-              <a:rPr lang="en-US" sz="1600" i="1" dirty="0">
-                <a:solidFill>
-                  <a:srgbClr val="555555"/>
+              <a:rPr lang="en-US" sz="3600" b="1" dirty="0">
+                <a:solidFill>
+                  <a:srgbClr val="990011"/>
                 </a:solidFill>
                 <a:latin typeface="Times New Roman" pitchFamily="34" charset="0"/>
                 <a:ea typeface="Times New Roman" pitchFamily="34" charset="-122"/>
                 <a:cs typeface="Times New Roman" pitchFamily="34" charset="-120"/>
               </a:rPr>
-              <a:t>Illustration: symbols of a synoptic chart</a:t>
-            </a:r>
-            <a:endParaRPr lang="en-US" sz="1600" dirty="0"/>
+              <a:t>3. Weather Modification</a:t>
+            </a:r>
+            <a:endParaRPr lang="en-US" sz="3600" dirty="0"/>
+          </a:p>
+        </p:txBody>
+      </p:sp>
+      <p:sp>
+        <p:nvSpPr>
+          <p:cNvPr id="5" name="Text 2"/>
+          <p:cNvSpPr/>
+          <p:nvPr/>
+        </p:nvSpPr>
+        <p:spPr>
+          <a:xfrm>
+            <a:off x="4069080" y="1783080"/>
+            <a:ext cx="7802575" cy="4663440"/>
+          </a:xfrm>
+          <a:prstGeom prst="rect">
+            <a:avLst/>
+          </a:prstGeom>
+          <a:noFill/>
+          <a:ln/>
+        </p:spPr>
+        <p:txBody>
+          <a:bodyPr wrap="square" lIns="0" tIns="0" rIns="0" bIns="0" rtlCol="0" anchor="t"/>
+          <a:lstStyle/>
+          <a:p>
+            <a:pPr algn="l" indent="0" marL="0">
+              <a:spcAft>
+                <a:spcPts val="800"/>
+              </a:spcAft>
+              <a:buNone/>
+            </a:pPr>
+            <a:r>
+              <a:rPr lang="en-US" sz="4000" b="1" dirty="0">
+                <a:solidFill>
+                  <a:srgbClr val="111111"/>
+                </a:solidFill>
+                <a:latin typeface="Times New Roman" pitchFamily="34" charset="0"/>
+                <a:ea typeface="Times New Roman" pitchFamily="34" charset="-122"/>
+                <a:cs typeface="Times New Roman" pitchFamily="34" charset="-120"/>
+              </a:rPr>
+              <a:t>Hail suppression: </a:t>
+            </a:r>
+            <a:pPr algn="l" indent="0" marL="0">
+              <a:spcAft>
+                <a:spcPts val="800"/>
+              </a:spcAft>
+              <a:buNone/>
+            </a:pPr>
+            <a:r>
+              <a:rPr lang="en-US" sz="4000" dirty="0">
+                <a:solidFill>
+                  <a:srgbClr val="111111"/>
+                </a:solidFill>
+                <a:latin typeface="Times New Roman" pitchFamily="34" charset="0"/>
+                <a:ea typeface="Times New Roman" pitchFamily="34" charset="-122"/>
+                <a:cs typeface="Times New Roman" pitchFamily="34" charset="-120"/>
+              </a:rPr>
+              <a:t>Seeding a storm cloud with many nuclei makes many small hailstones instead of a few large ones. The small stones melt before reaching the ground, which protects crops and vineyards.</a:t>
+            </a:r>
+            <a:endParaRPr lang="en-US" sz="4000" dirty="0"/>
           </a:p>
         </p:txBody>
       </p:sp>
@@ -18651,109 +18977,9 @@
           </a:p>
         </p:txBody>
       </p:sp>
-      <p:sp>
-        <p:nvSpPr>
-          <p:cNvPr id="3" name="Text 1"/>
-          <p:cNvSpPr/>
-          <p:nvPr/>
-        </p:nvSpPr>
-        <p:spPr>
-          <a:xfrm>
-            <a:off x="365760" y="1005840"/>
-            <a:ext cx="11460175" cy="731520"/>
-          </a:xfrm>
-          <a:prstGeom prst="rect">
-            <a:avLst/>
-          </a:prstGeom>
-          <a:noFill/>
-          <a:ln/>
-        </p:spPr>
-        <p:txBody>
-          <a:bodyPr wrap="square" lIns="0" tIns="0" rIns="0" bIns="0" rtlCol="0" anchor="ctr">
-            <a:normAutofit/>
-          </a:bodyPr>
-          <a:lstStyle/>
-          <a:p>
-            <a:pPr algn="ctr" indent="0" marL="0">
-              <a:buNone/>
-            </a:pPr>
-            <a:r>
-              <a:rPr lang="en-US" sz="3600" b="1" dirty="0">
-                <a:solidFill>
-                  <a:srgbClr val="990011"/>
-                </a:solidFill>
-                <a:latin typeface="Times New Roman" pitchFamily="34" charset="0"/>
-                <a:ea typeface="Times New Roman" pitchFamily="34" charset="-122"/>
-                <a:cs typeface="Times New Roman" pitchFamily="34" charset="-120"/>
-              </a:rPr>
-              <a:t>4. Weather Mapping: the Synoptic Chart</a:t>
-            </a:r>
-            <a:endParaRPr lang="en-US" sz="3600" dirty="0"/>
-          </a:p>
-        </p:txBody>
-      </p:sp>
-      <p:sp>
-        <p:nvSpPr>
-          <p:cNvPr id="4" name="Text 2"/>
-          <p:cNvSpPr/>
-          <p:nvPr/>
-        </p:nvSpPr>
-        <p:spPr>
-          <a:xfrm>
-            <a:off x="365760" y="1783080"/>
-            <a:ext cx="4846320" cy="4617720"/>
-          </a:xfrm>
-          <a:prstGeom prst="rect">
-            <a:avLst/>
-          </a:prstGeom>
-          <a:noFill/>
-          <a:ln/>
-        </p:spPr>
-        <p:txBody>
-          <a:bodyPr wrap="square" lIns="0" tIns="0" rIns="0" bIns="0" rtlCol="0" anchor="t"/>
-          <a:lstStyle/>
-          <a:p>
-            <a:pPr algn="l" indent="0" marL="0">
-              <a:spcAft>
-                <a:spcPts val="800"/>
-              </a:spcAft>
-              <a:buNone/>
-            </a:pPr>
-            <a:r>
-              <a:rPr lang="en-US" sz="3600" b="1" dirty="0">
-                <a:solidFill>
-                  <a:srgbClr val="111111"/>
-                </a:solidFill>
-                <a:latin typeface="Times New Roman" pitchFamily="34" charset="0"/>
-                <a:ea typeface="Times New Roman" pitchFamily="34" charset="-122"/>
-                <a:cs typeface="Times New Roman" pitchFamily="34" charset="-120"/>
-              </a:rPr>
-              <a:t>Pressure systems: </a:t>
-            </a:r>
-            <a:pPr algn="l" indent="0" marL="0">
-              <a:spcAft>
-                <a:spcPts val="800"/>
-              </a:spcAft>
-              <a:buNone/>
-            </a:pPr>
-            <a:r>
-              <a:rPr lang="en-US" sz="3600" dirty="0">
-                <a:solidFill>
-                  <a:srgbClr val="111111"/>
-                </a:solidFill>
-                <a:latin typeface="Times New Roman" pitchFamily="34" charset="0"/>
-                <a:ea typeface="Times New Roman" pitchFamily="34" charset="-122"/>
-                <a:cs typeface="Times New Roman" pitchFamily="34" charset="-120"/>
-              </a:rPr>
-              <a:t>H marks an anticyclone (clear, stable weather), L marks a depression (clouds and rain).</a:t>
-            </a:r>
-            <a:endParaRPr lang="en-US" sz="3600" dirty="0"/>
-          </a:p>
-        </p:txBody>
-      </p:sp>
       <p:pic>
         <p:nvPicPr>
-          <p:cNvPr id="5" name="Image 0" descr="/home/claude/f4/img/v2/synoptic_big.png">    </p:cNvPr>
+          <p:cNvPr id="3" name="Image 0" descr="/home/claude/f4/img/minesec_sheet.png">    </p:cNvPr>
           <p:cNvPicPr>
             <a:picLocks noChangeAspect="1"/>
           </p:cNvPicPr>
@@ -18767,8 +18993,8 @@
         </p:blipFill>
         <p:spPr>
           <a:xfrm>
-            <a:off x="5349240" y="2617506"/>
-            <a:ext cx="6659575" cy="2601397"/>
+            <a:off x="0" y="658368"/>
+            <a:ext cx="5120640" cy="5833872"/>
           </a:xfrm>
           <a:prstGeom prst="rect">
             <a:avLst/>
@@ -18777,14 +19003,14 @@
       </p:pic>
       <p:sp>
         <p:nvSpPr>
-          <p:cNvPr id="6" name="Text 3"/>
+          <p:cNvPr id="4" name="Text 1"/>
           <p:cNvSpPr/>
           <p:nvPr/>
         </p:nvSpPr>
         <p:spPr>
           <a:xfrm>
-            <a:off x="5349240" y="6089904"/>
-            <a:ext cx="6659575" cy="347472"/>
+            <a:off x="5349240" y="1005840"/>
+            <a:ext cx="6522415" cy="731520"/>
           </a:xfrm>
           <a:prstGeom prst="rect">
             <a:avLst/>
@@ -18793,24 +19019,85 @@
           <a:ln/>
         </p:spPr>
         <p:txBody>
-          <a:bodyPr wrap="square" lIns="0" tIns="0" rIns="0" bIns="0" rtlCol="0" anchor="ctr"/>
+          <a:bodyPr wrap="square" lIns="0" tIns="0" rIns="0" bIns="0" rtlCol="0" anchor="ctr">
+            <a:normAutofit/>
+          </a:bodyPr>
           <a:lstStyle/>
           <a:p>
             <a:pPr algn="ctr" indent="0" marL="0">
               <a:buNone/>
             </a:pPr>
             <a:r>
-              <a:rPr lang="en-US" sz="1600" i="1" dirty="0">
-                <a:solidFill>
-                  <a:srgbClr val="555555"/>
+              <a:rPr lang="en-US" sz="3600" b="1" dirty="0">
+                <a:solidFill>
+                  <a:srgbClr val="990011"/>
                 </a:solidFill>
                 <a:latin typeface="Times New Roman" pitchFamily="34" charset="0"/>
                 <a:ea typeface="Times New Roman" pitchFamily="34" charset="-122"/>
                 <a:cs typeface="Times New Roman" pitchFamily="34" charset="-120"/>
               </a:rPr>
-              <a:t>Illustration: a synoptic chart</a:t>
-            </a:r>
-            <a:endParaRPr lang="en-US" sz="1600" dirty="0"/>
+              <a:t>3. Weather Modification</a:t>
+            </a:r>
+            <a:endParaRPr lang="en-US" sz="3600" dirty="0"/>
+          </a:p>
+        </p:txBody>
+      </p:sp>
+      <p:sp>
+        <p:nvSpPr>
+          <p:cNvPr id="5" name="Text 2"/>
+          <p:cNvSpPr/>
+          <p:nvPr/>
+        </p:nvSpPr>
+        <p:spPr>
+          <a:xfrm>
+            <a:off x="5349240" y="1783080"/>
+            <a:ext cx="6522415" cy="4663440"/>
+          </a:xfrm>
+          <a:prstGeom prst="rect">
+            <a:avLst/>
+          </a:prstGeom>
+          <a:noFill/>
+          <a:ln/>
+        </p:spPr>
+        <p:txBody>
+          <a:bodyPr wrap="square" lIns="0" tIns="0" rIns="0" bIns="0" rtlCol="0" anchor="t"/>
+          <a:lstStyle/>
+          <a:p>
+            <a:pPr algn="l" indent="0" marL="0">
+              <a:spcAft>
+                <a:spcPts val="800"/>
+              </a:spcAft>
+              <a:buNone/>
+            </a:pPr>
+            <a:r>
+              <a:rPr lang="en-US" sz="4000" b="1" dirty="0">
+                <a:solidFill>
+                  <a:srgbClr val="111111"/>
+                </a:solidFill>
+                <a:latin typeface="Times New Roman" pitchFamily="34" charset="0"/>
+                <a:ea typeface="Times New Roman" pitchFamily="34" charset="-122"/>
+                <a:cs typeface="Times New Roman" pitchFamily="34" charset="-120"/>
+              </a:rPr>
+              <a:t>Fog dispersal: </a:t>
+            </a:r>
+            <a:pPr algn="l" indent="0" marL="0">
+              <a:spcAft>
+                <a:spcPts val="800"/>
+              </a:spcAft>
+              <a:buNone/>
+            </a:pPr>
+            <a:r>
+              <a:rPr lang="en-US" sz="4000" dirty="0">
+                <a:solidFill>
+                  <a:srgbClr val="111111"/>
+                </a:solidFill>
+                <a:latin typeface="Times New Roman" pitchFamily="34" charset="0"/>
+                <a:ea typeface="Times New Roman" pitchFamily="34" charset="-122"/>
+                <a:cs typeface="Times New Roman" pitchFamily="34" charset="-120"/>
+              </a:rPr>
+              <a:t>At airports, fog is cleared by seeding supercooled fog with dry ice or by heating the air with burners. This allows aircraft to land and take off safely.</a:t>
+            </a:r>
+            <a:endParaRPr lang="en-US" sz="4000" dirty="0"/>
           </a:p>
         </p:txBody>
       </p:sp>
@@ -19162,7 +19449,7 @@
         <p:spPr>
           <a:xfrm>
             <a:off x="0" y="658368"/>
-            <a:ext cx="5120640" cy="5833872"/>
+            <a:ext cx="3840480" cy="5833872"/>
           </a:xfrm>
           <a:prstGeom prst="rect">
             <a:avLst/>
@@ -19177,8 +19464,8 @@
         </p:nvSpPr>
         <p:spPr>
           <a:xfrm>
-            <a:off x="5349240" y="1005840"/>
-            <a:ext cx="6522415" cy="731520"/>
+            <a:off x="4069080" y="1005840"/>
+            <a:ext cx="7802575" cy="731520"/>
           </a:xfrm>
           <a:prstGeom prst="rect">
             <a:avLst/>
@@ -19204,7 +19491,7 @@
                 <a:ea typeface="Times New Roman" pitchFamily="34" charset="-122"/>
                 <a:cs typeface="Times New Roman" pitchFamily="34" charset="-120"/>
               </a:rPr>
-              <a:t>4. Weather Mapping: the Synoptic Chart</a:t>
+              <a:t>3. Weather Modification</a:t>
             </a:r>
             <a:endParaRPr lang="en-US" sz="3600" dirty="0"/>
           </a:p>
@@ -19218,8 +19505,8 @@
         </p:nvSpPr>
         <p:spPr>
           <a:xfrm>
-            <a:off x="5349240" y="1783080"/>
-            <a:ext cx="6522415" cy="4663440"/>
+            <a:off x="4069080" y="1783080"/>
+            <a:ext cx="7802575" cy="4663440"/>
           </a:xfrm>
           <a:prstGeom prst="rect">
             <a:avLst/>
@@ -19246,17 +19533,13 @@
                 <a:ea typeface="Times New Roman" pitchFamily="34" charset="-122"/>
                 <a:cs typeface="Times New Roman" pitchFamily="34" charset="-120"/>
               </a:rPr>
-              <a:t>Fronts:</a:t>
-            </a:r>
-            <a:endParaRPr lang="en-US" sz="4000" dirty="0"/>
-          </a:p>
-          <a:p>
-            <a:pPr algn="l" marL="342900" indent="-342900">
+              <a:t>Hurricane modification: </a:t>
+            </a:r>
+            <a:pPr algn="l" indent="0" marL="0">
               <a:spcAft>
                 <a:spcPts val="800"/>
               </a:spcAft>
-              <a:buSzPct val="100000"/>
-              <a:buChar char="•"/>
+              <a:buNone/>
             </a:pPr>
             <a:r>
               <a:rPr lang="en-US" sz="4000" dirty="0">
@@ -19267,28 +19550,7 @@
                 <a:ea typeface="Times New Roman" pitchFamily="34" charset="-122"/>
                 <a:cs typeface="Times New Roman" pitchFamily="34" charset="-120"/>
               </a:rPr>
-              <a:t>Cold front: blue line with triangles, bringing cooler air and storms.</a:t>
-            </a:r>
-            <a:endParaRPr lang="en-US" sz="4000" dirty="0"/>
-          </a:p>
-          <a:p>
-            <a:pPr algn="l" marL="342900" indent="-342900">
-              <a:spcAft>
-                <a:spcPts val="800"/>
-              </a:spcAft>
-              <a:buSzPct val="100000"/>
-              <a:buChar char="•"/>
-            </a:pPr>
-            <a:r>
-              <a:rPr lang="en-US" sz="4000" dirty="0">
-                <a:solidFill>
-                  <a:srgbClr val="111111"/>
-                </a:solidFill>
-                <a:latin typeface="Times New Roman" pitchFamily="34" charset="0"/>
-                <a:ea typeface="Times New Roman" pitchFamily="34" charset="-122"/>
-                <a:cs typeface="Times New Roman" pitchFamily="34" charset="-120"/>
-              </a:rPr>
-              <a:t>Warm front: red line with semicircles, bringing steady rain.</a:t>
+              <a:t>Scientists tried to weaken hurricanes by seeding the clouds around their eye in the Stormfury project (1962 to 1983). The results were not clear, and this technique remains experimental because of the risks.</a:t>
             </a:r>
             <a:endParaRPr lang="en-US" sz="4000" dirty="0"/>
           </a:p>
@@ -19406,9 +19668,129 @@
           </a:p>
         </p:txBody>
       </p:sp>
+      <p:sp>
+        <p:nvSpPr>
+          <p:cNvPr id="3" name="Text 1"/>
+          <p:cNvSpPr/>
+          <p:nvPr/>
+        </p:nvSpPr>
+        <p:spPr>
+          <a:xfrm>
+            <a:off x="365760" y="1005840"/>
+            <a:ext cx="11460175" cy="731520"/>
+          </a:xfrm>
+          <a:prstGeom prst="rect">
+            <a:avLst/>
+          </a:prstGeom>
+          <a:noFill/>
+          <a:ln/>
+        </p:spPr>
+        <p:txBody>
+          <a:bodyPr wrap="square" lIns="0" tIns="0" rIns="0" bIns="0" rtlCol="0" anchor="ctr">
+            <a:normAutofit/>
+          </a:bodyPr>
+          <a:lstStyle/>
+          <a:p>
+            <a:pPr algn="ctr" indent="0" marL="0">
+              <a:buNone/>
+            </a:pPr>
+            <a:r>
+              <a:rPr lang="en-US" sz="3600" b="1" dirty="0">
+                <a:solidFill>
+                  <a:srgbClr val="990011"/>
+                </a:solidFill>
+                <a:latin typeface="Times New Roman" pitchFamily="34" charset="0"/>
+                <a:ea typeface="Times New Roman" pitchFamily="34" charset="-122"/>
+                <a:cs typeface="Times New Roman" pitchFamily="34" charset="-120"/>
+              </a:rPr>
+              <a:t>4. Weather Mapping: the Synoptic Chart</a:t>
+            </a:r>
+            <a:endParaRPr lang="en-US" sz="3600" dirty="0"/>
+          </a:p>
+        </p:txBody>
+      </p:sp>
+      <p:sp>
+        <p:nvSpPr>
+          <p:cNvPr id="4" name="Text 2"/>
+          <p:cNvSpPr/>
+          <p:nvPr/>
+        </p:nvSpPr>
+        <p:spPr>
+          <a:xfrm>
+            <a:off x="365760" y="1783080"/>
+            <a:ext cx="6035040" cy="4617720"/>
+          </a:xfrm>
+          <a:prstGeom prst="rect">
+            <a:avLst/>
+          </a:prstGeom>
+          <a:noFill/>
+          <a:ln/>
+        </p:spPr>
+        <p:txBody>
+          <a:bodyPr wrap="square" lIns="0" tIns="0" rIns="0" bIns="0" rtlCol="0" anchor="t"/>
+          <a:lstStyle/>
+          <a:p>
+            <a:pPr algn="l" indent="0" marL="0">
+              <a:spcAft>
+                <a:spcPts val="800"/>
+              </a:spcAft>
+              <a:buNone/>
+            </a:pPr>
+            <a:r>
+              <a:rPr lang="en-US" sz="3200" i="1" dirty="0">
+                <a:solidFill>
+                  <a:srgbClr val="111111"/>
+                </a:solidFill>
+                <a:latin typeface="Times New Roman" pitchFamily="34" charset="0"/>
+                <a:ea typeface="Times New Roman" pitchFamily="34" charset="-122"/>
+                <a:cs typeface="Times New Roman" pitchFamily="34" charset="-120"/>
+              </a:rPr>
+              <a:t>A synoptic chart shows the weather with the following elements:</a:t>
+            </a:r>
+            <a:endParaRPr lang="en-US" sz="3200" dirty="0"/>
+          </a:p>
+          <a:p>
+            <a:pPr algn="l" indent="0" marL="0">
+              <a:spcAft>
+                <a:spcPts val="800"/>
+              </a:spcAft>
+              <a:buNone/>
+            </a:pPr>
+            <a:r>
+              <a:rPr lang="en-US" sz="3200" b="1" dirty="0">
+                <a:solidFill>
+                  <a:srgbClr val="111111"/>
+                </a:solidFill>
+                <a:latin typeface="Times New Roman" pitchFamily="34" charset="0"/>
+                <a:ea typeface="Times New Roman" pitchFamily="34" charset="-122"/>
+                <a:cs typeface="Times New Roman" pitchFamily="34" charset="-120"/>
+              </a:rPr>
+              <a:t>Isobars: </a:t>
+            </a:r>
+            <a:pPr algn="l" indent="0" marL="0">
+              <a:spcAft>
+                <a:spcPts val="800"/>
+              </a:spcAft>
+              <a:buNone/>
+            </a:pPr>
+            <a:r>
+              <a:rPr lang="en-US" sz="3200" dirty="0">
+                <a:solidFill>
+                  <a:srgbClr val="111111"/>
+                </a:solidFill>
+                <a:latin typeface="Times New Roman" pitchFamily="34" charset="0"/>
+                <a:ea typeface="Times New Roman" pitchFamily="34" charset="-122"/>
+                <a:cs typeface="Times New Roman" pitchFamily="34" charset="-120"/>
+              </a:rPr>
+              <a:t>Isobars join places with the same pressure, usually drawn every 4 hPa. Close isobars show a steep pressure gradient and strong winds, while widely spaced isobars show light winds.</a:t>
+            </a:r>
+            <a:endParaRPr lang="en-US" sz="3200" dirty="0"/>
+          </a:p>
+        </p:txBody>
+      </p:sp>
       <p:pic>
         <p:nvPicPr>
-          <p:cNvPr id="3" name="Image 0" descr="/home/claude/f4/img/minesec_sheet.png">    </p:cNvPr>
+          <p:cNvPr id="5" name="Image 0" descr="/home/claude/f4/img/v2/synoptic_big.png">    </p:cNvPr>
           <p:cNvPicPr>
             <a:picLocks noChangeAspect="1"/>
           </p:cNvPicPr>
@@ -19422,8 +19804,8 @@
         </p:blipFill>
         <p:spPr>
           <a:xfrm>
-            <a:off x="0" y="658368"/>
-            <a:ext cx="5120640" cy="5833872"/>
+            <a:off x="6537960" y="2849678"/>
+            <a:ext cx="5470855" cy="2137053"/>
           </a:xfrm>
           <a:prstGeom prst="rect">
             <a:avLst/>
@@ -19432,14 +19814,14 @@
       </p:pic>
       <p:sp>
         <p:nvSpPr>
-          <p:cNvPr id="4" name="Text 1"/>
+          <p:cNvPr id="6" name="Text 3"/>
           <p:cNvSpPr/>
           <p:nvPr/>
         </p:nvSpPr>
         <p:spPr>
           <a:xfrm>
-            <a:off x="5349240" y="1005840"/>
-            <a:ext cx="6522415" cy="731520"/>
+            <a:off x="6537960" y="6089904"/>
+            <a:ext cx="5470855" cy="347472"/>
           </a:xfrm>
           <a:prstGeom prst="rect">
             <a:avLst/>
@@ -19448,106 +19830,24 @@
           <a:ln/>
         </p:spPr>
         <p:txBody>
-          <a:bodyPr wrap="square" lIns="0" tIns="0" rIns="0" bIns="0" rtlCol="0" anchor="ctr">
-            <a:normAutofit/>
-          </a:bodyPr>
+          <a:bodyPr wrap="square" lIns="0" tIns="0" rIns="0" bIns="0" rtlCol="0" anchor="ctr"/>
           <a:lstStyle/>
           <a:p>
             <a:pPr algn="ctr" indent="0" marL="0">
               <a:buNone/>
             </a:pPr>
             <a:r>
-              <a:rPr lang="en-US" sz="3600" b="1" dirty="0">
-                <a:solidFill>
-                  <a:srgbClr val="990011"/>
+              <a:rPr lang="en-US" sz="1600" i="1" dirty="0">
+                <a:solidFill>
+                  <a:srgbClr val="555555"/>
                 </a:solidFill>
                 <a:latin typeface="Times New Roman" pitchFamily="34" charset="0"/>
                 <a:ea typeface="Times New Roman" pitchFamily="34" charset="-122"/>
                 <a:cs typeface="Times New Roman" pitchFamily="34" charset="-120"/>
               </a:rPr>
-              <a:t>4. Weather Mapping: the Synoptic Chart (continued)</a:t>
-            </a:r>
-            <a:endParaRPr lang="en-US" sz="3600" dirty="0"/>
-          </a:p>
-        </p:txBody>
-      </p:sp>
-      <p:sp>
-        <p:nvSpPr>
-          <p:cNvPr id="5" name="Text 2"/>
-          <p:cNvSpPr/>
-          <p:nvPr/>
-        </p:nvSpPr>
-        <p:spPr>
-          <a:xfrm>
-            <a:off x="5349240" y="1783080"/>
-            <a:ext cx="6522415" cy="4663440"/>
-          </a:xfrm>
-          <a:prstGeom prst="rect">
-            <a:avLst/>
-          </a:prstGeom>
-          <a:noFill/>
-          <a:ln/>
-        </p:spPr>
-        <p:txBody>
-          <a:bodyPr wrap="square" lIns="0" tIns="0" rIns="0" bIns="0" rtlCol="0" anchor="t"/>
-          <a:lstStyle/>
-          <a:p>
-            <a:pPr algn="l" marL="342900" indent="-342900">
-              <a:spcAft>
-                <a:spcPts val="800"/>
-              </a:spcAft>
-              <a:buSzPct val="100000"/>
-              <a:buChar char="•"/>
-            </a:pPr>
-            <a:r>
-              <a:rPr lang="en-US" sz="4000" dirty="0">
-                <a:solidFill>
-                  <a:srgbClr val="111111"/>
-                </a:solidFill>
-                <a:latin typeface="Times New Roman" pitchFamily="34" charset="0"/>
-                <a:ea typeface="Times New Roman" pitchFamily="34" charset="-122"/>
-                <a:cs typeface="Times New Roman" pitchFamily="34" charset="-120"/>
-              </a:rPr>
-              <a:t>Occluded front: purple line with both symbols.</a:t>
-            </a:r>
-            <a:endParaRPr lang="en-US" sz="4000" dirty="0"/>
-          </a:p>
-          <a:p>
-            <a:pPr algn="l" indent="0" marL="0">
-              <a:spcAft>
-                <a:spcPts val="800"/>
-              </a:spcAft>
-              <a:buNone/>
-            </a:pPr>
-            <a:r>
-              <a:rPr lang="en-US" sz="4000" b="1" dirty="0">
-                <a:solidFill>
-                  <a:srgbClr val="111111"/>
-                </a:solidFill>
-                <a:latin typeface="Times New Roman" pitchFamily="34" charset="0"/>
-                <a:ea typeface="Times New Roman" pitchFamily="34" charset="-122"/>
-                <a:cs typeface="Times New Roman" pitchFamily="34" charset="-120"/>
-              </a:rPr>
-              <a:t>Uses: </a:t>
-            </a:r>
-            <a:pPr algn="l" indent="0" marL="0">
-              <a:spcAft>
-                <a:spcPts val="800"/>
-              </a:spcAft>
-              <a:buNone/>
-            </a:pPr>
-            <a:r>
-              <a:rPr lang="en-US" sz="4000" dirty="0">
-                <a:solidFill>
-                  <a:srgbClr val="111111"/>
-                </a:solidFill>
-                <a:latin typeface="Times New Roman" pitchFamily="34" charset="0"/>
-                <a:ea typeface="Times New Roman" pitchFamily="34" charset="-122"/>
-                <a:cs typeface="Times New Roman" pitchFamily="34" charset="-120"/>
-              </a:rPr>
-              <a:t>Synoptic charts help to forecast weather for aviation, shipping and agriculture.</a:t>
-            </a:r>
-            <a:endParaRPr lang="en-US" sz="4000" dirty="0"/>
+              <a:t>Illustration: a synoptic chart</a:t>
+            </a:r>
+            <a:endParaRPr lang="en-US" sz="1600" dirty="0"/>
           </a:p>
         </p:txBody>
       </p:sp>
@@ -19657,7 +19957,7 @@
                 <a:ea typeface="Calibri" pitchFamily="34" charset="-122"/>
                 <a:cs typeface="Calibri" pitchFamily="34" charset="-120"/>
               </a:rPr>
-              <a:t>FORMATIVE EVALUATION</a:t>
+              <a:t>BOARD SUMMARY</a:t>
             </a:r>
             <a:endParaRPr lang="en-US" sz="1400" dirty="0"/>
           </a:p>
@@ -19722,7 +20022,7 @@
                 <a:ea typeface="Times New Roman" pitchFamily="34" charset="-122"/>
                 <a:cs typeface="Times New Roman" pitchFamily="34" charset="-120"/>
               </a:rPr>
-              <a:t>Evaluation 1</a:t>
+              <a:t>4. Weather Mapping: the Synoptic Chart</a:t>
             </a:r>
             <a:endParaRPr lang="en-US" sz="3600" dirty="0"/>
           </a:p>
@@ -19756,7 +20056,7 @@
               <a:buNone/>
             </a:pPr>
             <a:r>
-              <a:rPr lang="en-US" sz="4000" dirty="0">
+              <a:rPr lang="en-US" sz="4000" b="1" dirty="0">
                 <a:solidFill>
                   <a:srgbClr val="111111"/>
                 </a:solidFill>
@@ -19764,7 +20064,24 @@
                 <a:ea typeface="Times New Roman" pitchFamily="34" charset="-122"/>
                 <a:cs typeface="Times New Roman" pitchFamily="34" charset="-120"/>
               </a:rPr>
-              <a:t>Explain how a radiosonde works.</a:t>
+              <a:t>Pressure systems: </a:t>
+            </a:r>
+            <a:pPr algn="l" indent="0" marL="0">
+              <a:spcAft>
+                <a:spcPts val="800"/>
+              </a:spcAft>
+              <a:buNone/>
+            </a:pPr>
+            <a:r>
+              <a:rPr lang="en-US" sz="4000" dirty="0">
+                <a:solidFill>
+                  <a:srgbClr val="111111"/>
+                </a:solidFill>
+                <a:latin typeface="Times New Roman" pitchFamily="34" charset="0"/>
+                <a:ea typeface="Times New Roman" pitchFamily="34" charset="-122"/>
+                <a:cs typeface="Times New Roman" pitchFamily="34" charset="-120"/>
+              </a:rPr>
+              <a:t>The letter H marks the centre of an anticyclone, with clear and stable weather. The letter L marks a depression, with clouds, rain and strong winds.</a:t>
             </a:r>
             <a:endParaRPr lang="en-US" sz="4000" dirty="0"/>
           </a:p>
@@ -19876,15 +20193,115 @@
                 <a:ea typeface="Calibri" pitchFamily="34" charset="-122"/>
                 <a:cs typeface="Calibri" pitchFamily="34" charset="-120"/>
               </a:rPr>
-              <a:t>FORMATIVE EVALUATION</a:t>
+              <a:t>BOARD SUMMARY</a:t>
             </a:r>
             <a:endParaRPr lang="en-US" sz="1400" dirty="0"/>
+          </a:p>
+        </p:txBody>
+      </p:sp>
+      <p:sp>
+        <p:nvSpPr>
+          <p:cNvPr id="3" name="Text 1"/>
+          <p:cNvSpPr/>
+          <p:nvPr/>
+        </p:nvSpPr>
+        <p:spPr>
+          <a:xfrm>
+            <a:off x="365760" y="1005840"/>
+            <a:ext cx="11460175" cy="731520"/>
+          </a:xfrm>
+          <a:prstGeom prst="rect">
+            <a:avLst/>
+          </a:prstGeom>
+          <a:noFill/>
+          <a:ln/>
+        </p:spPr>
+        <p:txBody>
+          <a:bodyPr wrap="square" lIns="0" tIns="0" rIns="0" bIns="0" rtlCol="0" anchor="ctr">
+            <a:normAutofit/>
+          </a:bodyPr>
+          <a:lstStyle/>
+          <a:p>
+            <a:pPr algn="ctr" indent="0" marL="0">
+              <a:buNone/>
+            </a:pPr>
+            <a:r>
+              <a:rPr lang="en-US" sz="3600" b="1" dirty="0">
+                <a:solidFill>
+                  <a:srgbClr val="990011"/>
+                </a:solidFill>
+                <a:latin typeface="Times New Roman" pitchFamily="34" charset="0"/>
+                <a:ea typeface="Times New Roman" pitchFamily="34" charset="-122"/>
+                <a:cs typeface="Times New Roman" pitchFamily="34" charset="-120"/>
+              </a:rPr>
+              <a:t>4. Weather Mapping: the Synoptic Chart</a:t>
+            </a:r>
+            <a:endParaRPr lang="en-US" sz="3600" dirty="0"/>
+          </a:p>
+        </p:txBody>
+      </p:sp>
+      <p:sp>
+        <p:nvSpPr>
+          <p:cNvPr id="4" name="Text 2"/>
+          <p:cNvSpPr/>
+          <p:nvPr/>
+        </p:nvSpPr>
+        <p:spPr>
+          <a:xfrm>
+            <a:off x="365760" y="1783080"/>
+            <a:ext cx="6035040" cy="4617720"/>
+          </a:xfrm>
+          <a:prstGeom prst="rect">
+            <a:avLst/>
+          </a:prstGeom>
+          <a:noFill/>
+          <a:ln/>
+        </p:spPr>
+        <p:txBody>
+          <a:bodyPr wrap="square" lIns="0" tIns="0" rIns="0" bIns="0" rtlCol="0" anchor="t"/>
+          <a:lstStyle/>
+          <a:p>
+            <a:pPr algn="l" indent="0" marL="0">
+              <a:spcAft>
+                <a:spcPts val="800"/>
+              </a:spcAft>
+              <a:buNone/>
+            </a:pPr>
+            <a:r>
+              <a:rPr lang="en-US" sz="3600" b="1" dirty="0">
+                <a:solidFill>
+                  <a:srgbClr val="111111"/>
+                </a:solidFill>
+                <a:latin typeface="Times New Roman" pitchFamily="34" charset="0"/>
+                <a:ea typeface="Times New Roman" pitchFamily="34" charset="-122"/>
+                <a:cs typeface="Times New Roman" pitchFamily="34" charset="-120"/>
+              </a:rPr>
+              <a:t>Fronts: </a:t>
+            </a:r>
+            <a:pPr algn="l" indent="0" marL="0">
+              <a:spcAft>
+                <a:spcPts val="800"/>
+              </a:spcAft>
+              <a:buNone/>
+            </a:pPr>
+            <a:r>
+              <a:rPr lang="en-US" sz="3600" dirty="0">
+                <a:solidFill>
+                  <a:srgbClr val="111111"/>
+                </a:solidFill>
+                <a:latin typeface="Times New Roman" pitchFamily="34" charset="0"/>
+                <a:ea typeface="Times New Roman" pitchFamily="34" charset="-122"/>
+                <a:cs typeface="Times New Roman" pitchFamily="34" charset="-120"/>
+              </a:rPr>
+              <a:t>A cold front is a blue line with triangles and brings cooler air and heavy showers. A warm front is a red line with semicircles and brings steady rain, and an occluded front is a purple line with both symbols.</a:t>
+            </a:r>
+            <a:endParaRPr lang="en-US" sz="3600" dirty="0"/>
           </a:p>
         </p:txBody>
       </p:sp>
       <p:pic>
         <p:nvPicPr>
-          <p:cNvPr id="3" name="Image 0" descr="/home/claude/f4/img/minesec_sheet.png">    </p:cNvPr>
+          <p:cNvPr id="5" name="Image 0" descr="/home/claude/f4/img/v2/met2_fronts.png">    </p:cNvPr>
           <p:cNvPicPr>
             <a:picLocks noChangeAspect="1"/>
           </p:cNvPicPr>
@@ -19898,8 +20315,8 @@
         </p:blipFill>
         <p:spPr>
           <a:xfrm>
-            <a:off x="0" y="658368"/>
-            <a:ext cx="5120640" cy="5833872"/>
+            <a:off x="6537960" y="2849678"/>
+            <a:ext cx="5470855" cy="2137053"/>
           </a:xfrm>
           <a:prstGeom prst="rect">
             <a:avLst/>
@@ -19908,14 +20325,14 @@
       </p:pic>
       <p:sp>
         <p:nvSpPr>
-          <p:cNvPr id="4" name="Text 1"/>
+          <p:cNvPr id="6" name="Text 3"/>
           <p:cNvSpPr/>
           <p:nvPr/>
         </p:nvSpPr>
         <p:spPr>
           <a:xfrm>
-            <a:off x="5349240" y="1005840"/>
-            <a:ext cx="6522415" cy="731520"/>
+            <a:off x="6537960" y="6089904"/>
+            <a:ext cx="5470855" cy="347472"/>
           </a:xfrm>
           <a:prstGeom prst="rect">
             <a:avLst/>
@@ -19924,68 +20341,24 @@
           <a:ln/>
         </p:spPr>
         <p:txBody>
-          <a:bodyPr wrap="square" lIns="0" tIns="0" rIns="0" bIns="0" rtlCol="0" anchor="ctr">
-            <a:normAutofit/>
-          </a:bodyPr>
+          <a:bodyPr wrap="square" lIns="0" tIns="0" rIns="0" bIns="0" rtlCol="0" anchor="ctr"/>
           <a:lstStyle/>
           <a:p>
             <a:pPr algn="ctr" indent="0" marL="0">
               <a:buNone/>
             </a:pPr>
             <a:r>
-              <a:rPr lang="en-US" sz="3600" b="1" dirty="0">
-                <a:solidFill>
-                  <a:srgbClr val="990011"/>
+              <a:rPr lang="en-US" sz="1600" i="1" dirty="0">
+                <a:solidFill>
+                  <a:srgbClr val="555555"/>
                 </a:solidFill>
                 <a:latin typeface="Times New Roman" pitchFamily="34" charset="0"/>
                 <a:ea typeface="Times New Roman" pitchFamily="34" charset="-122"/>
                 <a:cs typeface="Times New Roman" pitchFamily="34" charset="-120"/>
               </a:rPr>
-              <a:t>Expected Answer</a:t>
-            </a:r>
-            <a:endParaRPr lang="en-US" sz="3600" dirty="0"/>
-          </a:p>
-        </p:txBody>
-      </p:sp>
-      <p:sp>
-        <p:nvSpPr>
-          <p:cNvPr id="5" name="Text 2"/>
-          <p:cNvSpPr/>
-          <p:nvPr/>
-        </p:nvSpPr>
-        <p:spPr>
-          <a:xfrm>
-            <a:off x="5349240" y="1783080"/>
-            <a:ext cx="6522415" cy="4663440"/>
-          </a:xfrm>
-          <a:prstGeom prst="rect">
-            <a:avLst/>
-          </a:prstGeom>
-          <a:noFill/>
-          <a:ln/>
-        </p:spPr>
-        <p:txBody>
-          <a:bodyPr wrap="square" lIns="0" tIns="0" rIns="0" bIns="0" rtlCol="0" anchor="t"/>
-          <a:lstStyle/>
-          <a:p>
-            <a:pPr algn="l" indent="0" marL="0">
-              <a:spcAft>
-                <a:spcPts val="800"/>
-              </a:spcAft>
-              <a:buNone/>
-            </a:pPr>
-            <a:r>
-              <a:rPr lang="en-US" sz="4000" dirty="0">
-                <a:solidFill>
-                  <a:srgbClr val="111111"/>
-                </a:solidFill>
-                <a:latin typeface="Times New Roman" pitchFamily="34" charset="0"/>
-                <a:ea typeface="Times New Roman" pitchFamily="34" charset="-122"/>
-                <a:cs typeface="Times New Roman" pitchFamily="34" charset="-120"/>
-              </a:rPr>
-              <a:t>A balloon carries instruments into the upper air; they measure temperature, humidity and pressure and send the data by radio.</a:t>
-            </a:r>
-            <a:endParaRPr lang="en-US" sz="4000" dirty="0"/>
+              <a:t>Illustration: the symbols of fronts</a:t>
+            </a:r>
+            <a:endParaRPr lang="en-US" sz="1600" dirty="0"/>
           </a:p>
         </p:txBody>
       </p:sp>
@@ -20095,7 +20468,7 @@
                 <a:ea typeface="Calibri" pitchFamily="34" charset="-122"/>
                 <a:cs typeface="Calibri" pitchFamily="34" charset="-120"/>
               </a:rPr>
-              <a:t>FORMATIVE EVALUATION</a:t>
+              <a:t>BOARD SUMMARY</a:t>
             </a:r>
             <a:endParaRPr lang="en-US" sz="1400" dirty="0"/>
           </a:p>
@@ -20118,7 +20491,7 @@
         <p:spPr>
           <a:xfrm>
             <a:off x="0" y="658368"/>
-            <a:ext cx="5120640" cy="5833872"/>
+            <a:ext cx="2468880" cy="5833872"/>
           </a:xfrm>
           <a:prstGeom prst="rect">
             <a:avLst/>
@@ -20133,8 +20506,8 @@
         </p:nvSpPr>
         <p:spPr>
           <a:xfrm>
-            <a:off x="5349240" y="1005840"/>
-            <a:ext cx="6522415" cy="731520"/>
+            <a:off x="2697480" y="1005840"/>
+            <a:ext cx="9174175" cy="731520"/>
           </a:xfrm>
           <a:prstGeom prst="rect">
             <a:avLst/>
@@ -20160,7 +20533,7 @@
                 <a:ea typeface="Times New Roman" pitchFamily="34" charset="-122"/>
                 <a:cs typeface="Times New Roman" pitchFamily="34" charset="-120"/>
               </a:rPr>
-              <a:t>Evaluation 2</a:t>
+              <a:t>4. Weather Mapping: the Synoptic Chart</a:t>
             </a:r>
             <a:endParaRPr lang="en-US" sz="3600" dirty="0"/>
           </a:p>
@@ -20174,8 +20547,8 @@
         </p:nvSpPr>
         <p:spPr>
           <a:xfrm>
-            <a:off x="5349240" y="1783080"/>
-            <a:ext cx="6522415" cy="4663440"/>
+            <a:off x="2697480" y="1783080"/>
+            <a:ext cx="9174175" cy="4663440"/>
           </a:xfrm>
           <a:prstGeom prst="rect">
             <a:avLst/>
@@ -20194,7 +20567,7 @@
               <a:buNone/>
             </a:pPr>
             <a:r>
-              <a:rPr lang="en-US" sz="4000" dirty="0">
+              <a:rPr lang="en-US" sz="4000" b="1" dirty="0">
                 <a:solidFill>
                   <a:srgbClr val="111111"/>
                 </a:solidFill>
@@ -20202,7 +20575,24 @@
                 <a:ea typeface="Times New Roman" pitchFamily="34" charset="-122"/>
                 <a:cs typeface="Times New Roman" pitchFamily="34" charset="-120"/>
               </a:rPr>
-              <a:t>What is a synoptic chart and how is it used?</a:t>
+              <a:t>Station models and uses: </a:t>
+            </a:r>
+            <a:pPr algn="l" indent="0" marL="0">
+              <a:spcAft>
+                <a:spcPts val="800"/>
+              </a:spcAft>
+              <a:buNone/>
+            </a:pPr>
+            <a:r>
+              <a:rPr lang="en-US" sz="4000" dirty="0">
+                <a:solidFill>
+                  <a:srgbClr val="111111"/>
+                </a:solidFill>
+                <a:latin typeface="Times New Roman" pitchFamily="34" charset="0"/>
+                <a:ea typeface="Times New Roman" pitchFamily="34" charset="-122"/>
+                <a:cs typeface="Times New Roman" pitchFamily="34" charset="-120"/>
+              </a:rPr>
+              <a:t>Small symbols at each station show its temperature, wind, cloud cover and weather. By comparing charts drawn every few hours, forecasters follow the movement of weather systems for aviation, shipping and agriculture.</a:t>
             </a:r>
             <a:endParaRPr lang="en-US" sz="4000" dirty="0"/>
           </a:p>
@@ -20379,7 +20769,7 @@
                 <a:ea typeface="Times New Roman" pitchFamily="34" charset="-122"/>
                 <a:cs typeface="Times New Roman" pitchFamily="34" charset="-120"/>
               </a:rPr>
-              <a:t>Expected Answer</a:t>
+              <a:t>Evaluation 1</a:t>
             </a:r>
             <a:endParaRPr lang="en-US" sz="3600" dirty="0"/>
           </a:p>
@@ -20421,7 +20811,7 @@
                 <a:ea typeface="Times New Roman" pitchFamily="34" charset="-122"/>
                 <a:cs typeface="Times New Roman" pitchFamily="34" charset="-120"/>
               </a:rPr>
-              <a:t>A weather map summarising conditions over a large area at one time; it is used to analyse and forecast the weather.</a:t>
+              <a:t>Explain how a radiosonde works.</a:t>
             </a:r>
             <a:endParaRPr lang="en-US" sz="4000" dirty="0"/>
           </a:p>
@@ -20533,7 +20923,7 @@
                 <a:ea typeface="Calibri" pitchFamily="34" charset="-122"/>
                 <a:cs typeface="Calibri" pitchFamily="34" charset="-120"/>
               </a:rPr>
-              <a:t>REMEDIATION</a:t>
+              <a:t>FORMATIVE EVALUATION</a:t>
             </a:r>
             <a:endParaRPr lang="en-US" sz="1400" dirty="0"/>
           </a:p>
@@ -20556,7 +20946,7 @@
         <p:spPr>
           <a:xfrm>
             <a:off x="0" y="658368"/>
-            <a:ext cx="2468880" cy="5833872"/>
+            <a:ext cx="5120640" cy="5833872"/>
           </a:xfrm>
           <a:prstGeom prst="rect">
             <a:avLst/>
@@ -20571,8 +20961,8 @@
         </p:nvSpPr>
         <p:spPr>
           <a:xfrm>
-            <a:off x="2697480" y="1005840"/>
-            <a:ext cx="9174175" cy="731520"/>
+            <a:off x="5349240" y="1005840"/>
+            <a:ext cx="6522415" cy="731520"/>
           </a:xfrm>
           <a:prstGeom prst="rect">
             <a:avLst/>
@@ -20598,7 +20988,7 @@
                 <a:ea typeface="Times New Roman" pitchFamily="34" charset="-122"/>
                 <a:cs typeface="Times New Roman" pitchFamily="34" charset="-120"/>
               </a:rPr>
-              <a:t>Remediation</a:t>
+              <a:t>Expected Answer</a:t>
             </a:r>
             <a:endParaRPr lang="en-US" sz="3600" dirty="0"/>
           </a:p>
@@ -20612,8 +21002,8 @@
         </p:nvSpPr>
         <p:spPr>
           <a:xfrm>
-            <a:off x="2697480" y="1783080"/>
-            <a:ext cx="9174175" cy="4663440"/>
+            <a:off x="5349240" y="1783080"/>
+            <a:ext cx="6522415" cy="4663440"/>
           </a:xfrm>
           <a:prstGeom prst="rect">
             <a:avLst/>
@@ -20632,7 +21022,7 @@
               <a:buNone/>
             </a:pPr>
             <a:r>
-              <a:rPr lang="en-US" sz="4000" b="1" dirty="0">
+              <a:rPr lang="en-US" sz="4000" dirty="0">
                 <a:solidFill>
                   <a:srgbClr val="111111"/>
                 </a:solidFill>
@@ -20640,73 +21030,7 @@
                 <a:ea typeface="Times New Roman" pitchFamily="34" charset="-122"/>
                 <a:cs typeface="Times New Roman" pitchFamily="34" charset="-120"/>
               </a:rPr>
-              <a:t>Fill in the blanks:</a:t>
-            </a:r>
-            <a:endParaRPr lang="en-US" sz="4000" dirty="0"/>
-          </a:p>
-          <a:p>
-            <a:pPr algn="l" marL="342900" indent="-342900">
-              <a:spcAft>
-                <a:spcPts val="800"/>
-              </a:spcAft>
-              <a:buSzPct val="100000"/>
-              <a:buFont typeface="+mj-lt"/>
-              <a:buAutoNum type="arabicPeriod" startAt="1"/>
-            </a:pPr>
-            <a:r>
-              <a:rPr lang="en-US" sz="4000" dirty="0">
-                <a:solidFill>
-                  <a:srgbClr val="111111"/>
-                </a:solidFill>
-                <a:latin typeface="Times New Roman" pitchFamily="34" charset="0"/>
-                <a:ea typeface="Times New Roman" pitchFamily="34" charset="-122"/>
-                <a:cs typeface="Times New Roman" pitchFamily="34" charset="-120"/>
-              </a:rPr>
-              <a:t>Rainfall is measured with a rain ______.</a:t>
-            </a:r>
-            <a:endParaRPr lang="en-US" sz="4000" dirty="0"/>
-          </a:p>
-          <a:p>
-            <a:pPr algn="l" marL="342900" indent="-342900">
-              <a:spcAft>
-                <a:spcPts val="800"/>
-              </a:spcAft>
-              <a:buSzPct val="100000"/>
-              <a:buFont typeface="+mj-lt"/>
-              <a:buAutoNum type="arabicPeriod" startAt="1"/>
-            </a:pPr>
-            <a:r>
-              <a:rPr lang="en-US" sz="4000" dirty="0">
-                <a:solidFill>
-                  <a:srgbClr val="111111"/>
-                </a:solidFill>
-                <a:latin typeface="Times New Roman" pitchFamily="34" charset="0"/>
-                <a:ea typeface="Times New Roman" pitchFamily="34" charset="-122"/>
-                <a:cs typeface="Times New Roman" pitchFamily="34" charset="-120"/>
-              </a:rPr>
-              <a:t>Lines of equal pressure are ______.</a:t>
-            </a:r>
-            <a:endParaRPr lang="en-US" sz="4000" dirty="0"/>
-          </a:p>
-          <a:p>
-            <a:pPr algn="l" marL="342900" indent="-342900">
-              <a:spcAft>
-                <a:spcPts val="800"/>
-              </a:spcAft>
-              <a:buSzPct val="100000"/>
-              <a:buFont typeface="+mj-lt"/>
-              <a:buAutoNum type="arabicPeriod" startAt="1"/>
-            </a:pPr>
-            <a:r>
-              <a:rPr lang="en-US" sz="4000" dirty="0">
-                <a:solidFill>
-                  <a:srgbClr val="111111"/>
-                </a:solidFill>
-                <a:latin typeface="Times New Roman" pitchFamily="34" charset="0"/>
-                <a:ea typeface="Times New Roman" pitchFamily="34" charset="-122"/>
-                <a:cs typeface="Times New Roman" pitchFamily="34" charset="-120"/>
-              </a:rPr>
-              <a:t>Silver iodide is used for cloud ______.</a:t>
+              <a:t>A balloon carries instruments into the upper air; they measure temperature, humidity and pressure and send the data by radio.</a:t>
             </a:r>
             <a:endParaRPr lang="en-US" sz="4000" dirty="0"/>
           </a:p>
@@ -20818,7 +21142,7 @@
                 <a:ea typeface="Calibri" pitchFamily="34" charset="-122"/>
                 <a:cs typeface="Calibri" pitchFamily="34" charset="-120"/>
               </a:rPr>
-              <a:t>HOMEWORK</a:t>
+              <a:t>FORMATIVE EVALUATION</a:t>
             </a:r>
             <a:endParaRPr lang="en-US" sz="1400" dirty="0"/>
           </a:p>
@@ -20883,7 +21207,7 @@
                 <a:ea typeface="Times New Roman" pitchFamily="34" charset="-122"/>
                 <a:cs typeface="Times New Roman" pitchFamily="34" charset="-120"/>
               </a:rPr>
-              <a:t>Homework</a:t>
+              <a:t>Evaluation 2</a:t>
             </a:r>
             <a:endParaRPr lang="en-US" sz="3600" dirty="0"/>
           </a:p>
@@ -20925,7 +21249,7 @@
                 <a:ea typeface="Times New Roman" pitchFamily="34" charset="-122"/>
                 <a:cs typeface="Times New Roman" pitchFamily="34" charset="-120"/>
               </a:rPr>
-              <a:t>Name the two air masses that affect the climate of Cameroon.</a:t>
+              <a:t>What is a synoptic chart and how is it used?</a:t>
             </a:r>
             <a:endParaRPr lang="en-US" sz="4000" dirty="0"/>
           </a:p>
@@ -21037,7 +21361,7 @@
                 <a:ea typeface="Calibri" pitchFamily="34" charset="-122"/>
                 <a:cs typeface="Calibri" pitchFamily="34" charset="-120"/>
               </a:rPr>
-              <a:t>NEXT LESSON</a:t>
+              <a:t>FORMATIVE EVALUATION</a:t>
             </a:r>
             <a:endParaRPr lang="en-US" sz="1400" dirty="0"/>
           </a:p>
@@ -21102,7 +21426,7 @@
                 <a:ea typeface="Times New Roman" pitchFamily="34" charset="-122"/>
                 <a:cs typeface="Times New Roman" pitchFamily="34" charset="-120"/>
               </a:rPr>
-              <a:t>Next Lesson</a:t>
+              <a:t>Expected Answer</a:t>
             </a:r>
             <a:endParaRPr lang="en-US" sz="3600" dirty="0"/>
           </a:p>
@@ -21126,17 +21450,17 @@
           <a:ln/>
         </p:spPr>
         <p:txBody>
-          <a:bodyPr wrap="square" lIns="0" tIns="0" rIns="0" bIns="0" rtlCol="0" anchor="ctr"/>
-          <a:lstStyle/>
-          <a:p>
-            <a:pPr algn="ctr" indent="0" marL="0">
+          <a:bodyPr wrap="square" lIns="0" tIns="0" rIns="0" bIns="0" rtlCol="0" anchor="t"/>
+          <a:lstStyle/>
+          <a:p>
+            <a:pPr algn="l" indent="0" marL="0">
               <a:spcAft>
                 <a:spcPts val="800"/>
               </a:spcAft>
               <a:buNone/>
             </a:pPr>
             <a:r>
-              <a:rPr lang="en-US" sz="4000" b="1" dirty="0">
+              <a:rPr lang="en-US" sz="4000" dirty="0">
                 <a:solidFill>
                   <a:srgbClr val="111111"/>
                 </a:solidFill>
@@ -21144,27 +21468,7 @@
                 <a:ea typeface="Times New Roman" pitchFamily="34" charset="-122"/>
                 <a:cs typeface="Times New Roman" pitchFamily="34" charset="-120"/>
               </a:rPr>
-              <a:t>Our next lesson will be on:</a:t>
-            </a:r>
-            <a:endParaRPr lang="en-US" sz="4000" dirty="0"/>
-          </a:p>
-          <a:p>
-            <a:pPr algn="ctr" indent="0" marL="0">
-              <a:spcAft>
-                <a:spcPts val="800"/>
-              </a:spcAft>
-              <a:buNone/>
-            </a:pPr>
-            <a:r>
-              <a:rPr lang="en-US" sz="4000" b="1" dirty="0">
-                <a:solidFill>
-                  <a:srgbClr val="990011"/>
-                </a:solidFill>
-                <a:latin typeface="Times New Roman" pitchFamily="34" charset="0"/>
-                <a:ea typeface="Times New Roman" pitchFamily="34" charset="-122"/>
-                <a:cs typeface="Times New Roman" pitchFamily="34" charset="-120"/>
-              </a:rPr>
-              <a:t>Further Study 3: The Climate of Cameroon</a:t>
+              <a:t>A weather map summarising conditions over a large area at one time; it is used to analyse and forecast the weather.</a:t>
             </a:r>
             <a:endParaRPr lang="en-US" sz="4000" dirty="0"/>
           </a:p>
@@ -21276,22 +21580,46 @@
                 <a:ea typeface="Calibri" pitchFamily="34" charset="-122"/>
                 <a:cs typeface="Calibri" pitchFamily="34" charset="-120"/>
               </a:rPr>
-              <a:t>BILINGUAL GAME</a:t>
+              <a:t>REMEDIATION</a:t>
             </a:r>
             <a:endParaRPr lang="en-US" sz="1400" dirty="0"/>
           </a:p>
         </p:txBody>
       </p:sp>
-      <p:sp>
-        <p:nvSpPr>
-          <p:cNvPr id="3" name="Text 1"/>
+      <p:pic>
+        <p:nvPicPr>
+          <p:cNvPr id="3" name="Image 0" descr="/home/claude/f4/img/minesec_sheet.png">    </p:cNvPr>
+          <p:cNvPicPr>
+            <a:picLocks noChangeAspect="1"/>
+          </p:cNvPicPr>
+          <p:nvPr/>
+        </p:nvPicPr>
+        <p:blipFill>
+          <a:blip r:embed="rId1"/>
+          <a:stretch>
+            <a:fillRect/>
+          </a:stretch>
+        </p:blipFill>
+        <p:spPr>
+          <a:xfrm>
+            <a:off x="0" y="658368"/>
+            <a:ext cx="2468880" cy="5833872"/>
+          </a:xfrm>
+          <a:prstGeom prst="rect">
+            <a:avLst/>
+          </a:prstGeom>
+        </p:spPr>
+      </p:pic>
+      <p:sp>
+        <p:nvSpPr>
+          <p:cNvPr id="4" name="Text 1"/>
           <p:cNvSpPr/>
           <p:nvPr/>
         </p:nvSpPr>
         <p:spPr>
           <a:xfrm>
-            <a:off x="457200" y="1005840"/>
-            <a:ext cx="11277295" cy="731520"/>
+            <a:off x="2697480" y="1005840"/>
+            <a:ext cx="9174175" cy="731520"/>
           </a:xfrm>
           <a:prstGeom prst="rect">
             <a:avLst/>
@@ -21300,7 +21628,9 @@
           <a:ln/>
         </p:spPr>
         <p:txBody>
-          <a:bodyPr wrap="square" lIns="0" tIns="0" rIns="0" bIns="0" rtlCol="0" anchor="ctr"/>
+          <a:bodyPr wrap="square" lIns="0" tIns="0" rIns="0" bIns="0" rtlCol="0" anchor="ctr">
+            <a:normAutofit/>
+          </a:bodyPr>
           <a:lstStyle/>
           <a:p>
             <a:pPr algn="ctr" indent="0" marL="0">
@@ -21315,6 +21645,1054 @@
                 <a:ea typeface="Times New Roman" pitchFamily="34" charset="-122"/>
                 <a:cs typeface="Times New Roman" pitchFamily="34" charset="-120"/>
               </a:rPr>
+              <a:t>Remediation</a:t>
+            </a:r>
+            <a:endParaRPr lang="en-US" sz="3600" dirty="0"/>
+          </a:p>
+        </p:txBody>
+      </p:sp>
+      <p:sp>
+        <p:nvSpPr>
+          <p:cNvPr id="5" name="Text 2"/>
+          <p:cNvSpPr/>
+          <p:nvPr/>
+        </p:nvSpPr>
+        <p:spPr>
+          <a:xfrm>
+            <a:off x="2697480" y="1783080"/>
+            <a:ext cx="9174175" cy="4663440"/>
+          </a:xfrm>
+          <a:prstGeom prst="rect">
+            <a:avLst/>
+          </a:prstGeom>
+          <a:noFill/>
+          <a:ln/>
+        </p:spPr>
+        <p:txBody>
+          <a:bodyPr wrap="square" lIns="0" tIns="0" rIns="0" bIns="0" rtlCol="0" anchor="t"/>
+          <a:lstStyle/>
+          <a:p>
+            <a:pPr algn="l" indent="0" marL="0">
+              <a:spcAft>
+                <a:spcPts val="800"/>
+              </a:spcAft>
+              <a:buNone/>
+            </a:pPr>
+            <a:r>
+              <a:rPr lang="en-US" sz="4000" b="1" dirty="0">
+                <a:solidFill>
+                  <a:srgbClr val="111111"/>
+                </a:solidFill>
+                <a:latin typeface="Times New Roman" pitchFamily="34" charset="0"/>
+                <a:ea typeface="Times New Roman" pitchFamily="34" charset="-122"/>
+                <a:cs typeface="Times New Roman" pitchFamily="34" charset="-120"/>
+              </a:rPr>
+              <a:t>Fill in the blanks:</a:t>
+            </a:r>
+            <a:endParaRPr lang="en-US" sz="4000" dirty="0"/>
+          </a:p>
+          <a:p>
+            <a:pPr algn="l" marL="342900" indent="-342900">
+              <a:spcAft>
+                <a:spcPts val="800"/>
+              </a:spcAft>
+              <a:buSzPct val="100000"/>
+              <a:buFont typeface="+mj-lt"/>
+              <a:buAutoNum type="arabicPeriod" startAt="1"/>
+            </a:pPr>
+            <a:r>
+              <a:rPr lang="en-US" sz="4000" dirty="0">
+                <a:solidFill>
+                  <a:srgbClr val="111111"/>
+                </a:solidFill>
+                <a:latin typeface="Times New Roman" pitchFamily="34" charset="0"/>
+                <a:ea typeface="Times New Roman" pitchFamily="34" charset="-122"/>
+                <a:cs typeface="Times New Roman" pitchFamily="34" charset="-120"/>
+              </a:rPr>
+              <a:t>Rainfall is measured with a rain ______.</a:t>
+            </a:r>
+            <a:endParaRPr lang="en-US" sz="4000" dirty="0"/>
+          </a:p>
+          <a:p>
+            <a:pPr algn="l" marL="342900" indent="-342900">
+              <a:spcAft>
+                <a:spcPts val="800"/>
+              </a:spcAft>
+              <a:buSzPct val="100000"/>
+              <a:buFont typeface="+mj-lt"/>
+              <a:buAutoNum type="arabicPeriod" startAt="1"/>
+            </a:pPr>
+            <a:r>
+              <a:rPr lang="en-US" sz="4000" dirty="0">
+                <a:solidFill>
+                  <a:srgbClr val="111111"/>
+                </a:solidFill>
+                <a:latin typeface="Times New Roman" pitchFamily="34" charset="0"/>
+                <a:ea typeface="Times New Roman" pitchFamily="34" charset="-122"/>
+                <a:cs typeface="Times New Roman" pitchFamily="34" charset="-120"/>
+              </a:rPr>
+              <a:t>Lines of equal pressure are ______.</a:t>
+            </a:r>
+            <a:endParaRPr lang="en-US" sz="4000" dirty="0"/>
+          </a:p>
+          <a:p>
+            <a:pPr algn="l" marL="342900" indent="-342900">
+              <a:spcAft>
+                <a:spcPts val="800"/>
+              </a:spcAft>
+              <a:buSzPct val="100000"/>
+              <a:buFont typeface="+mj-lt"/>
+              <a:buAutoNum type="arabicPeriod" startAt="1"/>
+            </a:pPr>
+            <a:r>
+              <a:rPr lang="en-US" sz="4000" dirty="0">
+                <a:solidFill>
+                  <a:srgbClr val="111111"/>
+                </a:solidFill>
+                <a:latin typeface="Times New Roman" pitchFamily="34" charset="0"/>
+                <a:ea typeface="Times New Roman" pitchFamily="34" charset="-122"/>
+                <a:cs typeface="Times New Roman" pitchFamily="34" charset="-120"/>
+              </a:rPr>
+              <a:t>Silver iodide is used for cloud ______.</a:t>
+            </a:r>
+            <a:endParaRPr lang="en-US" sz="4000" dirty="0"/>
+          </a:p>
+        </p:txBody>
+      </p:sp>
+      <p:sp>
+        <p:nvSpPr>
+          <p:cNvPr id="25" name="Slide Number Placeholder 0"/>
+          <p:cNvSpPr>
+            <a:spLocks noGrp="1"/>
+          </p:cNvSpPr>
+          <p:nvPr>
+            <p:ph type="sldNum" sz="quarter" idx="4294967295"/>
+          </p:nvPr>
+        </p:nvSpPr>
+        <p:spPr>
+          <a:xfrm>
+            <a:off x="27432" y="91440"/>
+            <a:ext cx="585216" cy="475488"/>
+          </a:xfrm>
+          <a:prstGeom prst="rect">
+            <a:avLst/>
+          </a:prstGeom>
+          <a:extLst>
+            <a:ext uri="{C572A759-6A51-4108-AA02-DFA0A04FC94B}">
+              <ma14:wrappingTextBoxFlag xmlns:ma14="http://schemas.microsoft.com/office/mac/drawingml/2011/main" val="0"/>
+            </a:ext>
+          </a:extLst>
+        </p:spPr>
+        <p:txBody>
+          <a:bodyPr/>
+          <a:lstStyle>
+            <a:lvl1pPr>
+              <a:defRPr sz="2000">
+                <a:solidFill>
+                  <a:srgbClr val="FFFFFF"/>
+                </a:solidFill>
+                <a:latin typeface="Calibri"/>
+                <a:ea typeface="Calibri"/>
+                <a:cs typeface="Calibri"/>
+              </a:defRPr>
+            </a:lvl1pPr>
+          </a:lstStyle>
+          <a:p>
+            <a:pPr algn="ctr"/>
+            <a:fld id="{F7021451-1387-4CA6-816F-3879F97B5CBC}" type="slidenum">
+              <a:rPr b="1" lang="en-US"/>
+              <a:t>59</a:t>
+            </a:fld>
+            <a:endParaRPr lang="en-US"/>
+          </a:p>
+        </p:txBody>
+      </p:sp>
+    </p:spTree>
+  </p:cSld>
+  <p:clrMapOvr>
+    <a:masterClrMapping/>
+  </p:clrMapOvr>
+</p:sld>
+</file>
+
+<file path=ppt/slides/slide6.xml><?xml version="1.0" encoding="utf-8"?>
+<p:sld xmlns:a="http://schemas.openxmlformats.org/drawingml/2006/main" xmlns:r="http://schemas.openxmlformats.org/officeDocument/2006/relationships" xmlns:p="http://schemas.openxmlformats.org/presentationml/2006/main">
+  <p:cSld name="Slide 6">
+    <p:spTree>
+      <p:nvGrpSpPr>
+        <p:cNvPr id="1" name=""/>
+        <p:cNvGrpSpPr/>
+        <p:nvPr/>
+      </p:nvGrpSpPr>
+      <p:grpSpPr>
+        <a:xfrm>
+          <a:off x="0" y="0"/>
+          <a:ext cx="0" cy="0"/>
+          <a:chOff x="0" y="0"/>
+          <a:chExt cx="0" cy="0"/>
+        </a:xfrm>
+      </p:grpSpPr>
+      <p:sp>
+        <p:nvSpPr>
+          <p:cNvPr id="2" name="Text 0"/>
+          <p:cNvSpPr/>
+          <p:nvPr/>
+        </p:nvSpPr>
+        <p:spPr>
+          <a:xfrm>
+            <a:off x="457200" y="713232"/>
+            <a:ext cx="11368735" cy="274320"/>
+          </a:xfrm>
+          <a:prstGeom prst="rect">
+            <a:avLst/>
+          </a:prstGeom>
+          <a:noFill/>
+          <a:ln/>
+        </p:spPr>
+        <p:txBody>
+          <a:bodyPr wrap="square" lIns="0" tIns="0" rIns="0" bIns="0" rtlCol="0" anchor="ctr"/>
+          <a:lstStyle/>
+          <a:p>
+            <a:pPr algn="r" indent="0" marL="0">
+              <a:buNone/>
+            </a:pPr>
+            <a:r>
+              <a:rPr lang="en-US" sz="1400" b="1" dirty="0">
+                <a:solidFill>
+                  <a:srgbClr val="1C3F6E"/>
+                </a:solidFill>
+                <a:latin typeface="Calibri" pitchFamily="34" charset="0"/>
+                <a:ea typeface="Calibri" pitchFamily="34" charset="-122"/>
+                <a:cs typeface="Calibri" pitchFamily="34" charset="-120"/>
+              </a:rPr>
+              <a:t>LESSON PLAN</a:t>
+            </a:r>
+            <a:endParaRPr lang="en-US" sz="1400" dirty="0"/>
+          </a:p>
+        </p:txBody>
+      </p:sp>
+      <p:pic>
+        <p:nvPicPr>
+          <p:cNvPr id="3" name="Image 0" descr="/home/claude/f4/img/minesec_sheet.png">    </p:cNvPr>
+          <p:cNvPicPr>
+            <a:picLocks noChangeAspect="1"/>
+          </p:cNvPicPr>
+          <p:nvPr/>
+        </p:nvPicPr>
+        <p:blipFill>
+          <a:blip r:embed="rId1"/>
+          <a:stretch>
+            <a:fillRect/>
+          </a:stretch>
+        </p:blipFill>
+        <p:spPr>
+          <a:xfrm>
+            <a:off x="0" y="658368"/>
+            <a:ext cx="2468880" cy="5833872"/>
+          </a:xfrm>
+          <a:prstGeom prst="rect">
+            <a:avLst/>
+          </a:prstGeom>
+        </p:spPr>
+      </p:pic>
+      <p:sp>
+        <p:nvSpPr>
+          <p:cNvPr id="4" name="Text 1"/>
+          <p:cNvSpPr/>
+          <p:nvPr/>
+        </p:nvSpPr>
+        <p:spPr>
+          <a:xfrm>
+            <a:off x="2697480" y="1005840"/>
+            <a:ext cx="9174175" cy="731520"/>
+          </a:xfrm>
+          <a:prstGeom prst="rect">
+            <a:avLst/>
+          </a:prstGeom>
+          <a:noFill/>
+          <a:ln/>
+        </p:spPr>
+        <p:txBody>
+          <a:bodyPr wrap="square" lIns="0" tIns="0" rIns="0" bIns="0" rtlCol="0" anchor="ctr">
+            <a:normAutofit/>
+          </a:bodyPr>
+          <a:lstStyle/>
+          <a:p>
+            <a:pPr algn="ctr" indent="0" marL="0">
+              <a:buNone/>
+            </a:pPr>
+            <a:r>
+              <a:rPr lang="en-US" sz="3600" b="1" dirty="0">
+                <a:solidFill>
+                  <a:srgbClr val="990011"/>
+                </a:solidFill>
+                <a:latin typeface="Times New Roman" pitchFamily="34" charset="0"/>
+                <a:ea typeface="Times New Roman" pitchFamily="34" charset="-122"/>
+                <a:cs typeface="Times New Roman" pitchFamily="34" charset="-120"/>
+              </a:rPr>
+              <a:t>Lesson Plan</a:t>
+            </a:r>
+            <a:endParaRPr lang="en-US" sz="3600" dirty="0"/>
+          </a:p>
+        </p:txBody>
+      </p:sp>
+      <p:sp>
+        <p:nvSpPr>
+          <p:cNvPr id="5" name="Text 2"/>
+          <p:cNvSpPr/>
+          <p:nvPr/>
+        </p:nvSpPr>
+        <p:spPr>
+          <a:xfrm>
+            <a:off x="2697480" y="1783080"/>
+            <a:ext cx="9174175" cy="4663440"/>
+          </a:xfrm>
+          <a:prstGeom prst="rect">
+            <a:avLst/>
+          </a:prstGeom>
+          <a:noFill/>
+          <a:ln/>
+        </p:spPr>
+        <p:txBody>
+          <a:bodyPr wrap="square" lIns="0" tIns="0" rIns="0" bIns="0" rtlCol="0" anchor="t"/>
+          <a:lstStyle/>
+          <a:p>
+            <a:pPr algn="l" marL="342900" indent="-342900">
+              <a:spcAft>
+                <a:spcPts val="800"/>
+              </a:spcAft>
+              <a:buSzPct val="100000"/>
+              <a:buFont typeface="+mj-lt"/>
+              <a:buAutoNum type="arabicPeriod" startAt="1"/>
+            </a:pPr>
+            <a:r>
+              <a:rPr lang="en-US" sz="4000" dirty="0">
+                <a:solidFill>
+                  <a:srgbClr val="111111"/>
+                </a:solidFill>
+                <a:latin typeface="Times New Roman" pitchFamily="34" charset="0"/>
+                <a:ea typeface="Times New Roman" pitchFamily="34" charset="-122"/>
+                <a:cs typeface="Times New Roman" pitchFamily="34" charset="-120"/>
+              </a:rPr>
+              <a:t>Correction of the homework</a:t>
+            </a:r>
+            <a:endParaRPr lang="en-US" sz="4000" dirty="0"/>
+          </a:p>
+          <a:p>
+            <a:pPr algn="l" marL="342900" indent="-342900">
+              <a:spcAft>
+                <a:spcPts val="800"/>
+              </a:spcAft>
+              <a:buSzPct val="100000"/>
+              <a:buFont typeface="+mj-lt"/>
+              <a:buAutoNum type="arabicPeriod" startAt="1"/>
+            </a:pPr>
+            <a:r>
+              <a:rPr lang="en-US" sz="4000" dirty="0">
+                <a:solidFill>
+                  <a:srgbClr val="111111"/>
+                </a:solidFill>
+                <a:latin typeface="Times New Roman" pitchFamily="34" charset="0"/>
+                <a:ea typeface="Times New Roman" pitchFamily="34" charset="-122"/>
+                <a:cs typeface="Times New Roman" pitchFamily="34" charset="-120"/>
+              </a:rPr>
+              <a:t>Objectives and recall</a:t>
+            </a:r>
+            <a:endParaRPr lang="en-US" sz="4000" dirty="0"/>
+          </a:p>
+          <a:p>
+            <a:pPr algn="l" marL="342900" indent="-342900">
+              <a:spcAft>
+                <a:spcPts val="800"/>
+              </a:spcAft>
+              <a:buSzPct val="100000"/>
+              <a:buFont typeface="+mj-lt"/>
+              <a:buAutoNum type="arabicPeriod" startAt="1"/>
+            </a:pPr>
+            <a:r>
+              <a:rPr lang="en-US" sz="4000" dirty="0">
+                <a:solidFill>
+                  <a:srgbClr val="111111"/>
+                </a:solidFill>
+                <a:latin typeface="Times New Roman" pitchFamily="34" charset="0"/>
+                <a:ea typeface="Times New Roman" pitchFamily="34" charset="-122"/>
+                <a:cs typeface="Times New Roman" pitchFamily="34" charset="-120"/>
+              </a:rPr>
+              <a:t>Real-life situation and action to take</a:t>
+            </a:r>
+            <a:endParaRPr lang="en-US" sz="4000" dirty="0"/>
+          </a:p>
+          <a:p>
+            <a:pPr algn="l" marL="342900" indent="-342900">
+              <a:spcAft>
+                <a:spcPts val="800"/>
+              </a:spcAft>
+              <a:buSzPct val="100000"/>
+              <a:buFont typeface="+mj-lt"/>
+              <a:buAutoNum type="arabicPeriod" startAt="1"/>
+            </a:pPr>
+            <a:r>
+              <a:rPr lang="en-US" sz="4000" dirty="0">
+                <a:solidFill>
+                  <a:srgbClr val="111111"/>
+                </a:solidFill>
+                <a:latin typeface="Times New Roman" pitchFamily="34" charset="0"/>
+                <a:ea typeface="Times New Roman" pitchFamily="34" charset="-122"/>
+                <a:cs typeface="Times New Roman" pitchFamily="34" charset="-120"/>
+              </a:rPr>
+              <a:t>Learning activities</a:t>
+            </a:r>
+            <a:endParaRPr lang="en-US" sz="4000" dirty="0"/>
+          </a:p>
+          <a:p>
+            <a:pPr algn="l" marL="342900" indent="-342900">
+              <a:spcAft>
+                <a:spcPts val="800"/>
+              </a:spcAft>
+              <a:buSzPct val="100000"/>
+              <a:buFont typeface="+mj-lt"/>
+              <a:buAutoNum type="arabicPeriod" startAt="1"/>
+            </a:pPr>
+            <a:r>
+              <a:rPr lang="en-US" sz="4000" dirty="0">
+                <a:solidFill>
+                  <a:srgbClr val="111111"/>
+                </a:solidFill>
+                <a:latin typeface="Times New Roman" pitchFamily="34" charset="0"/>
+                <a:ea typeface="Times New Roman" pitchFamily="34" charset="-122"/>
+                <a:cs typeface="Times New Roman" pitchFamily="34" charset="-120"/>
+              </a:rPr>
+              <a:t>Board summary</a:t>
+            </a:r>
+            <a:endParaRPr lang="en-US" sz="4000" dirty="0"/>
+          </a:p>
+          <a:p>
+            <a:pPr algn="l" marL="342900" indent="-342900">
+              <a:spcAft>
+                <a:spcPts val="800"/>
+              </a:spcAft>
+              <a:buSzPct val="100000"/>
+              <a:buFont typeface="+mj-lt"/>
+              <a:buAutoNum type="arabicPeriod" startAt="1"/>
+            </a:pPr>
+            <a:r>
+              <a:rPr lang="en-US" sz="4000" dirty="0">
+                <a:solidFill>
+                  <a:srgbClr val="111111"/>
+                </a:solidFill>
+                <a:latin typeface="Times New Roman" pitchFamily="34" charset="0"/>
+                <a:ea typeface="Times New Roman" pitchFamily="34" charset="-122"/>
+                <a:cs typeface="Times New Roman" pitchFamily="34" charset="-120"/>
+              </a:rPr>
+              <a:t>Evaluation, remediation and homework</a:t>
+            </a:r>
+            <a:endParaRPr lang="en-US" sz="4000" dirty="0"/>
+          </a:p>
+        </p:txBody>
+      </p:sp>
+      <p:sp>
+        <p:nvSpPr>
+          <p:cNvPr id="25" name="Slide Number Placeholder 0"/>
+          <p:cNvSpPr>
+            <a:spLocks noGrp="1"/>
+          </p:cNvSpPr>
+          <p:nvPr>
+            <p:ph type="sldNum" sz="quarter" idx="4294967295"/>
+          </p:nvPr>
+        </p:nvSpPr>
+        <p:spPr>
+          <a:xfrm>
+            <a:off x="27432" y="91440"/>
+            <a:ext cx="585216" cy="475488"/>
+          </a:xfrm>
+          <a:prstGeom prst="rect">
+            <a:avLst/>
+          </a:prstGeom>
+          <a:extLst>
+            <a:ext uri="{C572A759-6A51-4108-AA02-DFA0A04FC94B}">
+              <ma14:wrappingTextBoxFlag xmlns:ma14="http://schemas.microsoft.com/office/mac/drawingml/2011/main" val="0"/>
+            </a:ext>
+          </a:extLst>
+        </p:spPr>
+        <p:txBody>
+          <a:bodyPr/>
+          <a:lstStyle>
+            <a:lvl1pPr>
+              <a:defRPr sz="2000">
+                <a:solidFill>
+                  <a:srgbClr val="FFFFFF"/>
+                </a:solidFill>
+                <a:latin typeface="Calibri"/>
+                <a:ea typeface="Calibri"/>
+                <a:cs typeface="Calibri"/>
+              </a:defRPr>
+            </a:lvl1pPr>
+          </a:lstStyle>
+          <a:p>
+            <a:pPr algn="ctr"/>
+            <a:fld id="{F7021451-1387-4CA6-816F-3879F97B5CBC}" type="slidenum">
+              <a:rPr b="1" lang="en-US"/>
+              <a:t>6</a:t>
+            </a:fld>
+            <a:endParaRPr lang="en-US"/>
+          </a:p>
+        </p:txBody>
+      </p:sp>
+    </p:spTree>
+  </p:cSld>
+  <p:clrMapOvr>
+    <a:masterClrMapping/>
+  </p:clrMapOvr>
+</p:sld>
+</file>
+
+<file path=ppt/slides/slide60.xml><?xml version="1.0" encoding="utf-8"?>
+<p:sld xmlns:a="http://schemas.openxmlformats.org/drawingml/2006/main" xmlns:r="http://schemas.openxmlformats.org/officeDocument/2006/relationships" xmlns:p="http://schemas.openxmlformats.org/presentationml/2006/main">
+  <p:cSld name="Slide 60">
+    <p:spTree>
+      <p:nvGrpSpPr>
+        <p:cNvPr id="1" name=""/>
+        <p:cNvGrpSpPr/>
+        <p:nvPr/>
+      </p:nvGrpSpPr>
+      <p:grpSpPr>
+        <a:xfrm>
+          <a:off x="0" y="0"/>
+          <a:ext cx="0" cy="0"/>
+          <a:chOff x="0" y="0"/>
+          <a:chExt cx="0" cy="0"/>
+        </a:xfrm>
+      </p:grpSpPr>
+      <p:sp>
+        <p:nvSpPr>
+          <p:cNvPr id="2" name="Text 0"/>
+          <p:cNvSpPr/>
+          <p:nvPr/>
+        </p:nvSpPr>
+        <p:spPr>
+          <a:xfrm>
+            <a:off x="457200" y="713232"/>
+            <a:ext cx="11368735" cy="274320"/>
+          </a:xfrm>
+          <a:prstGeom prst="rect">
+            <a:avLst/>
+          </a:prstGeom>
+          <a:noFill/>
+          <a:ln/>
+        </p:spPr>
+        <p:txBody>
+          <a:bodyPr wrap="square" lIns="0" tIns="0" rIns="0" bIns="0" rtlCol="0" anchor="ctr"/>
+          <a:lstStyle/>
+          <a:p>
+            <a:pPr algn="r" indent="0" marL="0">
+              <a:buNone/>
+            </a:pPr>
+            <a:r>
+              <a:rPr lang="en-US" sz="1400" b="1" dirty="0">
+                <a:solidFill>
+                  <a:srgbClr val="1C3F6E"/>
+                </a:solidFill>
+                <a:latin typeface="Calibri" pitchFamily="34" charset="0"/>
+                <a:ea typeface="Calibri" pitchFamily="34" charset="-122"/>
+                <a:cs typeface="Calibri" pitchFamily="34" charset="-120"/>
+              </a:rPr>
+              <a:t>HOMEWORK</a:t>
+            </a:r>
+            <a:endParaRPr lang="en-US" sz="1400" dirty="0"/>
+          </a:p>
+        </p:txBody>
+      </p:sp>
+      <p:pic>
+        <p:nvPicPr>
+          <p:cNvPr id="3" name="Image 0" descr="/home/claude/f4/img/minesec_sheet.png">    </p:cNvPr>
+          <p:cNvPicPr>
+            <a:picLocks noChangeAspect="1"/>
+          </p:cNvPicPr>
+          <p:nvPr/>
+        </p:nvPicPr>
+        <p:blipFill>
+          <a:blip r:embed="rId1"/>
+          <a:stretch>
+            <a:fillRect/>
+          </a:stretch>
+        </p:blipFill>
+        <p:spPr>
+          <a:xfrm>
+            <a:off x="0" y="658368"/>
+            <a:ext cx="5120640" cy="5833872"/>
+          </a:xfrm>
+          <a:prstGeom prst="rect">
+            <a:avLst/>
+          </a:prstGeom>
+        </p:spPr>
+      </p:pic>
+      <p:sp>
+        <p:nvSpPr>
+          <p:cNvPr id="4" name="Text 1"/>
+          <p:cNvSpPr/>
+          <p:nvPr/>
+        </p:nvSpPr>
+        <p:spPr>
+          <a:xfrm>
+            <a:off x="5349240" y="1005840"/>
+            <a:ext cx="6522415" cy="731520"/>
+          </a:xfrm>
+          <a:prstGeom prst="rect">
+            <a:avLst/>
+          </a:prstGeom>
+          <a:noFill/>
+          <a:ln/>
+        </p:spPr>
+        <p:txBody>
+          <a:bodyPr wrap="square" lIns="0" tIns="0" rIns="0" bIns="0" rtlCol="0" anchor="ctr">
+            <a:normAutofit/>
+          </a:bodyPr>
+          <a:lstStyle/>
+          <a:p>
+            <a:pPr algn="ctr" indent="0" marL="0">
+              <a:buNone/>
+            </a:pPr>
+            <a:r>
+              <a:rPr lang="en-US" sz="3600" b="1" dirty="0">
+                <a:solidFill>
+                  <a:srgbClr val="990011"/>
+                </a:solidFill>
+                <a:latin typeface="Times New Roman" pitchFamily="34" charset="0"/>
+                <a:ea typeface="Times New Roman" pitchFamily="34" charset="-122"/>
+                <a:cs typeface="Times New Roman" pitchFamily="34" charset="-120"/>
+              </a:rPr>
+              <a:t>Homework</a:t>
+            </a:r>
+            <a:endParaRPr lang="en-US" sz="3600" dirty="0"/>
+          </a:p>
+        </p:txBody>
+      </p:sp>
+      <p:sp>
+        <p:nvSpPr>
+          <p:cNvPr id="5" name="Text 2"/>
+          <p:cNvSpPr/>
+          <p:nvPr/>
+        </p:nvSpPr>
+        <p:spPr>
+          <a:xfrm>
+            <a:off x="5349240" y="1783080"/>
+            <a:ext cx="6522415" cy="4663440"/>
+          </a:xfrm>
+          <a:prstGeom prst="rect">
+            <a:avLst/>
+          </a:prstGeom>
+          <a:noFill/>
+          <a:ln/>
+        </p:spPr>
+        <p:txBody>
+          <a:bodyPr wrap="square" lIns="0" tIns="0" rIns="0" bIns="0" rtlCol="0" anchor="t"/>
+          <a:lstStyle/>
+          <a:p>
+            <a:pPr algn="l" indent="0" marL="0">
+              <a:spcAft>
+                <a:spcPts val="800"/>
+              </a:spcAft>
+              <a:buNone/>
+            </a:pPr>
+            <a:r>
+              <a:rPr lang="en-US" sz="4000" dirty="0">
+                <a:solidFill>
+                  <a:srgbClr val="111111"/>
+                </a:solidFill>
+                <a:latin typeface="Times New Roman" pitchFamily="34" charset="0"/>
+                <a:ea typeface="Times New Roman" pitchFamily="34" charset="-122"/>
+                <a:cs typeface="Times New Roman" pitchFamily="34" charset="-120"/>
+              </a:rPr>
+              <a:t>Name the two air masses that affect the climate of Cameroon.</a:t>
+            </a:r>
+            <a:endParaRPr lang="en-US" sz="4000" dirty="0"/>
+          </a:p>
+        </p:txBody>
+      </p:sp>
+      <p:sp>
+        <p:nvSpPr>
+          <p:cNvPr id="25" name="Slide Number Placeholder 0"/>
+          <p:cNvSpPr>
+            <a:spLocks noGrp="1"/>
+          </p:cNvSpPr>
+          <p:nvPr>
+            <p:ph type="sldNum" sz="quarter" idx="4294967295"/>
+          </p:nvPr>
+        </p:nvSpPr>
+        <p:spPr>
+          <a:xfrm>
+            <a:off x="27432" y="91440"/>
+            <a:ext cx="585216" cy="475488"/>
+          </a:xfrm>
+          <a:prstGeom prst="rect">
+            <a:avLst/>
+          </a:prstGeom>
+          <a:extLst>
+            <a:ext uri="{C572A759-6A51-4108-AA02-DFA0A04FC94B}">
+              <ma14:wrappingTextBoxFlag xmlns:ma14="http://schemas.microsoft.com/office/mac/drawingml/2011/main" val="0"/>
+            </a:ext>
+          </a:extLst>
+        </p:spPr>
+        <p:txBody>
+          <a:bodyPr/>
+          <a:lstStyle>
+            <a:lvl1pPr>
+              <a:defRPr sz="2000">
+                <a:solidFill>
+                  <a:srgbClr val="FFFFFF"/>
+                </a:solidFill>
+                <a:latin typeface="Calibri"/>
+                <a:ea typeface="Calibri"/>
+                <a:cs typeface="Calibri"/>
+              </a:defRPr>
+            </a:lvl1pPr>
+          </a:lstStyle>
+          <a:p>
+            <a:pPr algn="ctr"/>
+            <a:fld id="{F7021451-1387-4CA6-816F-3879F97B5CBC}" type="slidenum">
+              <a:rPr b="1" lang="en-US"/>
+              <a:t>60</a:t>
+            </a:fld>
+            <a:endParaRPr lang="en-US"/>
+          </a:p>
+        </p:txBody>
+      </p:sp>
+    </p:spTree>
+  </p:cSld>
+  <p:clrMapOvr>
+    <a:masterClrMapping/>
+  </p:clrMapOvr>
+</p:sld>
+</file>
+
+<file path=ppt/slides/slide61.xml><?xml version="1.0" encoding="utf-8"?>
+<p:sld xmlns:a="http://schemas.openxmlformats.org/drawingml/2006/main" xmlns:r="http://schemas.openxmlformats.org/officeDocument/2006/relationships" xmlns:p="http://schemas.openxmlformats.org/presentationml/2006/main">
+  <p:cSld name="Slide 61">
+    <p:spTree>
+      <p:nvGrpSpPr>
+        <p:cNvPr id="1" name=""/>
+        <p:cNvGrpSpPr/>
+        <p:nvPr/>
+      </p:nvGrpSpPr>
+      <p:grpSpPr>
+        <a:xfrm>
+          <a:off x="0" y="0"/>
+          <a:ext cx="0" cy="0"/>
+          <a:chOff x="0" y="0"/>
+          <a:chExt cx="0" cy="0"/>
+        </a:xfrm>
+      </p:grpSpPr>
+      <p:sp>
+        <p:nvSpPr>
+          <p:cNvPr id="2" name="Text 0"/>
+          <p:cNvSpPr/>
+          <p:nvPr/>
+        </p:nvSpPr>
+        <p:spPr>
+          <a:xfrm>
+            <a:off x="457200" y="713232"/>
+            <a:ext cx="11368735" cy="274320"/>
+          </a:xfrm>
+          <a:prstGeom prst="rect">
+            <a:avLst/>
+          </a:prstGeom>
+          <a:noFill/>
+          <a:ln/>
+        </p:spPr>
+        <p:txBody>
+          <a:bodyPr wrap="square" lIns="0" tIns="0" rIns="0" bIns="0" rtlCol="0" anchor="ctr"/>
+          <a:lstStyle/>
+          <a:p>
+            <a:pPr algn="r" indent="0" marL="0">
+              <a:buNone/>
+            </a:pPr>
+            <a:r>
+              <a:rPr lang="en-US" sz="1400" b="1" dirty="0">
+                <a:solidFill>
+                  <a:srgbClr val="1C3F6E"/>
+                </a:solidFill>
+                <a:latin typeface="Calibri" pitchFamily="34" charset="0"/>
+                <a:ea typeface="Calibri" pitchFamily="34" charset="-122"/>
+                <a:cs typeface="Calibri" pitchFamily="34" charset="-120"/>
+              </a:rPr>
+              <a:t>NEXT LESSON</a:t>
+            </a:r>
+            <a:endParaRPr lang="en-US" sz="1400" dirty="0"/>
+          </a:p>
+        </p:txBody>
+      </p:sp>
+      <p:pic>
+        <p:nvPicPr>
+          <p:cNvPr id="3" name="Image 0" descr="/home/claude/f4/img/minesec_sheet.png">    </p:cNvPr>
+          <p:cNvPicPr>
+            <a:picLocks noChangeAspect="1"/>
+          </p:cNvPicPr>
+          <p:nvPr/>
+        </p:nvPicPr>
+        <p:blipFill>
+          <a:blip r:embed="rId1"/>
+          <a:stretch>
+            <a:fillRect/>
+          </a:stretch>
+        </p:blipFill>
+        <p:spPr>
+          <a:xfrm>
+            <a:off x="0" y="658368"/>
+            <a:ext cx="5120640" cy="5833872"/>
+          </a:xfrm>
+          <a:prstGeom prst="rect">
+            <a:avLst/>
+          </a:prstGeom>
+        </p:spPr>
+      </p:pic>
+      <p:sp>
+        <p:nvSpPr>
+          <p:cNvPr id="4" name="Text 1"/>
+          <p:cNvSpPr/>
+          <p:nvPr/>
+        </p:nvSpPr>
+        <p:spPr>
+          <a:xfrm>
+            <a:off x="5349240" y="1005840"/>
+            <a:ext cx="6522415" cy="731520"/>
+          </a:xfrm>
+          <a:prstGeom prst="rect">
+            <a:avLst/>
+          </a:prstGeom>
+          <a:noFill/>
+          <a:ln/>
+        </p:spPr>
+        <p:txBody>
+          <a:bodyPr wrap="square" lIns="0" tIns="0" rIns="0" bIns="0" rtlCol="0" anchor="ctr">
+            <a:normAutofit/>
+          </a:bodyPr>
+          <a:lstStyle/>
+          <a:p>
+            <a:pPr algn="ctr" indent="0" marL="0">
+              <a:buNone/>
+            </a:pPr>
+            <a:r>
+              <a:rPr lang="en-US" sz="3600" b="1" dirty="0">
+                <a:solidFill>
+                  <a:srgbClr val="990011"/>
+                </a:solidFill>
+                <a:latin typeface="Times New Roman" pitchFamily="34" charset="0"/>
+                <a:ea typeface="Times New Roman" pitchFamily="34" charset="-122"/>
+                <a:cs typeface="Times New Roman" pitchFamily="34" charset="-120"/>
+              </a:rPr>
+              <a:t>Next Lesson</a:t>
+            </a:r>
+            <a:endParaRPr lang="en-US" sz="3600" dirty="0"/>
+          </a:p>
+        </p:txBody>
+      </p:sp>
+      <p:sp>
+        <p:nvSpPr>
+          <p:cNvPr id="5" name="Text 2"/>
+          <p:cNvSpPr/>
+          <p:nvPr/>
+        </p:nvSpPr>
+        <p:spPr>
+          <a:xfrm>
+            <a:off x="5349240" y="1783080"/>
+            <a:ext cx="6522415" cy="4663440"/>
+          </a:xfrm>
+          <a:prstGeom prst="rect">
+            <a:avLst/>
+          </a:prstGeom>
+          <a:noFill/>
+          <a:ln/>
+        </p:spPr>
+        <p:txBody>
+          <a:bodyPr wrap="square" lIns="0" tIns="0" rIns="0" bIns="0" rtlCol="0" anchor="ctr"/>
+          <a:lstStyle/>
+          <a:p>
+            <a:pPr algn="ctr" indent="0" marL="0">
+              <a:spcAft>
+                <a:spcPts val="800"/>
+              </a:spcAft>
+              <a:buNone/>
+            </a:pPr>
+            <a:r>
+              <a:rPr lang="en-US" sz="4000" b="1" dirty="0">
+                <a:solidFill>
+                  <a:srgbClr val="111111"/>
+                </a:solidFill>
+                <a:latin typeface="Times New Roman" pitchFamily="34" charset="0"/>
+                <a:ea typeface="Times New Roman" pitchFamily="34" charset="-122"/>
+                <a:cs typeface="Times New Roman" pitchFamily="34" charset="-120"/>
+              </a:rPr>
+              <a:t>Our next lesson will be on:</a:t>
+            </a:r>
+            <a:endParaRPr lang="en-US" sz="4000" dirty="0"/>
+          </a:p>
+          <a:p>
+            <a:pPr algn="ctr" indent="0" marL="0">
+              <a:spcAft>
+                <a:spcPts val="800"/>
+              </a:spcAft>
+              <a:buNone/>
+            </a:pPr>
+            <a:r>
+              <a:rPr lang="en-US" sz="4000" b="1" dirty="0">
+                <a:solidFill>
+                  <a:srgbClr val="990011"/>
+                </a:solidFill>
+                <a:latin typeface="Times New Roman" pitchFamily="34" charset="0"/>
+                <a:ea typeface="Times New Roman" pitchFamily="34" charset="-122"/>
+                <a:cs typeface="Times New Roman" pitchFamily="34" charset="-120"/>
+              </a:rPr>
+              <a:t>Further Study 3: The Climate of Cameroon</a:t>
+            </a:r>
+            <a:endParaRPr lang="en-US" sz="4000" dirty="0"/>
+          </a:p>
+        </p:txBody>
+      </p:sp>
+      <p:sp>
+        <p:nvSpPr>
+          <p:cNvPr id="25" name="Slide Number Placeholder 0"/>
+          <p:cNvSpPr>
+            <a:spLocks noGrp="1"/>
+          </p:cNvSpPr>
+          <p:nvPr>
+            <p:ph type="sldNum" sz="quarter" idx="4294967295"/>
+          </p:nvPr>
+        </p:nvSpPr>
+        <p:spPr>
+          <a:xfrm>
+            <a:off x="27432" y="91440"/>
+            <a:ext cx="585216" cy="475488"/>
+          </a:xfrm>
+          <a:prstGeom prst="rect">
+            <a:avLst/>
+          </a:prstGeom>
+          <a:extLst>
+            <a:ext uri="{C572A759-6A51-4108-AA02-DFA0A04FC94B}">
+              <ma14:wrappingTextBoxFlag xmlns:ma14="http://schemas.microsoft.com/office/mac/drawingml/2011/main" val="0"/>
+            </a:ext>
+          </a:extLst>
+        </p:spPr>
+        <p:txBody>
+          <a:bodyPr/>
+          <a:lstStyle>
+            <a:lvl1pPr>
+              <a:defRPr sz="2000">
+                <a:solidFill>
+                  <a:srgbClr val="FFFFFF"/>
+                </a:solidFill>
+                <a:latin typeface="Calibri"/>
+                <a:ea typeface="Calibri"/>
+                <a:cs typeface="Calibri"/>
+              </a:defRPr>
+            </a:lvl1pPr>
+          </a:lstStyle>
+          <a:p>
+            <a:pPr algn="ctr"/>
+            <a:fld id="{F7021451-1387-4CA6-816F-3879F97B5CBC}" type="slidenum">
+              <a:rPr b="1" lang="en-US"/>
+              <a:t>61</a:t>
+            </a:fld>
+            <a:endParaRPr lang="en-US"/>
+          </a:p>
+        </p:txBody>
+      </p:sp>
+    </p:spTree>
+  </p:cSld>
+  <p:clrMapOvr>
+    <a:masterClrMapping/>
+  </p:clrMapOvr>
+</p:sld>
+</file>
+
+<file path=ppt/slides/slide62.xml><?xml version="1.0" encoding="utf-8"?>
+<p:sld xmlns:a="http://schemas.openxmlformats.org/drawingml/2006/main" xmlns:r="http://schemas.openxmlformats.org/officeDocument/2006/relationships" xmlns:p="http://schemas.openxmlformats.org/presentationml/2006/main">
+  <p:cSld name="Slide 62">
+    <p:spTree>
+      <p:nvGrpSpPr>
+        <p:cNvPr id="1" name=""/>
+        <p:cNvGrpSpPr/>
+        <p:nvPr/>
+      </p:nvGrpSpPr>
+      <p:grpSpPr>
+        <a:xfrm>
+          <a:off x="0" y="0"/>
+          <a:ext cx="0" cy="0"/>
+          <a:chOff x="0" y="0"/>
+          <a:chExt cx="0" cy="0"/>
+        </a:xfrm>
+      </p:grpSpPr>
+      <p:sp>
+        <p:nvSpPr>
+          <p:cNvPr id="2" name="Text 0"/>
+          <p:cNvSpPr/>
+          <p:nvPr/>
+        </p:nvSpPr>
+        <p:spPr>
+          <a:xfrm>
+            <a:off x="457200" y="713232"/>
+            <a:ext cx="11368735" cy="274320"/>
+          </a:xfrm>
+          <a:prstGeom prst="rect">
+            <a:avLst/>
+          </a:prstGeom>
+          <a:noFill/>
+          <a:ln/>
+        </p:spPr>
+        <p:txBody>
+          <a:bodyPr wrap="square" lIns="0" tIns="0" rIns="0" bIns="0" rtlCol="0" anchor="ctr"/>
+          <a:lstStyle/>
+          <a:p>
+            <a:pPr algn="r" indent="0" marL="0">
+              <a:buNone/>
+            </a:pPr>
+            <a:r>
+              <a:rPr lang="en-US" sz="1400" b="1" dirty="0">
+                <a:solidFill>
+                  <a:srgbClr val="1C3F6E"/>
+                </a:solidFill>
+                <a:latin typeface="Calibri" pitchFamily="34" charset="0"/>
+                <a:ea typeface="Calibri" pitchFamily="34" charset="-122"/>
+                <a:cs typeface="Calibri" pitchFamily="34" charset="-120"/>
+              </a:rPr>
+              <a:t>BILINGUAL GAME</a:t>
+            </a:r>
+            <a:endParaRPr lang="en-US" sz="1400" dirty="0"/>
+          </a:p>
+        </p:txBody>
+      </p:sp>
+      <p:sp>
+        <p:nvSpPr>
+          <p:cNvPr id="3" name="Text 1"/>
+          <p:cNvSpPr/>
+          <p:nvPr/>
+        </p:nvSpPr>
+        <p:spPr>
+          <a:xfrm>
+            <a:off x="457200" y="1005840"/>
+            <a:ext cx="11277295" cy="731520"/>
+          </a:xfrm>
+          <a:prstGeom prst="rect">
+            <a:avLst/>
+          </a:prstGeom>
+          <a:noFill/>
+          <a:ln/>
+        </p:spPr>
+        <p:txBody>
+          <a:bodyPr wrap="square" lIns="0" tIns="0" rIns="0" bIns="0" rtlCol="0" anchor="ctr"/>
+          <a:lstStyle/>
+          <a:p>
+            <a:pPr algn="ctr" indent="0" marL="0">
+              <a:buNone/>
+            </a:pPr>
+            <a:r>
+              <a:rPr lang="en-US" sz="3600" b="1" dirty="0">
+                <a:solidFill>
+                  <a:srgbClr val="990011"/>
+                </a:solidFill>
+                <a:latin typeface="Times New Roman" pitchFamily="34" charset="0"/>
+                <a:ea typeface="Times New Roman" pitchFamily="34" charset="-122"/>
+                <a:cs typeface="Times New Roman" pitchFamily="34" charset="-120"/>
+              </a:rPr>
               <a:t>Bilingual Game (Jeu Bilingue)</a:t>
             </a:r>
             <a:endParaRPr lang="en-US" sz="3600" dirty="0"/>
@@ -21323,7 +22701,7 @@
       </p:sp>
       <p:graphicFrame>
         <p:nvGraphicFramePr>
-          <p:cNvPr id="60" name="Table 0"/>
+          <p:cNvPr id="63" name="Table 0"/>
           <p:cNvGraphicFramePr>
             <a:graphicFrameLocks noGrp="1"/>
           </p:cNvGraphicFramePr>
@@ -22359,7 +23737,7 @@
             <a:pPr algn="ctr"/>
             <a:fld id="{F7021451-1387-4CA6-816F-3879F97B5CBC}" type="slidenum">
               <a:rPr b="1" lang="en-US"/>
-              <a:t>59</a:t>
+              <a:t>62</a:t>
             </a:fld>
             <a:endParaRPr lang="en-US"/>
           </a:p>
@@ -22373,9 +23751,9 @@
 </p:sld>
 </file>
 
-<file path=ppt/slides/slide6.xml><?xml version="1.0" encoding="utf-8"?>
+<file path=ppt/slides/slide63.xml><?xml version="1.0" encoding="utf-8"?>
 <p:sld xmlns:a="http://schemas.openxmlformats.org/drawingml/2006/main" xmlns:r="http://schemas.openxmlformats.org/officeDocument/2006/relationships" xmlns:p="http://schemas.openxmlformats.org/presentationml/2006/main">
-  <p:cSld name="Slide 6">
+  <p:cSld name="Slide 63">
     <p:spTree>
       <p:nvGrpSpPr>
         <p:cNvPr id="1" name=""/>
@@ -22423,46 +23801,22 @@
                 <a:ea typeface="Calibri" pitchFamily="34" charset="-122"/>
                 <a:cs typeface="Calibri" pitchFamily="34" charset="-120"/>
               </a:rPr>
-              <a:t>LESSON PLAN</a:t>
+              <a:t>LOGBOOK</a:t>
             </a:r>
             <a:endParaRPr lang="en-US" sz="1400" dirty="0"/>
           </a:p>
         </p:txBody>
       </p:sp>
-      <p:pic>
-        <p:nvPicPr>
-          <p:cNvPr id="3" name="Image 0" descr="/home/claude/f4/img/minesec_sheet.png">    </p:cNvPr>
-          <p:cNvPicPr>
-            <a:picLocks noChangeAspect="1"/>
-          </p:cNvPicPr>
-          <p:nvPr/>
-        </p:nvPicPr>
-        <p:blipFill>
-          <a:blip r:embed="rId1"/>
-          <a:stretch>
-            <a:fillRect/>
-          </a:stretch>
-        </p:blipFill>
-        <p:spPr>
-          <a:xfrm>
-            <a:off x="0" y="658368"/>
-            <a:ext cx="2468880" cy="5833872"/>
-          </a:xfrm>
-          <a:prstGeom prst="rect">
-            <a:avLst/>
-          </a:prstGeom>
-        </p:spPr>
-      </p:pic>
-      <p:sp>
-        <p:nvSpPr>
-          <p:cNvPr id="4" name="Text 1"/>
+      <p:sp>
+        <p:nvSpPr>
+          <p:cNvPr id="3" name="Text 1"/>
           <p:cNvSpPr/>
           <p:nvPr/>
         </p:nvSpPr>
         <p:spPr>
           <a:xfrm>
-            <a:off x="2697480" y="1005840"/>
-            <a:ext cx="9174175" cy="731520"/>
+            <a:off x="457200" y="1005840"/>
+            <a:ext cx="11277295" cy="731520"/>
           </a:xfrm>
           <a:prstGeom prst="rect">
             <a:avLst/>
@@ -22471,9 +23825,7 @@
           <a:ln/>
         </p:spPr>
         <p:txBody>
-          <a:bodyPr wrap="square" lIns="0" tIns="0" rIns="0" bIns="0" rtlCol="0" anchor="ctr">
-            <a:normAutofit/>
-          </a:bodyPr>
+          <a:bodyPr wrap="square" lIns="0" tIns="0" rIns="0" bIns="0" rtlCol="0" anchor="ctr"/>
           <a:lstStyle/>
           <a:p>
             <a:pPr algn="ctr" indent="0" marL="0">
@@ -22488,311 +23840,6 @@
                 <a:ea typeface="Times New Roman" pitchFamily="34" charset="-122"/>
                 <a:cs typeface="Times New Roman" pitchFamily="34" charset="-120"/>
               </a:rPr>
-              <a:t>Lesson Plan</a:t>
-            </a:r>
-            <a:endParaRPr lang="en-US" sz="3600" dirty="0"/>
-          </a:p>
-        </p:txBody>
-      </p:sp>
-      <p:sp>
-        <p:nvSpPr>
-          <p:cNvPr id="5" name="Text 2"/>
-          <p:cNvSpPr/>
-          <p:nvPr/>
-        </p:nvSpPr>
-        <p:spPr>
-          <a:xfrm>
-            <a:off x="2697480" y="1783080"/>
-            <a:ext cx="9174175" cy="4663440"/>
-          </a:xfrm>
-          <a:prstGeom prst="rect">
-            <a:avLst/>
-          </a:prstGeom>
-          <a:noFill/>
-          <a:ln/>
-        </p:spPr>
-        <p:txBody>
-          <a:bodyPr wrap="square" lIns="0" tIns="0" rIns="0" bIns="0" rtlCol="0" anchor="t"/>
-          <a:lstStyle/>
-          <a:p>
-            <a:pPr algn="l" marL="342900" indent="-342900">
-              <a:spcAft>
-                <a:spcPts val="800"/>
-              </a:spcAft>
-              <a:buSzPct val="100000"/>
-              <a:buFont typeface="+mj-lt"/>
-              <a:buAutoNum type="arabicPeriod" startAt="1"/>
-            </a:pPr>
-            <a:r>
-              <a:rPr lang="en-US" sz="4000" dirty="0">
-                <a:solidFill>
-                  <a:srgbClr val="111111"/>
-                </a:solidFill>
-                <a:latin typeface="Times New Roman" pitchFamily="34" charset="0"/>
-                <a:ea typeface="Times New Roman" pitchFamily="34" charset="-122"/>
-                <a:cs typeface="Times New Roman" pitchFamily="34" charset="-120"/>
-              </a:rPr>
-              <a:t>Correction of the homework</a:t>
-            </a:r>
-            <a:endParaRPr lang="en-US" sz="4000" dirty="0"/>
-          </a:p>
-          <a:p>
-            <a:pPr algn="l" marL="342900" indent="-342900">
-              <a:spcAft>
-                <a:spcPts val="800"/>
-              </a:spcAft>
-              <a:buSzPct val="100000"/>
-              <a:buFont typeface="+mj-lt"/>
-              <a:buAutoNum type="arabicPeriod" startAt="1"/>
-            </a:pPr>
-            <a:r>
-              <a:rPr lang="en-US" sz="4000" dirty="0">
-                <a:solidFill>
-                  <a:srgbClr val="111111"/>
-                </a:solidFill>
-                <a:latin typeface="Times New Roman" pitchFamily="34" charset="0"/>
-                <a:ea typeface="Times New Roman" pitchFamily="34" charset="-122"/>
-                <a:cs typeface="Times New Roman" pitchFamily="34" charset="-120"/>
-              </a:rPr>
-              <a:t>Objectives and recall</a:t>
-            </a:r>
-            <a:endParaRPr lang="en-US" sz="4000" dirty="0"/>
-          </a:p>
-          <a:p>
-            <a:pPr algn="l" marL="342900" indent="-342900">
-              <a:spcAft>
-                <a:spcPts val="800"/>
-              </a:spcAft>
-              <a:buSzPct val="100000"/>
-              <a:buFont typeface="+mj-lt"/>
-              <a:buAutoNum type="arabicPeriod" startAt="1"/>
-            </a:pPr>
-            <a:r>
-              <a:rPr lang="en-US" sz="4000" dirty="0">
-                <a:solidFill>
-                  <a:srgbClr val="111111"/>
-                </a:solidFill>
-                <a:latin typeface="Times New Roman" pitchFamily="34" charset="0"/>
-                <a:ea typeface="Times New Roman" pitchFamily="34" charset="-122"/>
-                <a:cs typeface="Times New Roman" pitchFamily="34" charset="-120"/>
-              </a:rPr>
-              <a:t>Real-life situation and action to take</a:t>
-            </a:r>
-            <a:endParaRPr lang="en-US" sz="4000" dirty="0"/>
-          </a:p>
-          <a:p>
-            <a:pPr algn="l" marL="342900" indent="-342900">
-              <a:spcAft>
-                <a:spcPts val="800"/>
-              </a:spcAft>
-              <a:buSzPct val="100000"/>
-              <a:buFont typeface="+mj-lt"/>
-              <a:buAutoNum type="arabicPeriod" startAt="1"/>
-            </a:pPr>
-            <a:r>
-              <a:rPr lang="en-US" sz="4000" dirty="0">
-                <a:solidFill>
-                  <a:srgbClr val="111111"/>
-                </a:solidFill>
-                <a:latin typeface="Times New Roman" pitchFamily="34" charset="0"/>
-                <a:ea typeface="Times New Roman" pitchFamily="34" charset="-122"/>
-                <a:cs typeface="Times New Roman" pitchFamily="34" charset="-120"/>
-              </a:rPr>
-              <a:t>Learning activities</a:t>
-            </a:r>
-            <a:endParaRPr lang="en-US" sz="4000" dirty="0"/>
-          </a:p>
-          <a:p>
-            <a:pPr algn="l" marL="342900" indent="-342900">
-              <a:spcAft>
-                <a:spcPts val="800"/>
-              </a:spcAft>
-              <a:buSzPct val="100000"/>
-              <a:buFont typeface="+mj-lt"/>
-              <a:buAutoNum type="arabicPeriod" startAt="1"/>
-            </a:pPr>
-            <a:r>
-              <a:rPr lang="en-US" sz="4000" dirty="0">
-                <a:solidFill>
-                  <a:srgbClr val="111111"/>
-                </a:solidFill>
-                <a:latin typeface="Times New Roman" pitchFamily="34" charset="0"/>
-                <a:ea typeface="Times New Roman" pitchFamily="34" charset="-122"/>
-                <a:cs typeface="Times New Roman" pitchFamily="34" charset="-120"/>
-              </a:rPr>
-              <a:t>Board summary</a:t>
-            </a:r>
-            <a:endParaRPr lang="en-US" sz="4000" dirty="0"/>
-          </a:p>
-          <a:p>
-            <a:pPr algn="l" marL="342900" indent="-342900">
-              <a:spcAft>
-                <a:spcPts val="800"/>
-              </a:spcAft>
-              <a:buSzPct val="100000"/>
-              <a:buFont typeface="+mj-lt"/>
-              <a:buAutoNum type="arabicPeriod" startAt="1"/>
-            </a:pPr>
-            <a:r>
-              <a:rPr lang="en-US" sz="4000" dirty="0">
-                <a:solidFill>
-                  <a:srgbClr val="111111"/>
-                </a:solidFill>
-                <a:latin typeface="Times New Roman" pitchFamily="34" charset="0"/>
-                <a:ea typeface="Times New Roman" pitchFamily="34" charset="-122"/>
-                <a:cs typeface="Times New Roman" pitchFamily="34" charset="-120"/>
-              </a:rPr>
-              <a:t>Evaluation, remediation and homework</a:t>
-            </a:r>
-            <a:endParaRPr lang="en-US" sz="4000" dirty="0"/>
-          </a:p>
-        </p:txBody>
-      </p:sp>
-      <p:sp>
-        <p:nvSpPr>
-          <p:cNvPr id="25" name="Slide Number Placeholder 0"/>
-          <p:cNvSpPr>
-            <a:spLocks noGrp="1"/>
-          </p:cNvSpPr>
-          <p:nvPr>
-            <p:ph type="sldNum" sz="quarter" idx="4294967295"/>
-          </p:nvPr>
-        </p:nvSpPr>
-        <p:spPr>
-          <a:xfrm>
-            <a:off x="27432" y="91440"/>
-            <a:ext cx="585216" cy="475488"/>
-          </a:xfrm>
-          <a:prstGeom prst="rect">
-            <a:avLst/>
-          </a:prstGeom>
-          <a:extLst>
-            <a:ext uri="{C572A759-6A51-4108-AA02-DFA0A04FC94B}">
-              <ma14:wrappingTextBoxFlag xmlns:ma14="http://schemas.microsoft.com/office/mac/drawingml/2011/main" val="0"/>
-            </a:ext>
-          </a:extLst>
-        </p:spPr>
-        <p:txBody>
-          <a:bodyPr/>
-          <a:lstStyle>
-            <a:lvl1pPr>
-              <a:defRPr sz="2000">
-                <a:solidFill>
-                  <a:srgbClr val="FFFFFF"/>
-                </a:solidFill>
-                <a:latin typeface="Calibri"/>
-                <a:ea typeface="Calibri"/>
-                <a:cs typeface="Calibri"/>
-              </a:defRPr>
-            </a:lvl1pPr>
-          </a:lstStyle>
-          <a:p>
-            <a:pPr algn="ctr"/>
-            <a:fld id="{F7021451-1387-4CA6-816F-3879F97B5CBC}" type="slidenum">
-              <a:rPr b="1" lang="en-US"/>
-              <a:t>6</a:t>
-            </a:fld>
-            <a:endParaRPr lang="en-US"/>
-          </a:p>
-        </p:txBody>
-      </p:sp>
-    </p:spTree>
-  </p:cSld>
-  <p:clrMapOvr>
-    <a:masterClrMapping/>
-  </p:clrMapOvr>
-</p:sld>
-</file>
-
-<file path=ppt/slides/slide60.xml><?xml version="1.0" encoding="utf-8"?>
-<p:sld xmlns:a="http://schemas.openxmlformats.org/drawingml/2006/main" xmlns:r="http://schemas.openxmlformats.org/officeDocument/2006/relationships" xmlns:p="http://schemas.openxmlformats.org/presentationml/2006/main">
-  <p:cSld name="Slide 60">
-    <p:spTree>
-      <p:nvGrpSpPr>
-        <p:cNvPr id="1" name=""/>
-        <p:cNvGrpSpPr/>
-        <p:nvPr/>
-      </p:nvGrpSpPr>
-      <p:grpSpPr>
-        <a:xfrm>
-          <a:off x="0" y="0"/>
-          <a:ext cx="0" cy="0"/>
-          <a:chOff x="0" y="0"/>
-          <a:chExt cx="0" cy="0"/>
-        </a:xfrm>
-      </p:grpSpPr>
-      <p:sp>
-        <p:nvSpPr>
-          <p:cNvPr id="2" name="Text 0"/>
-          <p:cNvSpPr/>
-          <p:nvPr/>
-        </p:nvSpPr>
-        <p:spPr>
-          <a:xfrm>
-            <a:off x="457200" y="713232"/>
-            <a:ext cx="11368735" cy="274320"/>
-          </a:xfrm>
-          <a:prstGeom prst="rect">
-            <a:avLst/>
-          </a:prstGeom>
-          <a:noFill/>
-          <a:ln/>
-        </p:spPr>
-        <p:txBody>
-          <a:bodyPr wrap="square" lIns="0" tIns="0" rIns="0" bIns="0" rtlCol="0" anchor="ctr"/>
-          <a:lstStyle/>
-          <a:p>
-            <a:pPr algn="r" indent="0" marL="0">
-              <a:buNone/>
-            </a:pPr>
-            <a:r>
-              <a:rPr lang="en-US" sz="1400" b="1" dirty="0">
-                <a:solidFill>
-                  <a:srgbClr val="1C3F6E"/>
-                </a:solidFill>
-                <a:latin typeface="Calibri" pitchFamily="34" charset="0"/>
-                <a:ea typeface="Calibri" pitchFamily="34" charset="-122"/>
-                <a:cs typeface="Calibri" pitchFamily="34" charset="-120"/>
-              </a:rPr>
-              <a:t>LOGBOOK</a:t>
-            </a:r>
-            <a:endParaRPr lang="en-US" sz="1400" dirty="0"/>
-          </a:p>
-        </p:txBody>
-      </p:sp>
-      <p:sp>
-        <p:nvSpPr>
-          <p:cNvPr id="3" name="Text 1"/>
-          <p:cNvSpPr/>
-          <p:nvPr/>
-        </p:nvSpPr>
-        <p:spPr>
-          <a:xfrm>
-            <a:off x="457200" y="1005840"/>
-            <a:ext cx="11277295" cy="731520"/>
-          </a:xfrm>
-          <a:prstGeom prst="rect">
-            <a:avLst/>
-          </a:prstGeom>
-          <a:noFill/>
-          <a:ln/>
-        </p:spPr>
-        <p:txBody>
-          <a:bodyPr wrap="square" lIns="0" tIns="0" rIns="0" bIns="0" rtlCol="0" anchor="ctr"/>
-          <a:lstStyle/>
-          <a:p>
-            <a:pPr algn="ctr" indent="0" marL="0">
-              <a:buNone/>
-            </a:pPr>
-            <a:r>
-              <a:rPr lang="en-US" sz="3600" b="1" dirty="0">
-                <a:solidFill>
-                  <a:srgbClr val="990011"/>
-                </a:solidFill>
-                <a:latin typeface="Times New Roman" pitchFamily="34" charset="0"/>
-                <a:ea typeface="Times New Roman" pitchFamily="34" charset="-122"/>
-                <a:cs typeface="Times New Roman" pitchFamily="34" charset="-120"/>
-              </a:rPr>
               <a:t>Official Logbook (1/2)</a:t>
             </a:r>
             <a:endParaRPr lang="en-US" sz="3600" dirty="0"/>
@@ -22801,7 +23848,7 @@
       </p:sp>
       <p:graphicFrame>
         <p:nvGraphicFramePr>
-          <p:cNvPr id="61" name="Table 0"/>
+          <p:cNvPr id="64" name="Table 0"/>
           <p:cNvGraphicFramePr>
             <a:graphicFrameLocks noGrp="1"/>
           </p:cNvGraphicFramePr>
@@ -23423,7 +24470,7 @@
             <a:pPr algn="ctr"/>
             <a:fld id="{F7021451-1387-4CA6-816F-3879F97B5CBC}" type="slidenum">
               <a:rPr b="1" lang="en-US"/>
-              <a:t>60</a:t>
+              <a:t>63</a:t>
             </a:fld>
             <a:endParaRPr lang="en-US"/>
           </a:p>
@@ -23437,9 +24484,9 @@
 </p:sld>
 </file>
 
-<file path=ppt/slides/slide61.xml><?xml version="1.0" encoding="utf-8"?>
+<file path=ppt/slides/slide64.xml><?xml version="1.0" encoding="utf-8"?>
 <p:sld xmlns:a="http://schemas.openxmlformats.org/drawingml/2006/main" xmlns:r="http://schemas.openxmlformats.org/officeDocument/2006/relationships" xmlns:p="http://schemas.openxmlformats.org/presentationml/2006/main">
-  <p:cSld name="Slide 61">
+  <p:cSld name="Slide 64">
     <p:spTree>
       <p:nvGrpSpPr>
         <p:cNvPr id="1" name=""/>
@@ -23534,7 +24581,7 @@
       </p:sp>
       <p:graphicFrame>
         <p:nvGraphicFramePr>
-          <p:cNvPr id="62" name="Table 0"/>
+          <p:cNvPr id="65" name="Table 0"/>
           <p:cNvGraphicFramePr>
             <a:graphicFrameLocks noGrp="1"/>
           </p:cNvGraphicFramePr>
@@ -23644,7 +24691,7 @@
                           <a:ea typeface="Calibri" pitchFamily="34" charset="-122"/>
                           <a:cs typeface="Calibri" pitchFamily="34" charset="-120"/>
                         </a:rPr>
-                        <a:t>DEFINITIONS; Weather Observation; Weather Prediction; Weather Modification; Weather Mapping: the Synoptic Chart.</a:t>
+                        <a:t>DEFINITIONS; Elements Observed at a Weather Station; Upper-Air and Remote Observation; Weather Prediction; Weather Modification; Weather Mapping: the Synoptic Chart.</a:t>
                       </a:r>
                       <a:endParaRPr lang="en-US" sz="1600" dirty="0">
                         <a:latin typeface="Calibri" charset="0"/>
@@ -24294,7 +25341,7 @@
             <a:pPr algn="ctr"/>
             <a:fld id="{F7021451-1387-4CA6-816F-3879F97B5CBC}" type="slidenum">
               <a:rPr b="1" lang="en-US"/>
-              <a:t>61</a:t>
+              <a:t>64</a:t>
             </a:fld>
             <a:endParaRPr lang="en-US"/>
           </a:p>
@@ -24308,9 +25355,9 @@
 </p:sld>
 </file>
 
-<file path=ppt/slides/slide62.xml><?xml version="1.0" encoding="utf-8"?>
+<file path=ppt/slides/slide65.xml><?xml version="1.0" encoding="utf-8"?>
 <p:sld xmlns:a="http://schemas.openxmlformats.org/drawingml/2006/main" xmlns:r="http://schemas.openxmlformats.org/officeDocument/2006/relationships" xmlns:p="http://schemas.openxmlformats.org/presentationml/2006/main">
-  <p:cSld name="Slide 62">
+  <p:cSld name="Slide 65">
     <p:spTree>
       <p:nvGrpSpPr>
         <p:cNvPr id="1" name=""/>
@@ -24619,7 +25666,7 @@
             <a:pPr algn="ctr"/>
             <a:fld id="{F7021451-1387-4CA6-816F-3879F97B5CBC}" type="slidenum">
               <a:rPr b="1" lang="en-US"/>
-              <a:t>62</a:t>
+              <a:t>65</a:t>
             </a:fld>
             <a:endParaRPr lang="en-US"/>
           </a:p>
@@ -24633,9 +25680,9 @@
 </p:sld>
 </file>
 
-<file path=ppt/slides/slide63.xml><?xml version="1.0" encoding="utf-8"?>
+<file path=ppt/slides/slide66.xml><?xml version="1.0" encoding="utf-8"?>
 <p:sld xmlns:a="http://schemas.openxmlformats.org/drawingml/2006/main" xmlns:r="http://schemas.openxmlformats.org/officeDocument/2006/relationships" xmlns:p="http://schemas.openxmlformats.org/presentationml/2006/main">
-  <p:cSld name="Slide 63">
+  <p:cSld name="Slide 66">
     <p:spTree>
       <p:nvGrpSpPr>
         <p:cNvPr id="1" name=""/>
@@ -24706,7 +25753,7 @@
         <p:spPr>
           <a:xfrm>
             <a:off x="0" y="658368"/>
-            <a:ext cx="5120640" cy="5833872"/>
+            <a:ext cx="3840480" cy="5833872"/>
           </a:xfrm>
           <a:prstGeom prst="rect">
             <a:avLst/>
@@ -24721,8 +25768,8 @@
         </p:nvSpPr>
         <p:spPr>
           <a:xfrm>
-            <a:off x="5349240" y="1005840"/>
-            <a:ext cx="6522415" cy="731520"/>
+            <a:off x="4069080" y="1005840"/>
+            <a:ext cx="7802575" cy="731520"/>
           </a:xfrm>
           <a:prstGeom prst="rect">
             <a:avLst/>
@@ -24762,8 +25809,8 @@
         </p:nvSpPr>
         <p:spPr>
           <a:xfrm>
-            <a:off x="5349240" y="1783080"/>
-            <a:ext cx="6522415" cy="4663440"/>
+            <a:off x="4069080" y="1783080"/>
+            <a:ext cx="7802575" cy="4663440"/>
           </a:xfrm>
           <a:prstGeom prst="rect">
             <a:avLst/>
@@ -24875,6 +25922,27 @@
                 <a:ea typeface="Calibri" pitchFamily="34" charset="-122"/>
                 <a:cs typeface="Calibri" pitchFamily="34" charset="-120"/>
               </a:rPr>
+              <a:t>Photo, board summary (Rainfall (precipitation)): “Sarasota - Rain Gauge (in 23rd Year)” by roger4336, CC BY-SA 2.0, via Flickr (https://www.flickr.com/photos/24736216@N07/8370429863)</a:t>
+            </a:r>
+            <a:endParaRPr lang="en-US" sz="1800" dirty="0"/>
+          </a:p>
+          <a:p>
+            <a:pPr algn="l" marL="342900" indent="-342900">
+              <a:spcAft>
+                <a:spcPts val="800"/>
+              </a:spcAft>
+              <a:buSzPct val="100000"/>
+              <a:buChar char="•"/>
+            </a:pPr>
+            <a:r>
+              <a:rPr lang="en-US" sz="1800" dirty="0">
+                <a:solidFill>
+                  <a:srgbClr val="111111"/>
+                </a:solidFill>
+                <a:latin typeface="Calibri" pitchFamily="34" charset="0"/>
+                <a:ea typeface="Calibri" pitchFamily="34" charset="-122"/>
+                <a:cs typeface="Calibri" pitchFamily="34" charset="-120"/>
+              </a:rPr>
               <a:t>Diagrams and animations: drawn for this lesson (Geography Department).</a:t>
             </a:r>
             <a:endParaRPr lang="en-US" sz="1800" dirty="0"/>
@@ -24923,7 +25991,7 @@
             <a:pPr algn="ctr"/>
             <a:fld id="{F7021451-1387-4CA6-816F-3879F97B5CBC}" type="slidenum">
               <a:rPr b="1" lang="en-US"/>
-              <a:t>63</a:t>
+              <a:t>66</a:t>
             </a:fld>
             <a:endParaRPr lang="en-US"/>
           </a:p>

--- a/lecons/LSA/Meteorology/19_LSA_MET_FS02_Weather_Observation_Prediction_Modification_and_Mapping.pptx
+++ b/lecons/LSA/Meteorology/19_LSA_MET_FS02_Weather_Observation_Prediction_Modification_and_Mapping.pptx
@@ -5495,7 +5495,7 @@
           <a:p>
             <a:r>
               <a:rPr lang="en-US" dirty="0"/>
-              <a:t>For your homework: Name the two air masses that affect the climate of Cameroon. We shall correct it at the beginning of our next lesson.</a:t>
+              <a:t>For your homework: Define hydrology. We shall correct it at the beginning of our next lesson.</a:t>
             </a:r>
             <a:endParaRPr lang="en-US" dirty="0"/>
           </a:p>
@@ -5583,7 +5583,7 @@
           <a:p>
             <a:r>
               <a:rPr lang="en-US" dirty="0"/>
-              <a:t>Our next lesson will be on Further Study 3: The Climate of Cameroon. Thank you for your attention, and see you next time.</a:t>
+              <a:t>Our next lesson will be on Lesson 22: Introduction to Hydrology. Thank you for your attention, and see you next time.</a:t>
             </a:r>
             <a:endParaRPr lang="en-US" dirty="0"/>
           </a:p>
@@ -22303,7 +22303,7 @@
                 <a:ea typeface="Times New Roman" pitchFamily="34" charset="-122"/>
                 <a:cs typeface="Times New Roman" pitchFamily="34" charset="-120"/>
               </a:rPr>
-              <a:t>Name the two air masses that affect the climate of Cameroon.</a:t>
+              <a:t>Define hydrology.</a:t>
             </a:r>
             <a:endParaRPr lang="en-US" sz="4000" dirty="0"/>
           </a:p>
@@ -22542,7 +22542,7 @@
                 <a:ea typeface="Times New Roman" pitchFamily="34" charset="-122"/>
                 <a:cs typeface="Times New Roman" pitchFamily="34" charset="-120"/>
               </a:rPr>
-              <a:t>Further Study 3: The Climate of Cameroon</a:t>
+              <a:t>Lesson 22: Introduction to Hydrology</a:t>
             </a:r>
             <a:endParaRPr lang="en-US" sz="4000" dirty="0"/>
           </a:p>
@@ -24967,7 +24967,7 @@
                           <a:ea typeface="Calibri" pitchFamily="34" charset="-122"/>
                           <a:cs typeface="Calibri" pitchFamily="34" charset="-120"/>
                         </a:rPr>
-                        <a:t>Name the two air masses that affect the climate of Cameroon.</a:t>
+                        <a:t>Define hydrology.</a:t>
                       </a:r>
                       <a:endParaRPr lang="en-US" sz="1600" dirty="0">
                         <a:latin typeface="Calibri" charset="0"/>
